--- a/SRIM/Accomplish/accomplish_Wrapper/LOCAL/docs/SRIM_Master_Deck.pptx
+++ b/SRIM/Accomplish/accomplish_Wrapper/LOCAL/docs/SRIM_Master_Deck.pptx
@@ -21,6 +21,10 @@
     <p:sldId id="269" r:id="rId20"/>
     <p:sldId id="270" r:id="rId21"/>
     <p:sldId id="271" r:id="rId22"/>
+    <p:sldId id="272" r:id="rId23"/>
+    <p:sldId id="273" r:id="rId24"/>
+    <p:sldId id="274" r:id="rId25"/>
+    <p:sldId id="275" r:id="rId26"/>
   </p:sldIdLst>
   <p:sldSz cx="12191695" cy="6858000" type="screen4x3"/>
   <p:notesSz cx="6858000" cy="9144000"/>
@@ -3276,7 +3280,7 @@
                 </a:solidFill>
                 <a:latin typeface="Segoe UI"/>
               </a:rPr>
-              <a:t>Migration · remediation · setup automation · WhatsApp + Docker</a:t>
+              <a:t>Migration · reverse-engineering · remediation · setup · WhatsApp + Docker</a:t>
             </a:r>
           </a:p>
           <a:p>
@@ -3332,7 +3336,7 @@
         <p:spPr>
           <a:xfrm>
             <a:off x="0" y="0"/>
-            <a:ext cx="12191695" cy="1097280"/>
+            <a:ext cx="12191695" cy="1078992"/>
           </a:xfrm>
           <a:prstGeom prst="rect">
             <a:avLst/>
@@ -3375,7 +3379,7 @@
         </p:nvSpPr>
         <p:spPr>
           <a:xfrm>
-            <a:off x="0" y="1097280"/>
+            <a:off x="0" y="1078992"/>
             <a:ext cx="12191695" cy="54864"/>
           </a:xfrm>
           <a:prstGeom prst="rect">
@@ -3420,7 +3424,7 @@
         <p:spPr>
           <a:xfrm>
             <a:off x="548640" y="109728"/>
-            <a:ext cx="11064240" cy="411480"/>
+            <a:ext cx="11064240" cy="384048"/>
           </a:xfrm>
           <a:prstGeom prst="rect">
             <a:avLst/>
@@ -3445,7 +3449,7 @@
                 </a:solidFill>
                 <a:latin typeface="Segoe UI"/>
               </a:rPr>
-              <a:t>LOCAL MODELS</a:t>
+              <a:t>NEW FEATURES  ·  NAGABHUSHANA</a:t>
             </a:r>
           </a:p>
         </p:txBody>
@@ -3458,8 +3462,8 @@
         </p:nvSpPr>
         <p:spPr>
           <a:xfrm>
-            <a:off x="548640" y="411480"/>
-            <a:ext cx="11064240" cy="621792"/>
+            <a:off x="548640" y="402336"/>
+            <a:ext cx="11064240" cy="603504"/>
           </a:xfrm>
           <a:prstGeom prst="rect">
             <a:avLst/>
@@ -3478,13 +3482,13 @@
               </a:spcAft>
             </a:pPr>
             <a:r>
-              <a:rPr sz="2800" b="1">
+              <a:rPr sz="2700" b="1">
                 <a:solidFill>
                   <a:srgbClr val="FFFFFF"/>
                 </a:solidFill>
                 <a:latin typeface="Segoe UI"/>
               </a:rPr>
-              <a:t>Local model UX</a:t>
+              <a:t>Delivered in SRIM</a:t>
             </a:r>
           </a:p>
         </p:txBody>
@@ -3497,8 +3501,8 @@
         </p:nvSpPr>
         <p:spPr>
           <a:xfrm>
-            <a:off x="731520" y="1417320"/>
-            <a:ext cx="10789920" cy="4937760"/>
+            <a:off x="731520" y="1371600"/>
+            <a:ext cx="10789920" cy="5029200"/>
           </a:xfrm>
           <a:prstGeom prst="rect">
             <a:avLst/>
@@ -3513,11 +3517,11 @@
           <a:p>
             <a:pPr algn="l">
               <a:spcAft>
-                <a:spcPts val="1000"/>
-              </a:spcAft>
-            </a:pPr>
-            <a:r>
-              <a:rPr sz="1700" b="1">
+                <a:spcPts val="900"/>
+              </a:spcAft>
+            </a:pPr>
+            <a:r>
+              <a:rPr sz="1600" b="1">
                 <a:solidFill>
                   <a:srgbClr val="1E6FE0"/>
                 </a:solidFill>
@@ -3526,23 +3530,23 @@
               <a:t>•  </a:t>
             </a:r>
             <a:r>
-              <a:rPr sz="1700" b="0">
+              <a:rPr sz="1600" b="0">
                 <a:solidFill>
                   <a:srgbClr val="4C596B"/>
                 </a:solidFill>
                 <a:latin typeface="Segoe UI"/>
               </a:rPr>
-              <a:t>Device checker sits above downloads</a:t>
-            </a:r>
-          </a:p>
-          <a:p>
-            <a:pPr algn="l">
-              <a:spcAft>
-                <a:spcPts val="1000"/>
-              </a:spcAft>
-            </a:pPr>
-            <a:r>
-              <a:rPr sz="1700" b="1">
+              <a:t>Centralized addresses (migration-proof)</a:t>
+            </a:r>
+          </a:p>
+          <a:p>
+            <a:pPr algn="l">
+              <a:spcAft>
+                <a:spcPts val="900"/>
+              </a:spcAft>
+            </a:pPr>
+            <a:r>
+              <a:rPr sz="1600" b="1">
                 <a:solidFill>
                   <a:srgbClr val="1E6FE0"/>
                 </a:solidFill>
@@ -3551,23 +3555,23 @@
               <a:t>•  </a:t>
             </a:r>
             <a:r>
-              <a:rPr sz="1700" b="0">
+              <a:rPr sz="1600" b="0">
                 <a:solidFill>
                   <a:srgbClr val="4C596B"/>
                 </a:solidFill>
                 <a:latin typeface="Segoe UI"/>
               </a:rPr>
-              <a:t>Download box: idle / downloading / installed / failed</a:t>
-            </a:r>
-          </a:p>
-          <a:p>
-            <a:pPr algn="l">
-              <a:spcAft>
-                <a:spcPts val="1000"/>
-              </a:spcAft>
-            </a:pPr>
-            <a:r>
-              <a:rPr sz="1700" b="1">
+              <a:t>DigiBull chat rebrand + motion polish</a:t>
+            </a:r>
+          </a:p>
+          <a:p>
+            <a:pPr algn="l">
+              <a:spcAft>
+                <a:spcPts val="900"/>
+              </a:spcAft>
+            </a:pPr>
+            <a:r>
+              <a:rPr sz="1600" b="1">
                 <a:solidFill>
                   <a:srgbClr val="1E6FE0"/>
                 </a:solidFill>
@@ -3576,23 +3580,23 @@
               <a:t>•  </a:t>
             </a:r>
             <a:r>
-              <a:rPr sz="1700" b="0">
+              <a:rPr sz="1600" b="0">
                 <a:solidFill>
                   <a:srgbClr val="4C596B"/>
                 </a:solidFill>
                 <a:latin typeface="Segoe UI"/>
               </a:rPr>
-              <a:t>Runtime targets: Auto · GPU · WebGPU · CPU</a:t>
-            </a:r>
-          </a:p>
-          <a:p>
-            <a:pPr algn="l">
-              <a:spcAft>
-                <a:spcPts val="1000"/>
-              </a:spcAft>
-            </a:pPr>
-            <a:r>
-              <a:rPr sz="1700" b="1">
+              <a:t>Auto model selector (task-aware routing)</a:t>
+            </a:r>
+          </a:p>
+          <a:p>
+            <a:pPr algn="l">
+              <a:spcAft>
+                <a:spcPts val="900"/>
+              </a:spcAft>
+            </a:pPr>
+            <a:r>
+              <a:rPr sz="1600" b="1">
                 <a:solidFill>
                   <a:srgbClr val="1E6FE0"/>
                 </a:solidFill>
@@ -3601,13 +3605,88 @@
               <a:t>•  </a:t>
             </a:r>
             <a:r>
-              <a:rPr sz="1700" b="0">
+              <a:rPr sz="1600" b="0">
                 <a:solidFill>
                   <a:srgbClr val="4C596B"/>
                 </a:solidFill>
                 <a:latin typeface="Segoe UI"/>
               </a:rPr>
-              <a:t>Automatic GPU selection for GPU modes</a:t>
+              <a:t>Inline AI question card</a:t>
+            </a:r>
+          </a:p>
+          <a:p>
+            <a:pPr algn="l">
+              <a:spcAft>
+                <a:spcPts val="900"/>
+              </a:spcAft>
+            </a:pPr>
+            <a:r>
+              <a:rPr sz="1600" b="1">
+                <a:solidFill>
+                  <a:srgbClr val="1E6FE0"/>
+                </a:solidFill>
+                <a:latin typeface="Segoe UI"/>
+              </a:rPr>
+              <a:t>•  </a:t>
+            </a:r>
+            <a:r>
+              <a:rPr sz="1600" b="0">
+                <a:solidFill>
+                  <a:srgbClr val="4C596B"/>
+                </a:solidFill>
+                <a:latin typeface="Segoe UI"/>
+              </a:rPr>
+              <a:t>LOCAL LLM advisor (specs → model picks) + model downloads</a:t>
+            </a:r>
+          </a:p>
+          <a:p>
+            <a:pPr algn="l">
+              <a:spcAft>
+                <a:spcPts val="900"/>
+              </a:spcAft>
+            </a:pPr>
+            <a:r>
+              <a:rPr sz="1600" b="1">
+                <a:solidFill>
+                  <a:srgbClr val="1E6FE0"/>
+                </a:solidFill>
+                <a:latin typeface="Segoe UI"/>
+              </a:rPr>
+              <a:t>•  </a:t>
+            </a:r>
+            <a:r>
+              <a:rPr sz="1600" b="0">
+                <a:solidFill>
+                  <a:srgbClr val="4C596B"/>
+                </a:solidFill>
+                <a:latin typeface="Segoe UI"/>
+              </a:rPr>
+              <a:t>Appearance: themes / accents / motion · Test-automation skill</a:t>
+            </a:r>
+          </a:p>
+          <a:p>
+            <a:pPr algn="l">
+              <a:spcAft>
+                <a:spcPts val="900"/>
+              </a:spcAft>
+            </a:pPr>
+            <a:r>
+              <a:rPr sz="1600" b="1">
+                <a:solidFill>
+                  <a:srgbClr val="1E6FE0"/>
+                </a:solidFill>
+                <a:latin typeface="Segoe UI"/>
+              </a:rPr>
+              <a:t>•  </a:t>
+            </a:r>
+            <a:r>
+              <a:rPr sz="1600" b="0">
+                <a:solidFill>
+                  <a:srgbClr val="4C596B"/>
+                </a:solidFill>
+                <a:latin typeface="Segoe UI"/>
+              </a:rPr>
+              <a:t>WhatsApp integration · MCP (in/out)</a:t>
             </a:r>
           </a:p>
         </p:txBody>
@@ -3647,7 +3726,7 @@
         <p:spPr>
           <a:xfrm>
             <a:off x="0" y="0"/>
-            <a:ext cx="12191695" cy="1097280"/>
+            <a:ext cx="12191695" cy="1078992"/>
           </a:xfrm>
           <a:prstGeom prst="rect">
             <a:avLst/>
@@ -3690,7 +3769,7 @@
         </p:nvSpPr>
         <p:spPr>
           <a:xfrm>
-            <a:off x="0" y="1097280"/>
+            <a:off x="0" y="1078992"/>
             <a:ext cx="12191695" cy="54864"/>
           </a:xfrm>
           <a:prstGeom prst="rect">
@@ -3735,7 +3814,7 @@
         <p:spPr>
           <a:xfrm>
             <a:off x="548640" y="109728"/>
-            <a:ext cx="11064240" cy="411480"/>
+            <a:ext cx="11064240" cy="384048"/>
           </a:xfrm>
           <a:prstGeom prst="rect">
             <a:avLst/>
@@ -3760,7 +3839,7 @@
                 </a:solidFill>
                 <a:latin typeface="Segoe UI"/>
               </a:rPr>
-              <a:t>MCP</a:t>
+              <a:t>COVERAGE</a:t>
             </a:r>
           </a:p>
         </p:txBody>
@@ -3773,8 +3852,8 @@
         </p:nvSpPr>
         <p:spPr>
           <a:xfrm>
-            <a:off x="548640" y="411480"/>
-            <a:ext cx="11064240" cy="621792"/>
+            <a:off x="548640" y="402336"/>
+            <a:ext cx="11064240" cy="603504"/>
           </a:xfrm>
           <a:prstGeom prst="rect">
             <a:avLst/>
@@ -3793,13 +3872,13 @@
               </a:spcAft>
             </a:pPr>
             <a:r>
-              <a:rPr sz="2800" b="1">
+              <a:rPr sz="2700" b="1">
                 <a:solidFill>
                   <a:srgbClr val="FFFFFF"/>
                 </a:solidFill>
                 <a:latin typeface="Segoe UI"/>
               </a:rPr>
-              <a:t>Two directions</a:t>
+              <a:t>Feature buckets</a:t>
             </a:r>
           </a:p>
         </p:txBody>
@@ -3812,8 +3891,8 @@
         </p:nvSpPr>
         <p:spPr>
           <a:xfrm>
-            <a:off x="731520" y="1417320"/>
-            <a:ext cx="10789920" cy="4937760"/>
+            <a:off x="731520" y="1371600"/>
+            <a:ext cx="10789920" cy="5029200"/>
           </a:xfrm>
           <a:prstGeom prst="rect">
             <a:avLst/>
@@ -3828,7 +3907,7 @@
           <a:p>
             <a:pPr algn="l">
               <a:spcAft>
-                <a:spcPts val="1000"/>
+                <a:spcPts val="900"/>
               </a:spcAft>
             </a:pPr>
             <a:r>
@@ -3847,7 +3926,7 @@
                 </a:solidFill>
                 <a:latin typeface="Segoe UI"/>
               </a:rPr>
-              <a:t>Outbound: </a:t>
+              <a:t>Bucket A (24): </a:t>
             </a:r>
             <a:r>
               <a:rPr sz="1700" b="0">
@@ -3856,13 +3935,13 @@
                 </a:solidFill>
                 <a:latin typeface="Segoe UI"/>
               </a:rPr>
-              <a:t>add MCP servers → the agent uses them</a:t>
-            </a:r>
-          </a:p>
-          <a:p>
-            <a:pPr algn="l">
-              <a:spcAft>
-                <a:spcPts val="1000"/>
+              <a:t>done</a:t>
+            </a:r>
+          </a:p>
+          <a:p>
+            <a:pPr algn="l">
+              <a:spcAft>
+                <a:spcPts val="900"/>
               </a:spcAft>
             </a:pPr>
             <a:r>
@@ -3875,19 +3954,28 @@
               <a:t>•  </a:t>
             </a:r>
             <a:r>
+              <a:rPr sz="1700" b="1">
+                <a:solidFill>
+                  <a:srgbClr val="0B1F3A"/>
+                </a:solidFill>
+                <a:latin typeface="Segoe UI"/>
+              </a:rPr>
+              <a:t>Bucket B portable: </a:t>
+            </a:r>
+            <a:r>
               <a:rPr sz="1700" b="0">
                 <a:solidFill>
                   <a:srgbClr val="4C596B"/>
                 </a:solidFill>
                 <a:latin typeface="Segoe UI"/>
               </a:rPr>
-              <a:t>Pre-seeded: Dify, FastMCP, MCP Jungle, Postgres, Superset…</a:t>
-            </a:r>
-          </a:p>
-          <a:p>
-            <a:pPr algn="l">
-              <a:spcAft>
-                <a:spcPts val="1000"/>
+              <a:t>done</a:t>
+            </a:r>
+          </a:p>
+          <a:p>
+            <a:pPr algn="l">
+              <a:spcAft>
+                <a:spcPts val="900"/>
               </a:spcAft>
             </a:pPr>
             <a:r>
@@ -3906,7 +3994,7 @@
                 </a:solidFill>
                 <a:latin typeface="Segoe UI"/>
               </a:rPr>
-              <a:t>Inbound: </a:t>
+              <a:t>HF-local UI: </a:t>
             </a:r>
             <a:r>
               <a:rPr sz="1700" b="0">
@@ -3915,13 +4003,13 @@
                 </a:solidFill>
                 <a:latin typeface="Segoe UI"/>
               </a:rPr>
-              <a:t>external workflows call /rpc</a:t>
-            </a:r>
-          </a:p>
-          <a:p>
-            <a:pPr algn="l">
-              <a:spcAft>
-                <a:spcPts val="1000"/>
+              <a:t>downloads / runtime wired</a:t>
+            </a:r>
+          </a:p>
+          <a:p>
+            <a:pPr algn="l">
+              <a:spcAft>
+                <a:spcPts val="900"/>
               </a:spcAft>
             </a:pPr>
             <a:r>
@@ -3934,13 +4022,90 @@
               <a:t>•  </a:t>
             </a:r>
             <a:r>
+              <a:rPr sz="1700" b="1">
+                <a:solidFill>
+                  <a:srgbClr val="0B1F3A"/>
+                </a:solidFill>
+                <a:latin typeface="Segoe UI"/>
+              </a:rPr>
+              <a:t>Native gaps: </a:t>
+            </a:r>
+            <a:r>
               <a:rPr sz="1700" b="0">
                 <a:solidFill>
                   <a:srgbClr val="4C596B"/>
                 </a:solidFill>
                 <a:latin typeface="Segoe UI"/>
               </a:rPr>
-              <a:t>Bearer key · loopback-only · opt-in flag</a:t>
+              <a:t>per-GPU index, gcloud APIs</a:t>
+            </a:r>
+          </a:p>
+          <a:p>
+            <a:pPr algn="l">
+              <a:spcAft>
+                <a:spcPts val="900"/>
+              </a:spcAft>
+            </a:pPr>
+            <a:r>
+              <a:rPr sz="1700" b="1">
+                <a:solidFill>
+                  <a:srgbClr val="1E6FE0"/>
+                </a:solidFill>
+                <a:latin typeface="Segoe UI"/>
+              </a:rPr>
+              <a:t>•  </a:t>
+            </a:r>
+            <a:r>
+              <a:rPr sz="1700" b="1">
+                <a:solidFill>
+                  <a:srgbClr val="0B1F3A"/>
+                </a:solidFill>
+                <a:latin typeface="Segoe UI"/>
+              </a:rPr>
+              <a:t>0.4.14 features: </a:t>
+            </a:r>
+            <a:r>
+              <a:rPr sz="1700" b="0">
+                <a:solidFill>
+                  <a:srgbClr val="4C596B"/>
+                </a:solidFill>
+                <a:latin typeface="Segoe UI"/>
+              </a:rPr>
+              <a:t>need source</a:t>
+            </a:r>
+          </a:p>
+          <a:p>
+            <a:pPr algn="l">
+              <a:spcAft>
+                <a:spcPts val="900"/>
+              </a:spcAft>
+            </a:pPr>
+            <a:r>
+              <a:rPr sz="1700" b="1">
+                <a:solidFill>
+                  <a:srgbClr val="1E6FE0"/>
+                </a:solidFill>
+                <a:latin typeface="Segoe UI"/>
+              </a:rPr>
+              <a:t>•  </a:t>
+            </a:r>
+            <a:r>
+              <a:rPr sz="1700" b="1">
+                <a:solidFill>
+                  <a:srgbClr val="0B1F3A"/>
+                </a:solidFill>
+                <a:latin typeface="Segoe UI"/>
+              </a:rPr>
+              <a:t>Desktop-only (tray/updater): </a:t>
+            </a:r>
+            <a:r>
+              <a:rPr sz="1700" b="0">
+                <a:solidFill>
+                  <a:srgbClr val="4C596B"/>
+                </a:solidFill>
+                <a:latin typeface="Segoe UI"/>
+              </a:rPr>
+              <a:t>N/A</a:t>
             </a:r>
           </a:p>
         </p:txBody>
@@ -3980,7 +4145,7 @@
         <p:spPr>
           <a:xfrm>
             <a:off x="0" y="0"/>
-            <a:ext cx="12191695" cy="1097280"/>
+            <a:ext cx="12191695" cy="1078992"/>
           </a:xfrm>
           <a:prstGeom prst="rect">
             <a:avLst/>
@@ -4023,7 +4188,7 @@
         </p:nvSpPr>
         <p:spPr>
           <a:xfrm>
-            <a:off x="0" y="1097280"/>
+            <a:off x="0" y="1078992"/>
             <a:ext cx="12191695" cy="54864"/>
           </a:xfrm>
           <a:prstGeom prst="rect">
@@ -4068,7 +4233,7 @@
         <p:spPr>
           <a:xfrm>
             <a:off x="548640" y="109728"/>
-            <a:ext cx="11064240" cy="411480"/>
+            <a:ext cx="11064240" cy="384048"/>
           </a:xfrm>
           <a:prstGeom prst="rect">
             <a:avLst/>
@@ -4093,7 +4258,7 @@
                 </a:solidFill>
                 <a:latin typeface="Segoe UI"/>
               </a:rPr>
-              <a:t>NEW · ONE-CLICK SETUP</a:t>
+              <a:t>DIGIBULL UI</a:t>
             </a:r>
           </a:p>
         </p:txBody>
@@ -4106,8 +4271,8 @@
         </p:nvSpPr>
         <p:spPr>
           <a:xfrm>
-            <a:off x="548640" y="411480"/>
-            <a:ext cx="11064240" cy="621792"/>
+            <a:off x="548640" y="402336"/>
+            <a:ext cx="11064240" cy="603504"/>
           </a:xfrm>
           <a:prstGeom prst="rect">
             <a:avLst/>
@@ -4126,13 +4291,13 @@
               </a:spcAft>
             </a:pPr>
             <a:r>
-              <a:rPr sz="2800" b="1">
+              <a:rPr sz="2700" b="1">
                 <a:solidFill>
                   <a:srgbClr val="FFFFFF"/>
                 </a:solidFill>
                 <a:latin typeface="Segoe UI"/>
               </a:rPr>
-              <a:t>Install &amp; launch on any Windows laptop</a:t>
+              <a:t>Home &amp; model menu</a:t>
             </a:r>
           </a:p>
         </p:txBody>
@@ -4145,8 +4310,8 @@
         </p:nvSpPr>
         <p:spPr>
           <a:xfrm>
-            <a:off x="731520" y="1417320"/>
-            <a:ext cx="6949440" cy="4937760"/>
+            <a:off x="731520" y="1371600"/>
+            <a:ext cx="10789920" cy="5029200"/>
           </a:xfrm>
           <a:prstGeom prst="rect">
             <a:avLst/>
@@ -4161,7 +4326,7 @@
           <a:p>
             <a:pPr algn="l">
               <a:spcAft>
-                <a:spcPts val="1000"/>
+                <a:spcPts val="900"/>
               </a:spcAft>
             </a:pPr>
             <a:r>
@@ -4174,13 +4339,29 @@
               <a:t>•  </a:t>
             </a:r>
             <a:r>
+              <a:rPr sz="1700" b="0">
+                <a:solidFill>
+                  <a:srgbClr val="4C596B"/>
+                </a:solidFill>
+                <a:latin typeface="Segoe UI"/>
+              </a:rPr>
+              <a:t>Home prompt: “What will DigiBull handle today?”</a:t>
+            </a:r>
+          </a:p>
+          <a:p>
+            <a:pPr algn="l">
+              <a:spcAft>
+                <a:spcPts val="900"/>
+              </a:spcAft>
+            </a:pPr>
+            <a:r>
               <a:rPr sz="1700" b="1">
                 <a:solidFill>
-                  <a:srgbClr val="0B1F3A"/>
-                </a:solidFill>
-                <a:latin typeface="Segoe UI"/>
-              </a:rPr>
-              <a:t>Self-contained </a:t>
+                  <a:srgbClr val="1E6FE0"/>
+                </a:solidFill>
+                <a:latin typeface="Segoe UI"/>
+              </a:rPr>
+              <a:t>•  </a:t>
             </a:r>
             <a:r>
               <a:rPr sz="1700" b="0">
@@ -4189,13 +4370,13 @@
                 </a:solidFill>
                 <a:latin typeface="Segoe UI"/>
               </a:rPr>
-              <a:t>— bundled Node 24.15.0, no Node/winget needed</a:t>
-            </a:r>
-          </a:p>
-          <a:p>
-            <a:pPr algn="l">
-              <a:spcAft>
-                <a:spcPts val="1000"/>
+              <a:t>Model menu: Auto · by task type</a:t>
+            </a:r>
+          </a:p>
+          <a:p>
+            <a:pPr algn="l">
+              <a:spcAft>
+                <a:spcPts val="900"/>
               </a:spcAft>
             </a:pPr>
             <a:r>
@@ -4208,13 +4389,29 @@
               <a:t>•  </a:t>
             </a:r>
             <a:r>
+              <a:rPr sz="1700" b="0">
+                <a:solidFill>
+                  <a:srgbClr val="4C596B"/>
+                </a:solidFill>
+                <a:latin typeface="Segoe UI"/>
+              </a:rPr>
+              <a:t>Auto routes simple chat → fast models; code/research → stronger</a:t>
+            </a:r>
+          </a:p>
+          <a:p>
+            <a:pPr algn="l">
+              <a:spcAft>
+                <a:spcPts val="900"/>
+              </a:spcAft>
+            </a:pPr>
+            <a:r>
               <a:rPr sz="1700" b="1">
                 <a:solidFill>
-                  <a:srgbClr val="0B1F3A"/>
-                </a:solidFill>
-                <a:latin typeface="Segoe UI"/>
-              </a:rPr>
-              <a:t>Auto-unblock </a:t>
+                  <a:srgbClr val="1E6FE0"/>
+                </a:solidFill>
+                <a:latin typeface="Segoe UI"/>
+              </a:rPr>
+              <a:t>•  </a:t>
             </a:r>
             <a:r>
               <a:rPr sz="1700" b="0">
@@ -4223,244 +4420,7 @@
                 </a:solidFill>
                 <a:latin typeface="Segoe UI"/>
               </a:rPr>
-              <a:t>— handles ZIP/USB/download 'blocked file' flag</a:t>
-            </a:r>
-          </a:p>
-          <a:p>
-            <a:pPr algn="l">
-              <a:spcAft>
-                <a:spcPts val="1000"/>
-              </a:spcAft>
-            </a:pPr>
-            <a:r>
-              <a:rPr sz="1700" b="1">
-                <a:solidFill>
-                  <a:srgbClr val="1E6FE0"/>
-                </a:solidFill>
-                <a:latin typeface="Segoe UI"/>
-              </a:rPr>
-              <a:t>•  </a:t>
-            </a:r>
-            <a:r>
-              <a:rPr sz="1700" b="1">
-                <a:solidFill>
-                  <a:srgbClr val="0B1F3A"/>
-                </a:solidFill>
-                <a:latin typeface="Segoe UI"/>
-              </a:rPr>
-              <a:t>Clean reinstall </a:t>
-            </a:r>
-            <a:r>
-              <a:rPr sz="1700" b="0">
-                <a:solidFill>
-                  <a:srgbClr val="4C596B"/>
-                </a:solidFill>
-                <a:latin typeface="Segoe UI"/>
-              </a:rPr>
-              <a:t>option + rebuilds better-sqlite3 for Node 24</a:t>
-            </a:r>
-          </a:p>
-          <a:p>
-            <a:pPr algn="l">
-              <a:spcAft>
-                <a:spcPts val="1000"/>
-              </a:spcAft>
-            </a:pPr>
-            <a:r>
-              <a:rPr sz="1700" b="1">
-                <a:solidFill>
-                  <a:srgbClr val="1E6FE0"/>
-                </a:solidFill>
-                <a:latin typeface="Segoe UI"/>
-              </a:rPr>
-              <a:t>•  </a:t>
-            </a:r>
-            <a:r>
-              <a:rPr sz="1700" b="1">
-                <a:solidFill>
-                  <a:srgbClr val="0B1F3A"/>
-                </a:solidFill>
-                <a:latin typeface="Segoe UI"/>
-              </a:rPr>
-              <a:t>LAUNCH frees stale ports </a:t>
-            </a:r>
-            <a:r>
-              <a:rPr sz="1700" b="0">
-                <a:solidFill>
-                  <a:srgbClr val="4C596B"/>
-                </a:solidFill>
-                <a:latin typeface="Segoe UI"/>
-              </a:rPr>
-              <a:t>9234 / 9230 / 5173 before starting</a:t>
-            </a:r>
-          </a:p>
-        </p:txBody>
-      </p:sp>
-      <p:sp>
-        <p:nvSpPr>
-          <p:cNvPr id="7" name="Rounded Rectangle 6">
-            <a:hlinkClick r:id="rId2"/>
-          </p:cNvPr>
-          <p:cNvSpPr/>
-          <p:nvPr/>
-        </p:nvSpPr>
-        <p:spPr>
-          <a:xfrm>
-            <a:off x="7863840" y="1645920"/>
-            <a:ext cx="3749039" cy="868680"/>
-          </a:xfrm>
-          <a:prstGeom prst="roundRect">
-            <a:avLst/>
-          </a:prstGeom>
-          <a:solidFill>
-            <a:srgbClr val="1FA855"/>
-          </a:solidFill>
-          <a:ln>
-            <a:noFill/>
-          </a:ln>
-          <a:effectLst/>
-        </p:spPr>
-        <p:style>
-          <a:lnRef idx="1">
-            <a:schemeClr val="accent1"/>
-          </a:lnRef>
-          <a:fillRef idx="3">
-            <a:schemeClr val="accent1"/>
-          </a:fillRef>
-          <a:effectRef idx="2">
-            <a:schemeClr val="accent1"/>
-          </a:effectRef>
-          <a:fontRef idx="minor">
-            <a:schemeClr val="lt1"/>
-          </a:fontRef>
-        </p:style>
-        <p:txBody>
-          <a:bodyPr rtlCol="0" anchor="ctr" wrap="square"/>
-          <a:lstStyle/>
-          <a:p>
-            <a:pPr algn="ctr"/>
-            <a:r>
-              <a:rPr sz="1800" b="1">
-                <a:solidFill>
-                  <a:srgbClr val="FFFFFF"/>
-                </a:solidFill>
-              </a:rPr>
-              <a:t>▶  INSTALL.bat</a:t>
-            </a:r>
-          </a:p>
-          <a:p>
-            <a:pPr algn="ctr"/>
-            <a:r>
-              <a:rPr sz="1000">
-                <a:solidFill>
-                  <a:srgbClr val="E8FFF0"/>
-                </a:solidFill>
-              </a:rPr>
-              <a:t>click · repo root</a:t>
-            </a:r>
-          </a:p>
-        </p:txBody>
-      </p:sp>
-      <p:sp>
-        <p:nvSpPr>
-          <p:cNvPr id="8" name="Rounded Rectangle 7">
-            <a:hlinkClick r:id="rId3"/>
-          </p:cNvPr>
-          <p:cNvSpPr/>
-          <p:nvPr/>
-        </p:nvSpPr>
-        <p:spPr>
-          <a:xfrm>
-            <a:off x="7863840" y="2743200"/>
-            <a:ext cx="3749039" cy="868680"/>
-          </a:xfrm>
-          <a:prstGeom prst="roundRect">
-            <a:avLst/>
-          </a:prstGeom>
-          <a:solidFill>
-            <a:srgbClr val="1E6FE0"/>
-          </a:solidFill>
-          <a:ln>
-            <a:noFill/>
-          </a:ln>
-          <a:effectLst/>
-        </p:spPr>
-        <p:style>
-          <a:lnRef idx="1">
-            <a:schemeClr val="accent1"/>
-          </a:lnRef>
-          <a:fillRef idx="3">
-            <a:schemeClr val="accent1"/>
-          </a:fillRef>
-          <a:effectRef idx="2">
-            <a:schemeClr val="accent1"/>
-          </a:effectRef>
-          <a:fontRef idx="minor">
-            <a:schemeClr val="lt1"/>
-          </a:fontRef>
-        </p:style>
-        <p:txBody>
-          <a:bodyPr rtlCol="0" anchor="ctr" wrap="square"/>
-          <a:lstStyle/>
-          <a:p>
-            <a:pPr algn="ctr"/>
-            <a:r>
-              <a:rPr sz="1800" b="1">
-                <a:solidFill>
-                  <a:srgbClr val="FFFFFF"/>
-                </a:solidFill>
-              </a:rPr>
-              <a:t>▶  LAUNCH-WEB.bat</a:t>
-            </a:r>
-          </a:p>
-          <a:p>
-            <a:pPr algn="ctr"/>
-            <a:r>
-              <a:rPr sz="1000">
-                <a:solidFill>
-                  <a:srgbClr val="E8FFF0"/>
-                </a:solidFill>
-              </a:rPr>
-              <a:t>click · accomplish-react_</a:t>
-            </a:r>
-          </a:p>
-        </p:txBody>
-      </p:sp>
-      <p:sp>
-        <p:nvSpPr>
-          <p:cNvPr id="9" name="TextBox 8"/>
-          <p:cNvSpPr txBox="1"/>
-          <p:nvPr/>
-        </p:nvSpPr>
-        <p:spPr>
-          <a:xfrm>
-            <a:off x="7863840" y="3703320"/>
-            <a:ext cx="3749039" cy="548640"/>
-          </a:xfrm>
-          <a:prstGeom prst="rect">
-            <a:avLst/>
-          </a:prstGeom>
-          <a:noFill/>
-        </p:spPr>
-        <p:txBody>
-          <a:bodyPr wrap="square" anchor="t">
-            <a:spAutoFit/>
-          </a:bodyPr>
-          <a:lstStyle/>
-          <a:p>
-            <a:pPr algn="ctr">
-              <a:spcAft>
-                <a:spcPts val="600"/>
-              </a:spcAft>
-            </a:pPr>
-            <a:r>
-              <a:rPr sz="1100" b="0">
-                <a:solidFill>
-                  <a:srgbClr val="4C596B"/>
-                </a:solidFill>
-                <a:latin typeface="Segoe UI"/>
-              </a:rPr>
-              <a:t>Buttons open the .bat files directly.</a:t>
+              <a:t>Guardrail: if Auto routing times out, the task still starts</a:t>
             </a:r>
           </a:p>
         </p:txBody>
@@ -4500,7 +4460,7 @@
         <p:spPr>
           <a:xfrm>
             <a:off x="0" y="0"/>
-            <a:ext cx="12191695" cy="1097280"/>
+            <a:ext cx="12191695" cy="1078992"/>
           </a:xfrm>
           <a:prstGeom prst="rect">
             <a:avLst/>
@@ -4543,7 +4503,7 @@
         </p:nvSpPr>
         <p:spPr>
           <a:xfrm>
-            <a:off x="0" y="1097280"/>
+            <a:off x="0" y="1078992"/>
             <a:ext cx="12191695" cy="54864"/>
           </a:xfrm>
           <a:prstGeom prst="rect">
@@ -4588,7 +4548,7 @@
         <p:spPr>
           <a:xfrm>
             <a:off x="548640" y="109728"/>
-            <a:ext cx="11064240" cy="411480"/>
+            <a:ext cx="11064240" cy="384048"/>
           </a:xfrm>
           <a:prstGeom prst="rect">
             <a:avLst/>
@@ -4613,7 +4573,7 @@
                 </a:solidFill>
                 <a:latin typeface="Segoe UI"/>
               </a:rPr>
-              <a:t>NEW · BUG FIXES</a:t>
+              <a:t>LOCAL MODELS</a:t>
             </a:r>
           </a:p>
         </p:txBody>
@@ -4626,8 +4586,8 @@
         </p:nvSpPr>
         <p:spPr>
           <a:xfrm>
-            <a:off x="548640" y="411480"/>
-            <a:ext cx="11064240" cy="621792"/>
+            <a:off x="548640" y="402336"/>
+            <a:ext cx="11064240" cy="603504"/>
           </a:xfrm>
           <a:prstGeom prst="rect">
             <a:avLst/>
@@ -4646,13 +4606,13 @@
               </a:spcAft>
             </a:pPr>
             <a:r>
-              <a:rPr sz="2800" b="1">
+              <a:rPr sz="2700" b="1">
                 <a:solidFill>
                   <a:srgbClr val="FFFFFF"/>
                 </a:solidFill>
                 <a:latin typeface="Segoe UI"/>
               </a:rPr>
-              <a:t>Latest fixes</a:t>
+              <a:t>Local model UX</a:t>
             </a:r>
           </a:p>
         </p:txBody>
@@ -4666,7 +4626,7 @@
         <p:spPr>
           <a:xfrm>
             <a:off x="731520" y="1371600"/>
-            <a:ext cx="10789920" cy="4937760"/>
+            <a:ext cx="10789920" cy="5029200"/>
           </a:xfrm>
           <a:prstGeom prst="rect">
             <a:avLst/>
@@ -4681,11 +4641,11 @@
           <a:p>
             <a:pPr algn="l">
               <a:spcAft>
-                <a:spcPts val="1000"/>
-              </a:spcAft>
-            </a:pPr>
-            <a:r>
-              <a:rPr sz="1400" b="1">
+                <a:spcPts val="900"/>
+              </a:spcAft>
+            </a:pPr>
+            <a:r>
+              <a:rPr sz="1700" b="1">
                 <a:solidFill>
                   <a:srgbClr val="1E6FE0"/>
                 </a:solidFill>
@@ -4694,32 +4654,23 @@
               <a:t>•  </a:t>
             </a:r>
             <a:r>
-              <a:rPr sz="1400" b="1">
-                <a:solidFill>
-                  <a:srgbClr val="0B1F3A"/>
-                </a:solidFill>
-                <a:latin typeface="Segoe UI"/>
-              </a:rPr>
-              <a:t>Daemon crash </a:t>
-            </a:r>
-            <a:r>
-              <a:rPr sz="1400" b="0">
+              <a:rPr sz="1700" b="0">
                 <a:solidFill>
                   <a:srgbClr val="4C596B"/>
                 </a:solidFill>
                 <a:latin typeface="Segoe UI"/>
               </a:rPr>
-              <a:t>— better-sqlite3 built for the wrong Node (NODE_MODULE_VERSION 127 vs 137); now rebuilt for Node 24 → no more 'Failed to fetch'</a:t>
-            </a:r>
-          </a:p>
-          <a:p>
-            <a:pPr algn="l">
-              <a:spcAft>
-                <a:spcPts val="1000"/>
-              </a:spcAft>
-            </a:pPr>
-            <a:r>
-              <a:rPr sz="1400" b="1">
+              <a:t>Device checker sits above downloads</a:t>
+            </a:r>
+          </a:p>
+          <a:p>
+            <a:pPr algn="l">
+              <a:spcAft>
+                <a:spcPts val="900"/>
+              </a:spcAft>
+            </a:pPr>
+            <a:r>
+              <a:rPr sz="1700" b="1">
                 <a:solidFill>
                   <a:srgbClr val="1E6FE0"/>
                 </a:solidFill>
@@ -4728,32 +4679,23 @@
               <a:t>•  </a:t>
             </a:r>
             <a:r>
-              <a:rPr sz="1400" b="1">
-                <a:solidFill>
-                  <a:srgbClr val="0B1F3A"/>
-                </a:solidFill>
-                <a:latin typeface="Segoe UI"/>
-              </a:rPr>
-              <a:t>WhatsApp QR </a:t>
-            </a:r>
-            <a:r>
-              <a:rPr sz="1400" b="0">
+              <a:rPr sz="1700" b="0">
                 <a:solidFill>
                   <a:srgbClr val="4C596B"/>
                 </a:solidFill>
                 <a:latin typeface="Segoe UI"/>
               </a:rPr>
-              <a:t>— web SSE endpoint 404'd the EventSource ?token= form, killing all live events; route + client event-map fixed → QR shows &amp; status updates</a:t>
-            </a:r>
-          </a:p>
-          <a:p>
-            <a:pPr algn="l">
-              <a:spcAft>
-                <a:spcPts val="1000"/>
-              </a:spcAft>
-            </a:pPr>
-            <a:r>
-              <a:rPr sz="1400" b="1">
+              <a:t>Download box: idle / downloading / installed / failed</a:t>
+            </a:r>
+          </a:p>
+          <a:p>
+            <a:pPr algn="l">
+              <a:spcAft>
+                <a:spcPts val="900"/>
+              </a:spcAft>
+            </a:pPr>
+            <a:r>
+              <a:rPr sz="1700" b="1">
                 <a:solidFill>
                   <a:srgbClr val="1E6FE0"/>
                 </a:solidFill>
@@ -4762,32 +4704,23 @@
               <a:t>•  </a:t>
             </a:r>
             <a:r>
-              <a:rPr sz="1400" b="1">
-                <a:solidFill>
-                  <a:srgbClr val="0B1F3A"/>
-                </a:solidFill>
-                <a:latin typeface="Segoe UI"/>
-              </a:rPr>
-              <a:t>Docker </a:t>
-            </a:r>
-            <a:r>
-              <a:rPr sz="1400" b="0">
+              <a:rPr sz="1700" b="0">
                 <a:solidFill>
                   <a:srgbClr val="4C596B"/>
                 </a:solidFill>
                 <a:latin typeface="Segoe UI"/>
               </a:rPr>
-              <a:t>— daemon now binds HOST (0.0.0.0) so it's reachable from the host; image builds from source under Node 24</a:t>
-            </a:r>
-          </a:p>
-          <a:p>
-            <a:pPr algn="l">
-              <a:spcAft>
-                <a:spcPts val="1000"/>
-              </a:spcAft>
-            </a:pPr>
-            <a:r>
-              <a:rPr sz="1400" b="1">
+              <a:t>Runtime targets: Auto · GPU · WebGPU · CPU</a:t>
+            </a:r>
+          </a:p>
+          <a:p>
+            <a:pPr algn="l">
+              <a:spcAft>
+                <a:spcPts val="900"/>
+              </a:spcAft>
+            </a:pPr>
+            <a:r>
+              <a:rPr sz="1700" b="1">
                 <a:solidFill>
                   <a:srgbClr val="1E6FE0"/>
                 </a:solidFill>
@@ -4796,22 +4729,13 @@
               <a:t>•  </a:t>
             </a:r>
             <a:r>
-              <a:rPr sz="1400" b="1">
-                <a:solidFill>
-                  <a:srgbClr val="0B1F3A"/>
-                </a:solidFill>
-                <a:latin typeface="Segoe UI"/>
-              </a:rPr>
-              <a:t>Launcher robustness </a:t>
-            </a:r>
-            <a:r>
-              <a:rPr sz="1400" b="0">
+              <a:rPr sz="1700" b="0">
                 <a:solidFill>
                   <a:srgbClr val="4C596B"/>
                 </a:solidFill>
                 <a:latin typeface="Segoe UI"/>
               </a:rPr>
-              <a:t>— CRLF line endings + dev test-login forced on (works even if NODE_ENV=production)</a:t>
+              <a:t>Automatic GPU selection for GPU modes</a:t>
             </a:r>
           </a:p>
         </p:txBody>
@@ -4851,7 +4775,7 @@
         <p:spPr>
           <a:xfrm>
             <a:off x="0" y="0"/>
-            <a:ext cx="12191695" cy="1097280"/>
+            <a:ext cx="12191695" cy="1078992"/>
           </a:xfrm>
           <a:prstGeom prst="rect">
             <a:avLst/>
@@ -4894,7 +4818,7 @@
         </p:nvSpPr>
         <p:spPr>
           <a:xfrm>
-            <a:off x="0" y="1097280"/>
+            <a:off x="0" y="1078992"/>
             <a:ext cx="12191695" cy="54864"/>
           </a:xfrm>
           <a:prstGeom prst="rect">
@@ -4939,7 +4863,7 @@
         <p:spPr>
           <a:xfrm>
             <a:off x="548640" y="109728"/>
-            <a:ext cx="11064240" cy="411480"/>
+            <a:ext cx="11064240" cy="384048"/>
           </a:xfrm>
           <a:prstGeom prst="rect">
             <a:avLst/>
@@ -4964,7 +4888,7 @@
                 </a:solidFill>
                 <a:latin typeface="Segoe UI"/>
               </a:rPr>
-              <a:t>RUN IT</a:t>
+              <a:t>AI QUESTIONS</a:t>
             </a:r>
           </a:p>
         </p:txBody>
@@ -4977,8 +4901,8 @@
         </p:nvSpPr>
         <p:spPr>
           <a:xfrm>
-            <a:off x="548640" y="411480"/>
-            <a:ext cx="11064240" cy="621792"/>
+            <a:off x="548640" y="402336"/>
+            <a:ext cx="11064240" cy="603504"/>
           </a:xfrm>
           <a:prstGeom prst="rect">
             <a:avLst/>
@@ -4997,13 +4921,13 @@
               </a:spcAft>
             </a:pPr>
             <a:r>
-              <a:rPr sz="2800" b="1">
+              <a:rPr sz="2700" b="1">
                 <a:solidFill>
                   <a:srgbClr val="FFFFFF"/>
                 </a:solidFill>
                 <a:latin typeface="Segoe UI"/>
               </a:rPr>
-              <a:t>Two ways</a:t>
+              <a:t>Inline question card</a:t>
             </a:r>
           </a:p>
         </p:txBody>
@@ -5016,8 +4940,8 @@
         </p:nvSpPr>
         <p:spPr>
           <a:xfrm>
-            <a:off x="640080" y="1325880"/>
-            <a:ext cx="10972800" cy="365760"/>
+            <a:off x="731520" y="1371600"/>
+            <a:ext cx="10789920" cy="5029200"/>
           </a:xfrm>
           <a:prstGeom prst="rect">
             <a:avLst/>
@@ -5032,309 +4956,101 @@
           <a:p>
             <a:pPr algn="l">
               <a:spcAft>
-                <a:spcPts val="600"/>
-              </a:spcAft>
-            </a:pPr>
-            <a:r>
-              <a:rPr sz="1600" b="1">
-                <a:solidFill>
-                  <a:srgbClr val="0B1F3A"/>
-                </a:solidFill>
-                <a:latin typeface="Segoe UI"/>
-              </a:rPr>
-              <a:t>Windows (recommended)</a:t>
-            </a:r>
-          </a:p>
-        </p:txBody>
-      </p:sp>
-      <p:sp>
-        <p:nvSpPr>
-          <p:cNvPr id="7" name="Rounded Rectangle 6"/>
-          <p:cNvSpPr/>
-          <p:nvPr/>
-        </p:nvSpPr>
-        <p:spPr>
-          <a:xfrm>
-            <a:off x="640080" y="1783080"/>
-            <a:ext cx="10881360" cy="1371600"/>
-          </a:xfrm>
-          <a:prstGeom prst="roundRect">
-            <a:avLst/>
-          </a:prstGeom>
-          <a:solidFill>
-            <a:srgbClr val="122A4A"/>
-          </a:solidFill>
-          <a:ln>
-            <a:noFill/>
-          </a:ln>
-          <a:effectLst/>
-        </p:spPr>
-        <p:style>
-          <a:lnRef idx="1">
-            <a:schemeClr val="accent1"/>
-          </a:lnRef>
-          <a:fillRef idx="3">
-            <a:schemeClr val="accent1"/>
-          </a:fillRef>
-          <a:effectRef idx="2">
-            <a:schemeClr val="accent1"/>
-          </a:effectRef>
-          <a:fontRef idx="minor">
-            <a:schemeClr val="lt1"/>
-          </a:fontRef>
-        </p:style>
-        <p:txBody>
-          <a:bodyPr rtlCol="0" anchor="ctr"/>
-          <a:lstStyle/>
-          <a:p>
-            <a:pPr algn="ctr"/>
-          </a:p>
-        </p:txBody>
-      </p:sp>
-      <p:sp>
-        <p:nvSpPr>
-          <p:cNvPr id="8" name="TextBox 7"/>
-          <p:cNvSpPr txBox="1"/>
-          <p:nvPr/>
-        </p:nvSpPr>
-        <p:spPr>
-          <a:xfrm>
-            <a:off x="822960" y="1892808"/>
-            <a:ext cx="10515600" cy="1188720"/>
-          </a:xfrm>
-          <a:prstGeom prst="rect">
-            <a:avLst/>
-          </a:prstGeom>
-          <a:noFill/>
-        </p:spPr>
-        <p:txBody>
-          <a:bodyPr wrap="square" anchor="t">
-            <a:spAutoFit/>
-          </a:bodyPr>
-          <a:lstStyle/>
-          <a:p>
-            <a:pPr algn="l">
-              <a:spcAft>
-                <a:spcPts val="200"/>
-              </a:spcAft>
-            </a:pPr>
-            <a:r>
-              <a:rPr sz="1500" b="0">
-                <a:solidFill>
-                  <a:srgbClr val="CFE3FF"/>
-                </a:solidFill>
-                <a:latin typeface="Consolas"/>
-              </a:rPr>
-              <a:t>git clone https://github.com/solutionsDigibull/SRIM-by_Digibull.git</a:t>
-            </a:r>
-          </a:p>
-          <a:p>
-            <a:pPr algn="l">
-              <a:spcAft>
-                <a:spcPts val="200"/>
-              </a:spcAft>
-            </a:pPr>
-            <a:r>
-              <a:rPr sz="1500" b="0">
-                <a:solidFill>
-                  <a:srgbClr val="CFE3FF"/>
-                </a:solidFill>
-                <a:latin typeface="Consolas"/>
-              </a:rPr>
-              <a:t>cd SRIM-by_Digibull  &amp;&amp;  git lfs install  &amp;&amp;  git lfs pull</a:t>
-            </a:r>
-          </a:p>
-          <a:p>
-            <a:pPr algn="l">
-              <a:spcAft>
-                <a:spcPts val="200"/>
-              </a:spcAft>
-            </a:pPr>
-            <a:r>
-              <a:rPr sz="1500" b="0">
-                <a:solidFill>
-                  <a:srgbClr val="CFE3FF"/>
-                </a:solidFill>
-                <a:latin typeface="Consolas"/>
-              </a:rPr>
-              <a:t>INSTALL.bat            then            LAUNCH-WEB.bat</a:t>
-            </a:r>
-          </a:p>
-        </p:txBody>
-      </p:sp>
-      <p:sp>
-        <p:nvSpPr>
-          <p:cNvPr id="9" name="TextBox 8"/>
-          <p:cNvSpPr txBox="1"/>
-          <p:nvPr/>
-        </p:nvSpPr>
-        <p:spPr>
-          <a:xfrm>
-            <a:off x="640080" y="3383280"/>
-            <a:ext cx="10972800" cy="365760"/>
-          </a:xfrm>
-          <a:prstGeom prst="rect">
-            <a:avLst/>
-          </a:prstGeom>
-          <a:noFill/>
-        </p:spPr>
-        <p:txBody>
-          <a:bodyPr wrap="square" anchor="t">
-            <a:spAutoFit/>
-          </a:bodyPr>
-          <a:lstStyle/>
-          <a:p>
-            <a:pPr algn="l">
-              <a:spcAft>
-                <a:spcPts val="600"/>
-              </a:spcAft>
-            </a:pPr>
-            <a:r>
-              <a:rPr sz="1600" b="1">
-                <a:solidFill>
-                  <a:srgbClr val="0B1F3A"/>
-                </a:solidFill>
-                <a:latin typeface="Segoe UI"/>
-              </a:rPr>
-              <a:t>Docker (any OS)</a:t>
-            </a:r>
-          </a:p>
-        </p:txBody>
-      </p:sp>
-      <p:sp>
-        <p:nvSpPr>
-          <p:cNvPr id="10" name="Rounded Rectangle 9"/>
-          <p:cNvSpPr/>
-          <p:nvPr/>
-        </p:nvSpPr>
-        <p:spPr>
-          <a:xfrm>
-            <a:off x="640080" y="3840480"/>
-            <a:ext cx="10881360" cy="1005840"/>
-          </a:xfrm>
-          <a:prstGeom prst="roundRect">
-            <a:avLst/>
-          </a:prstGeom>
-          <a:solidFill>
-            <a:srgbClr val="122A4A"/>
-          </a:solidFill>
-          <a:ln>
-            <a:noFill/>
-          </a:ln>
-          <a:effectLst/>
-        </p:spPr>
-        <p:style>
-          <a:lnRef idx="1">
-            <a:schemeClr val="accent1"/>
-          </a:lnRef>
-          <a:fillRef idx="3">
-            <a:schemeClr val="accent1"/>
-          </a:fillRef>
-          <a:effectRef idx="2">
-            <a:schemeClr val="accent1"/>
-          </a:effectRef>
-          <a:fontRef idx="minor">
-            <a:schemeClr val="lt1"/>
-          </a:fontRef>
-        </p:style>
-        <p:txBody>
-          <a:bodyPr rtlCol="0" anchor="ctr"/>
-          <a:lstStyle/>
-          <a:p>
-            <a:pPr algn="ctr"/>
-          </a:p>
-        </p:txBody>
-      </p:sp>
-      <p:sp>
-        <p:nvSpPr>
-          <p:cNvPr id="11" name="TextBox 10"/>
-          <p:cNvSpPr txBox="1"/>
-          <p:nvPr/>
-        </p:nvSpPr>
-        <p:spPr>
-          <a:xfrm>
-            <a:off x="822960" y="3950208"/>
-            <a:ext cx="10515600" cy="822960"/>
-          </a:xfrm>
-          <a:prstGeom prst="rect">
-            <a:avLst/>
-          </a:prstGeom>
-          <a:noFill/>
-        </p:spPr>
-        <p:txBody>
-          <a:bodyPr wrap="square" anchor="t">
-            <a:spAutoFit/>
-          </a:bodyPr>
-          <a:lstStyle/>
-          <a:p>
-            <a:pPr algn="l">
-              <a:spcAft>
-                <a:spcPts val="200"/>
-              </a:spcAft>
-            </a:pPr>
-            <a:r>
-              <a:rPr sz="1500" b="0">
-                <a:solidFill>
-                  <a:srgbClr val="CFE3FF"/>
-                </a:solidFill>
-                <a:latin typeface="Consolas"/>
-              </a:rPr>
-              <a:t>docker compose up --build</a:t>
-            </a:r>
-          </a:p>
-          <a:p>
-            <a:pPr algn="l">
-              <a:spcAft>
-                <a:spcPts val="200"/>
-              </a:spcAft>
-            </a:pPr>
-            <a:r>
-              <a:rPr sz="1500" b="0">
-                <a:solidFill>
-                  <a:srgbClr val="CFE3FF"/>
-                </a:solidFill>
-                <a:latin typeface="Consolas"/>
-              </a:rPr>
-              <a:t># → http://localhost:5173</a:t>
-            </a:r>
-          </a:p>
-        </p:txBody>
-      </p:sp>
-      <p:sp>
-        <p:nvSpPr>
-          <p:cNvPr id="12" name="TextBox 11"/>
-          <p:cNvSpPr txBox="1"/>
-          <p:nvPr/>
-        </p:nvSpPr>
-        <p:spPr>
-          <a:xfrm>
-            <a:off x="640080" y="5943600"/>
-            <a:ext cx="10972800" cy="548640"/>
-          </a:xfrm>
-          <a:prstGeom prst="rect">
-            <a:avLst/>
-          </a:prstGeom>
-          <a:noFill/>
-        </p:spPr>
-        <p:txBody>
-          <a:bodyPr wrap="square" anchor="t">
-            <a:spAutoFit/>
-          </a:bodyPr>
-          <a:lstStyle/>
-          <a:p>
-            <a:pPr algn="l">
-              <a:spcAft>
-                <a:spcPts val="600"/>
-              </a:spcAft>
-            </a:pPr>
-            <a:r>
-              <a:rPr sz="1300" b="0">
+                <a:spcPts val="900"/>
+              </a:spcAft>
+            </a:pPr>
+            <a:r>
+              <a:rPr sz="1700" b="1">
+                <a:solidFill>
+                  <a:srgbClr val="1E6FE0"/>
+                </a:solidFill>
+                <a:latin typeface="Segoe UI"/>
+              </a:rPr>
+              <a:t>•  </a:t>
+            </a:r>
+            <a:r>
+              <a:rPr sz="1700" b="0">
                 <a:solidFill>
                   <a:srgbClr val="4C596B"/>
                 </a:solidFill>
                 <a:latin typeface="Segoe UI"/>
               </a:rPr>
-              <a:t>Dev login: 'Sign in as Tester' · token srim-dev-token · digibull / srim-test-2026</a:t>
+              <a:t>SRIM can surface model questions inline</a:t>
+            </a:r>
+          </a:p>
+          <a:p>
+            <a:pPr algn="l">
+              <a:spcAft>
+                <a:spcPts val="900"/>
+              </a:spcAft>
+            </a:pPr>
+            <a:r>
+              <a:rPr sz="1700" b="1">
+                <a:solidFill>
+                  <a:srgbClr val="1E6FE0"/>
+                </a:solidFill>
+                <a:latin typeface="Segoe UI"/>
+              </a:rPr>
+              <a:t>•  </a:t>
+            </a:r>
+            <a:r>
+              <a:rPr sz="1700" b="0">
+                <a:solidFill>
+                  <a:srgbClr val="4C596B"/>
+                </a:solidFill>
+                <a:latin typeface="Segoe UI"/>
+              </a:rPr>
+              <a:t>No more hidden “it is thinking” for question prompts</a:t>
+            </a:r>
+          </a:p>
+          <a:p>
+            <a:pPr algn="l">
+              <a:spcAft>
+                <a:spcPts val="900"/>
+              </a:spcAft>
+            </a:pPr>
+            <a:r>
+              <a:rPr sz="1700" b="1">
+                <a:solidFill>
+                  <a:srgbClr val="1E6FE0"/>
+                </a:solidFill>
+                <a:latin typeface="Segoe UI"/>
+              </a:rPr>
+              <a:t>•  </a:t>
+            </a:r>
+            <a:r>
+              <a:rPr sz="1700" b="0">
+                <a:solidFill>
+                  <a:srgbClr val="4C596B"/>
+                </a:solidFill>
+                <a:latin typeface="Segoe UI"/>
+              </a:rPr>
+              <a:t>Question card accepts a typed answer or choices</a:t>
+            </a:r>
+          </a:p>
+          <a:p>
+            <a:pPr algn="l">
+              <a:spcAft>
+                <a:spcPts val="900"/>
+              </a:spcAft>
+            </a:pPr>
+            <a:r>
+              <a:rPr sz="1700" b="1">
+                <a:solidFill>
+                  <a:srgbClr val="1E6FE0"/>
+                </a:solidFill>
+                <a:latin typeface="Segoe UI"/>
+              </a:rPr>
+              <a:t>•  </a:t>
+            </a:r>
+            <a:r>
+              <a:rPr sz="1700" b="0">
+                <a:solidFill>
+                  <a:srgbClr val="4C596B"/>
+                </a:solidFill>
+                <a:latin typeface="Segoe UI"/>
+              </a:rPr>
+              <a:t>File/tool permissions still use the stronger modal</a:t>
             </a:r>
           </a:p>
         </p:txBody>
@@ -5374,7 +5090,7 @@
         <p:spPr>
           <a:xfrm>
             <a:off x="0" y="0"/>
-            <a:ext cx="12191695" cy="1097280"/>
+            <a:ext cx="12191695" cy="1078992"/>
           </a:xfrm>
           <a:prstGeom prst="rect">
             <a:avLst/>
@@ -5417,7 +5133,7 @@
         </p:nvSpPr>
         <p:spPr>
           <a:xfrm>
-            <a:off x="0" y="1097280"/>
+            <a:off x="0" y="1078992"/>
             <a:ext cx="12191695" cy="54864"/>
           </a:xfrm>
           <a:prstGeom prst="rect">
@@ -5462,7 +5178,7 @@
         <p:spPr>
           <a:xfrm>
             <a:off x="548640" y="109728"/>
-            <a:ext cx="11064240" cy="411480"/>
+            <a:ext cx="11064240" cy="384048"/>
           </a:xfrm>
           <a:prstGeom prst="rect">
             <a:avLst/>
@@ -5487,7 +5203,7 @@
                 </a:solidFill>
                 <a:latin typeface="Segoe UI"/>
               </a:rPr>
-              <a:t>STATUS</a:t>
+              <a:t>MCP</a:t>
             </a:r>
           </a:p>
         </p:txBody>
@@ -5500,8 +5216,8 @@
         </p:nvSpPr>
         <p:spPr>
           <a:xfrm>
-            <a:off x="548640" y="411480"/>
-            <a:ext cx="11064240" cy="621792"/>
+            <a:off x="548640" y="402336"/>
+            <a:ext cx="11064240" cy="603504"/>
           </a:xfrm>
           <a:prstGeom prst="rect">
             <a:avLst/>
@@ -5520,13 +5236,13 @@
               </a:spcAft>
             </a:pPr>
             <a:r>
-              <a:rPr sz="2800" b="1">
+              <a:rPr sz="2700" b="1">
                 <a:solidFill>
                   <a:srgbClr val="FFFFFF"/>
                 </a:solidFill>
                 <a:latin typeface="Segoe UI"/>
               </a:rPr>
-              <a:t>Where it stands</a:t>
+              <a:t>Two directions</a:t>
             </a:r>
           </a:p>
         </p:txBody>
@@ -5539,8 +5255,8 @@
         </p:nvSpPr>
         <p:spPr>
           <a:xfrm>
-            <a:off x="731520" y="1417320"/>
-            <a:ext cx="10789920" cy="4937760"/>
+            <a:off x="731520" y="1371600"/>
+            <a:ext cx="10789920" cy="5029200"/>
           </a:xfrm>
           <a:prstGeom prst="rect">
             <a:avLst/>
@@ -5555,7 +5271,7 @@
           <a:p>
             <a:pPr algn="l">
               <a:spcAft>
-                <a:spcPts val="1000"/>
+                <a:spcPts val="900"/>
               </a:spcAft>
             </a:pPr>
             <a:r>
@@ -5568,19 +5284,28 @@
               <a:t>•  </a:t>
             </a:r>
             <a:r>
+              <a:rPr sz="1700" b="1">
+                <a:solidFill>
+                  <a:srgbClr val="0B1F3A"/>
+                </a:solidFill>
+                <a:latin typeface="Segoe UI"/>
+              </a:rPr>
+              <a:t>Outbound: </a:t>
+            </a:r>
+            <a:r>
               <a:rPr sz="1700" b="0">
                 <a:solidFill>
                   <a:srgbClr val="4C596B"/>
                 </a:solidFill>
                 <a:latin typeface="Segoe UI"/>
               </a:rPr>
-              <a:t>Web build works end-to-end (providers connect, tasks run)</a:t>
-            </a:r>
-          </a:p>
-          <a:p>
-            <a:pPr algn="l">
-              <a:spcAft>
-                <a:spcPts val="1000"/>
+              <a:t>add MCP servers → the agent uses them</a:t>
+            </a:r>
+          </a:p>
+          <a:p>
+            <a:pPr algn="l">
+              <a:spcAft>
+                <a:spcPts val="900"/>
               </a:spcAft>
             </a:pPr>
             <a:r>
@@ -5599,13 +5324,13 @@
                 </a:solidFill>
                 <a:latin typeface="Segoe UI"/>
               </a:rPr>
-              <a:t>DigiBull Auto + local-model UI verified</a:t>
-            </a:r>
-          </a:p>
-          <a:p>
-            <a:pPr algn="l">
-              <a:spcAft>
-                <a:spcPts val="1000"/>
+              <a:t>Pre-seeded: Dify, FastMCP, MCP Jungle, Postgres, Superset…</a:t>
+            </a:r>
+          </a:p>
+          <a:p>
+            <a:pPr algn="l">
+              <a:spcAft>
+                <a:spcPts val="900"/>
               </a:spcAft>
             </a:pPr>
             <a:r>
@@ -5618,19 +5343,28 @@
               <a:t>•  </a:t>
             </a:r>
             <a:r>
+              <a:rPr sz="1700" b="1">
+                <a:solidFill>
+                  <a:srgbClr val="0B1F3A"/>
+                </a:solidFill>
+                <a:latin typeface="Segoe UI"/>
+              </a:rPr>
+              <a:t>Inbound: </a:t>
+            </a:r>
+            <a:r>
               <a:rPr sz="1700" b="0">
                 <a:solidFill>
                   <a:srgbClr val="4C596B"/>
                 </a:solidFill>
                 <a:latin typeface="Segoe UI"/>
               </a:rPr>
-              <a:t>WhatsApp connects &amp; shows QR; Docker reachable from host</a:t>
-            </a:r>
-          </a:p>
-          <a:p>
-            <a:pPr algn="l">
-              <a:spcAft>
-                <a:spcPts val="1000"/>
+              <a:t>external workflows call /rpc</a:t>
+            </a:r>
+          </a:p>
+          <a:p>
+            <a:pPr algn="l">
+              <a:spcAft>
+                <a:spcPts val="900"/>
               </a:spcAft>
             </a:pPr>
             <a:r>
@@ -5649,41 +5383,7 @@
                 </a:solidFill>
                 <a:latin typeface="Segoe UI"/>
               </a:rPr>
-              <a:t>Setup automated via INSTALL.bat / LAUNCH-WEB.bat</a:t>
-            </a:r>
-          </a:p>
-          <a:p>
-            <a:pPr algn="l">
-              <a:spcAft>
-                <a:spcPts val="1000"/>
-              </a:spcAft>
-            </a:pPr>
-            <a:r>
-              <a:rPr sz="1700" b="1">
-                <a:solidFill>
-                  <a:srgbClr val="1E6FE0"/>
-                </a:solidFill>
-                <a:latin typeface="Segoe UI"/>
-              </a:rPr>
-              <a:t>•  </a:t>
-            </a:r>
-            <a:r>
-              <a:rPr sz="1700" b="1">
-                <a:solidFill>
-                  <a:srgbClr val="0B1F3A"/>
-                </a:solidFill>
-                <a:latin typeface="Segoe UI"/>
-              </a:rPr>
-              <a:t>Roadmap: </a:t>
-            </a:r>
-            <a:r>
-              <a:rPr sz="1700" b="0">
-                <a:solidFill>
-                  <a:srgbClr val="4C596B"/>
-                </a:solidFill>
-                <a:latin typeface="Segoe UI"/>
-              </a:rPr>
-              <a:t>native subsystems, 0.4.14 source-only features</a:t>
+              <a:t>Bearer key · loopback-only · opt-in flag</a:t>
             </a:r>
           </a:p>
         </p:txBody>
@@ -5702,7 +5402,7 @@
     <p:bg>
       <p:bgPr>
         <a:solidFill>
-          <a:srgbClr val="0B1F3A"/>
+          <a:srgbClr val="F4F7FB"/>
         </a:solidFill>
         <a:effectLst/>
       </p:bgPr>
@@ -5716,14 +5416,180 @@
       <p:grpSpPr/>
       <p:sp>
         <p:nvSpPr>
-          <p:cNvPr id="2" name="TextBox 1"/>
+          <p:cNvPr id="2" name="Rectangle 1"/>
+          <p:cNvSpPr/>
+          <p:nvPr/>
+        </p:nvSpPr>
+        <p:spPr>
+          <a:xfrm>
+            <a:off x="0" y="0"/>
+            <a:ext cx="12191695" cy="1078992"/>
+          </a:xfrm>
+          <a:prstGeom prst="rect">
+            <a:avLst/>
+          </a:prstGeom>
+          <a:solidFill>
+            <a:srgbClr val="0B1F3A"/>
+          </a:solidFill>
+          <a:ln>
+            <a:noFill/>
+          </a:ln>
+          <a:effectLst/>
+        </p:spPr>
+        <p:style>
+          <a:lnRef idx="1">
+            <a:schemeClr val="accent1"/>
+          </a:lnRef>
+          <a:fillRef idx="3">
+            <a:schemeClr val="accent1"/>
+          </a:fillRef>
+          <a:effectRef idx="2">
+            <a:schemeClr val="accent1"/>
+          </a:effectRef>
+          <a:fontRef idx="minor">
+            <a:schemeClr val="lt1"/>
+          </a:fontRef>
+        </p:style>
+        <p:txBody>
+          <a:bodyPr rtlCol="0" anchor="ctr"/>
+          <a:lstStyle/>
+          <a:p>
+            <a:pPr algn="ctr"/>
+          </a:p>
+        </p:txBody>
+      </p:sp>
+      <p:sp>
+        <p:nvSpPr>
+          <p:cNvPr id="3" name="Rectangle 2"/>
+          <p:cNvSpPr/>
+          <p:nvPr/>
+        </p:nvSpPr>
+        <p:spPr>
+          <a:xfrm>
+            <a:off x="0" y="1078992"/>
+            <a:ext cx="12191695" cy="54864"/>
+          </a:xfrm>
+          <a:prstGeom prst="rect">
+            <a:avLst/>
+          </a:prstGeom>
+          <a:solidFill>
+            <a:srgbClr val="1E6FE0"/>
+          </a:solidFill>
+          <a:ln>
+            <a:noFill/>
+          </a:ln>
+          <a:effectLst/>
+        </p:spPr>
+        <p:style>
+          <a:lnRef idx="1">
+            <a:schemeClr val="accent1"/>
+          </a:lnRef>
+          <a:fillRef idx="3">
+            <a:schemeClr val="accent1"/>
+          </a:fillRef>
+          <a:effectRef idx="2">
+            <a:schemeClr val="accent1"/>
+          </a:effectRef>
+          <a:fontRef idx="minor">
+            <a:schemeClr val="lt1"/>
+          </a:fontRef>
+        </p:style>
+        <p:txBody>
+          <a:bodyPr rtlCol="0" anchor="ctr"/>
+          <a:lstStyle/>
+          <a:p>
+            <a:pPr algn="ctr"/>
+          </a:p>
+        </p:txBody>
+      </p:sp>
+      <p:sp>
+        <p:nvSpPr>
+          <p:cNvPr id="4" name="TextBox 3"/>
           <p:cNvSpPr txBox="1"/>
           <p:nvPr/>
         </p:nvSpPr>
         <p:spPr>
           <a:xfrm>
-            <a:off x="914400" y="2377440"/>
-            <a:ext cx="10515600" cy="914400"/>
+            <a:off x="548640" y="109728"/>
+            <a:ext cx="11064240" cy="384048"/>
+          </a:xfrm>
+          <a:prstGeom prst="rect">
+            <a:avLst/>
+          </a:prstGeom>
+          <a:noFill/>
+        </p:spPr>
+        <p:txBody>
+          <a:bodyPr wrap="square" anchor="ctr">
+            <a:spAutoFit/>
+          </a:bodyPr>
+          <a:lstStyle/>
+          <a:p>
+            <a:pPr algn="l">
+              <a:spcAft>
+                <a:spcPts val="600"/>
+              </a:spcAft>
+            </a:pPr>
+            <a:r>
+              <a:rPr sz="1200" b="1">
+                <a:solidFill>
+                  <a:srgbClr val="8FB6F0"/>
+                </a:solidFill>
+                <a:latin typeface="Segoe UI"/>
+              </a:rPr>
+              <a:t>NEW · ONE-CLICK SETUP</a:t>
+            </a:r>
+          </a:p>
+        </p:txBody>
+      </p:sp>
+      <p:sp>
+        <p:nvSpPr>
+          <p:cNvPr id="5" name="TextBox 4"/>
+          <p:cNvSpPr txBox="1"/>
+          <p:nvPr/>
+        </p:nvSpPr>
+        <p:spPr>
+          <a:xfrm>
+            <a:off x="548640" y="402336"/>
+            <a:ext cx="11064240" cy="603504"/>
+          </a:xfrm>
+          <a:prstGeom prst="rect">
+            <a:avLst/>
+          </a:prstGeom>
+          <a:noFill/>
+        </p:spPr>
+        <p:txBody>
+          <a:bodyPr wrap="square" anchor="ctr">
+            <a:spAutoFit/>
+          </a:bodyPr>
+          <a:lstStyle/>
+          <a:p>
+            <a:pPr algn="l">
+              <a:spcAft>
+                <a:spcPts val="600"/>
+              </a:spcAft>
+            </a:pPr>
+            <a:r>
+              <a:rPr sz="2700" b="1">
+                <a:solidFill>
+                  <a:srgbClr val="FFFFFF"/>
+                </a:solidFill>
+                <a:latin typeface="Segoe UI"/>
+              </a:rPr>
+              <a:t>Install &amp; launch on any Windows laptop</a:t>
+            </a:r>
+          </a:p>
+        </p:txBody>
+      </p:sp>
+      <p:sp>
+        <p:nvSpPr>
+          <p:cNvPr id="6" name="TextBox 5"/>
+          <p:cNvSpPr txBox="1"/>
+          <p:nvPr/>
+        </p:nvSpPr>
+        <p:spPr>
+          <a:xfrm>
+            <a:off x="731520" y="1417320"/>
+            <a:ext cx="6949440" cy="5029200"/>
           </a:xfrm>
           <a:prstGeom prst="rect">
             <a:avLst/>
@@ -5738,31 +5604,281 @@
           <a:p>
             <a:pPr algn="l">
               <a:spcAft>
-                <a:spcPts val="600"/>
-              </a:spcAft>
-            </a:pPr>
-            <a:r>
-              <a:rPr sz="4600" b="1">
+                <a:spcPts val="900"/>
+              </a:spcAft>
+            </a:pPr>
+            <a:r>
+              <a:rPr sz="1700" b="1">
+                <a:solidFill>
+                  <a:srgbClr val="1E6FE0"/>
+                </a:solidFill>
+                <a:latin typeface="Segoe UI"/>
+              </a:rPr>
+              <a:t>•  </a:t>
+            </a:r>
+            <a:r>
+              <a:rPr sz="1700" b="1">
+                <a:solidFill>
+                  <a:srgbClr val="0B1F3A"/>
+                </a:solidFill>
+                <a:latin typeface="Segoe UI"/>
+              </a:rPr>
+              <a:t>Self-contained </a:t>
+            </a:r>
+            <a:r>
+              <a:rPr sz="1700" b="0">
+                <a:solidFill>
+                  <a:srgbClr val="4C596B"/>
+                </a:solidFill>
+                <a:latin typeface="Segoe UI"/>
+              </a:rPr>
+              <a:t>— bundled Node 24.15.0, no Node/winget needed</a:t>
+            </a:r>
+          </a:p>
+          <a:p>
+            <a:pPr algn="l">
+              <a:spcAft>
+                <a:spcPts val="900"/>
+              </a:spcAft>
+            </a:pPr>
+            <a:r>
+              <a:rPr sz="1700" b="1">
+                <a:solidFill>
+                  <a:srgbClr val="1E6FE0"/>
+                </a:solidFill>
+                <a:latin typeface="Segoe UI"/>
+              </a:rPr>
+              <a:t>•  </a:t>
+            </a:r>
+            <a:r>
+              <a:rPr sz="1700" b="1">
+                <a:solidFill>
+                  <a:srgbClr val="0B1F3A"/>
+                </a:solidFill>
+                <a:latin typeface="Segoe UI"/>
+              </a:rPr>
+              <a:t>Auto-unblock </a:t>
+            </a:r>
+            <a:r>
+              <a:rPr sz="1700" b="0">
+                <a:solidFill>
+                  <a:srgbClr val="4C596B"/>
+                </a:solidFill>
+                <a:latin typeface="Segoe UI"/>
+              </a:rPr>
+              <a:t>— handles ZIP/USB/download 'blocked file' flag</a:t>
+            </a:r>
+          </a:p>
+          <a:p>
+            <a:pPr algn="l">
+              <a:spcAft>
+                <a:spcPts val="900"/>
+              </a:spcAft>
+            </a:pPr>
+            <a:r>
+              <a:rPr sz="1700" b="1">
+                <a:solidFill>
+                  <a:srgbClr val="1E6FE0"/>
+                </a:solidFill>
+                <a:latin typeface="Segoe UI"/>
+              </a:rPr>
+              <a:t>•  </a:t>
+            </a:r>
+            <a:r>
+              <a:rPr sz="1700" b="1">
+                <a:solidFill>
+                  <a:srgbClr val="0B1F3A"/>
+                </a:solidFill>
+                <a:latin typeface="Segoe UI"/>
+              </a:rPr>
+              <a:t>Clean reinstall </a:t>
+            </a:r>
+            <a:r>
+              <a:rPr sz="1700" b="0">
+                <a:solidFill>
+                  <a:srgbClr val="4C596B"/>
+                </a:solidFill>
+                <a:latin typeface="Segoe UI"/>
+              </a:rPr>
+              <a:t>+ rebuilds better-sqlite3 for Node 24</a:t>
+            </a:r>
+          </a:p>
+          <a:p>
+            <a:pPr algn="l">
+              <a:spcAft>
+                <a:spcPts val="900"/>
+              </a:spcAft>
+            </a:pPr>
+            <a:r>
+              <a:rPr sz="1700" b="1">
+                <a:solidFill>
+                  <a:srgbClr val="1E6FE0"/>
+                </a:solidFill>
+                <a:latin typeface="Segoe UI"/>
+              </a:rPr>
+              <a:t>•  </a:t>
+            </a:r>
+            <a:r>
+              <a:rPr sz="1700" b="1">
+                <a:solidFill>
+                  <a:srgbClr val="0B1F3A"/>
+                </a:solidFill>
+                <a:latin typeface="Segoe UI"/>
+              </a:rPr>
+              <a:t>LAUNCH frees stale ports </a:t>
+            </a:r>
+            <a:r>
+              <a:rPr sz="1700" b="0">
+                <a:solidFill>
+                  <a:srgbClr val="4C596B"/>
+                </a:solidFill>
+                <a:latin typeface="Segoe UI"/>
+              </a:rPr>
+              <a:t>9234 / 9230 / 5173 before starting</a:t>
+            </a:r>
+          </a:p>
+        </p:txBody>
+      </p:sp>
+      <p:sp>
+        <p:nvSpPr>
+          <p:cNvPr id="7" name="Rounded Rectangle 6">
+            <a:hlinkClick r:id="rId2"/>
+          </p:cNvPr>
+          <p:cNvSpPr/>
+          <p:nvPr/>
+        </p:nvSpPr>
+        <p:spPr>
+          <a:xfrm>
+            <a:off x="7863840" y="1645920"/>
+            <a:ext cx="3749039" cy="868680"/>
+          </a:xfrm>
+          <a:prstGeom prst="roundRect">
+            <a:avLst/>
+          </a:prstGeom>
+          <a:solidFill>
+            <a:srgbClr val="1FA855"/>
+          </a:solidFill>
+          <a:ln>
+            <a:noFill/>
+          </a:ln>
+          <a:effectLst/>
+        </p:spPr>
+        <p:style>
+          <a:lnRef idx="1">
+            <a:schemeClr val="accent1"/>
+          </a:lnRef>
+          <a:fillRef idx="3">
+            <a:schemeClr val="accent1"/>
+          </a:fillRef>
+          <a:effectRef idx="2">
+            <a:schemeClr val="accent1"/>
+          </a:effectRef>
+          <a:fontRef idx="minor">
+            <a:schemeClr val="lt1"/>
+          </a:fontRef>
+        </p:style>
+        <p:txBody>
+          <a:bodyPr rtlCol="0" anchor="ctr" wrap="square"/>
+          <a:lstStyle/>
+          <a:p>
+            <a:pPr algn="ctr"/>
+            <a:r>
+              <a:rPr sz="1800" b="1">
                 <a:solidFill>
                   <a:srgbClr val="FFFFFF"/>
                 </a:solidFill>
-                <a:latin typeface="Segoe UI"/>
-              </a:rPr>
-              <a:t>Thank you</a:t>
-            </a:r>
-          </a:p>
-        </p:txBody>
-      </p:sp>
-      <p:sp>
-        <p:nvSpPr>
-          <p:cNvPr id="3" name="TextBox 2"/>
+              </a:rPr>
+              <a:t>▶  INSTALL.bat</a:t>
+            </a:r>
+          </a:p>
+          <a:p>
+            <a:pPr algn="ctr"/>
+            <a:r>
+              <a:rPr sz="1000">
+                <a:solidFill>
+                  <a:srgbClr val="E8FFF0"/>
+                </a:solidFill>
+              </a:rPr>
+              <a:t>click · repo root</a:t>
+            </a:r>
+          </a:p>
+        </p:txBody>
+      </p:sp>
+      <p:sp>
+        <p:nvSpPr>
+          <p:cNvPr id="8" name="Rounded Rectangle 7">
+            <a:hlinkClick r:id="rId3"/>
+          </p:cNvPr>
+          <p:cNvSpPr/>
+          <p:nvPr/>
+        </p:nvSpPr>
+        <p:spPr>
+          <a:xfrm>
+            <a:off x="7863840" y="2743200"/>
+            <a:ext cx="3749039" cy="868680"/>
+          </a:xfrm>
+          <a:prstGeom prst="roundRect">
+            <a:avLst/>
+          </a:prstGeom>
+          <a:solidFill>
+            <a:srgbClr val="1E6FE0"/>
+          </a:solidFill>
+          <a:ln>
+            <a:noFill/>
+          </a:ln>
+          <a:effectLst/>
+        </p:spPr>
+        <p:style>
+          <a:lnRef idx="1">
+            <a:schemeClr val="accent1"/>
+          </a:lnRef>
+          <a:fillRef idx="3">
+            <a:schemeClr val="accent1"/>
+          </a:fillRef>
+          <a:effectRef idx="2">
+            <a:schemeClr val="accent1"/>
+          </a:effectRef>
+          <a:fontRef idx="minor">
+            <a:schemeClr val="lt1"/>
+          </a:fontRef>
+        </p:style>
+        <p:txBody>
+          <a:bodyPr rtlCol="0" anchor="ctr" wrap="square"/>
+          <a:lstStyle/>
+          <a:p>
+            <a:pPr algn="ctr"/>
+            <a:r>
+              <a:rPr sz="1800" b="1">
+                <a:solidFill>
+                  <a:srgbClr val="FFFFFF"/>
+                </a:solidFill>
+              </a:rPr>
+              <a:t>▶  LAUNCH-WEB.bat</a:t>
+            </a:r>
+          </a:p>
+          <a:p>
+            <a:pPr algn="ctr"/>
+            <a:r>
+              <a:rPr sz="1000">
+                <a:solidFill>
+                  <a:srgbClr val="E8FFF0"/>
+                </a:solidFill>
+              </a:rPr>
+              <a:t>click · accomplish-react_</a:t>
+            </a:r>
+          </a:p>
+        </p:txBody>
+      </p:sp>
+      <p:sp>
+        <p:nvSpPr>
+          <p:cNvPr id="9" name="TextBox 8"/>
           <p:cNvSpPr txBox="1"/>
           <p:nvPr/>
         </p:nvSpPr>
         <p:spPr>
           <a:xfrm>
-            <a:off x="914400" y="3474720"/>
-            <a:ext cx="10515600" cy="1463040"/>
+            <a:off x="7863840" y="3703320"/>
+            <a:ext cx="3749039" cy="548640"/>
           </a:xfrm>
           <a:prstGeom prst="rect">
             <a:avLst/>
@@ -5775,51 +5891,1242 @@
           </a:bodyPr>
           <a:lstStyle/>
           <a:p>
-            <a:pPr algn="l">
-              <a:spcAft>
-                <a:spcPts val="800"/>
-              </a:spcAft>
-            </a:pPr>
-            <a:r>
-              <a:rPr sz="1800" b="0">
+            <a:pPr algn="ctr">
+              <a:spcAft>
+                <a:spcPts val="600"/>
+              </a:spcAft>
+            </a:pPr>
+            <a:r>
+              <a:rPr sz="1100" b="0">
+                <a:solidFill>
+                  <a:srgbClr val="4C596B"/>
+                </a:solidFill>
+                <a:latin typeface="Segoe UI"/>
+              </a:rPr>
+              <a:t>Buttons open the .bat files directly.</a:t>
+            </a:r>
+          </a:p>
+        </p:txBody>
+      </p:sp>
+    </p:spTree>
+  </p:cSld>
+  <p:clrMapOvr>
+    <a:masterClrMapping/>
+  </p:clrMapOvr>
+</p:sld>
+</file>
+
+<file path=ppt/slides/slide17.xml><?xml version="1.0" encoding="utf-8"?>
+<p:sld xmlns:a="http://schemas.openxmlformats.org/drawingml/2006/main" xmlns:p="http://schemas.openxmlformats.org/presentationml/2006/main" xmlns:r="http://schemas.openxmlformats.org/officeDocument/2006/relationships">
+  <p:cSld>
+    <p:bg>
+      <p:bgPr>
+        <a:solidFill>
+          <a:srgbClr val="F4F7FB"/>
+        </a:solidFill>
+        <a:effectLst/>
+      </p:bgPr>
+    </p:bg>
+    <p:spTree>
+      <p:nvGrpSpPr>
+        <p:cNvPr id="1" name=""/>
+        <p:cNvGrpSpPr/>
+        <p:nvPr/>
+      </p:nvGrpSpPr>
+      <p:grpSpPr/>
+      <p:sp>
+        <p:nvSpPr>
+          <p:cNvPr id="2" name="Rectangle 1"/>
+          <p:cNvSpPr/>
+          <p:nvPr/>
+        </p:nvSpPr>
+        <p:spPr>
+          <a:xfrm>
+            <a:off x="0" y="0"/>
+            <a:ext cx="12191695" cy="1078992"/>
+          </a:xfrm>
+          <a:prstGeom prst="rect">
+            <a:avLst/>
+          </a:prstGeom>
+          <a:solidFill>
+            <a:srgbClr val="0B1F3A"/>
+          </a:solidFill>
+          <a:ln>
+            <a:noFill/>
+          </a:ln>
+          <a:effectLst/>
+        </p:spPr>
+        <p:style>
+          <a:lnRef idx="1">
+            <a:schemeClr val="accent1"/>
+          </a:lnRef>
+          <a:fillRef idx="3">
+            <a:schemeClr val="accent1"/>
+          </a:fillRef>
+          <a:effectRef idx="2">
+            <a:schemeClr val="accent1"/>
+          </a:effectRef>
+          <a:fontRef idx="minor">
+            <a:schemeClr val="lt1"/>
+          </a:fontRef>
+        </p:style>
+        <p:txBody>
+          <a:bodyPr rtlCol="0" anchor="ctr"/>
+          <a:lstStyle/>
+          <a:p>
+            <a:pPr algn="ctr"/>
+          </a:p>
+        </p:txBody>
+      </p:sp>
+      <p:sp>
+        <p:nvSpPr>
+          <p:cNvPr id="3" name="Rectangle 2"/>
+          <p:cNvSpPr/>
+          <p:nvPr/>
+        </p:nvSpPr>
+        <p:spPr>
+          <a:xfrm>
+            <a:off x="0" y="1078992"/>
+            <a:ext cx="12191695" cy="54864"/>
+          </a:xfrm>
+          <a:prstGeom prst="rect">
+            <a:avLst/>
+          </a:prstGeom>
+          <a:solidFill>
+            <a:srgbClr val="1E6FE0"/>
+          </a:solidFill>
+          <a:ln>
+            <a:noFill/>
+          </a:ln>
+          <a:effectLst/>
+        </p:spPr>
+        <p:style>
+          <a:lnRef idx="1">
+            <a:schemeClr val="accent1"/>
+          </a:lnRef>
+          <a:fillRef idx="3">
+            <a:schemeClr val="accent1"/>
+          </a:fillRef>
+          <a:effectRef idx="2">
+            <a:schemeClr val="accent1"/>
+          </a:effectRef>
+          <a:fontRef idx="minor">
+            <a:schemeClr val="lt1"/>
+          </a:fontRef>
+        </p:style>
+        <p:txBody>
+          <a:bodyPr rtlCol="0" anchor="ctr"/>
+          <a:lstStyle/>
+          <a:p>
+            <a:pPr algn="ctr"/>
+          </a:p>
+        </p:txBody>
+      </p:sp>
+      <p:sp>
+        <p:nvSpPr>
+          <p:cNvPr id="4" name="TextBox 3"/>
+          <p:cNvSpPr txBox="1"/>
+          <p:nvPr/>
+        </p:nvSpPr>
+        <p:spPr>
+          <a:xfrm>
+            <a:off x="548640" y="109728"/>
+            <a:ext cx="11064240" cy="384048"/>
+          </a:xfrm>
+          <a:prstGeom prst="rect">
+            <a:avLst/>
+          </a:prstGeom>
+          <a:noFill/>
+        </p:spPr>
+        <p:txBody>
+          <a:bodyPr wrap="square" anchor="ctr">
+            <a:spAutoFit/>
+          </a:bodyPr>
+          <a:lstStyle/>
+          <a:p>
+            <a:pPr algn="l">
+              <a:spcAft>
+                <a:spcPts val="600"/>
+              </a:spcAft>
+            </a:pPr>
+            <a:r>
+              <a:rPr sz="1200" b="1">
                 <a:solidFill>
                   <a:srgbClr val="8FB6F0"/>
                 </a:solidFill>
                 <a:latin typeface="Segoe UI"/>
               </a:rPr>
-              <a:t>DigiBull.ai · Mysore, Karnataka</a:t>
-            </a:r>
-          </a:p>
-          <a:p>
-            <a:pPr algn="l">
-              <a:spcAft>
-                <a:spcPts val="800"/>
-              </a:spcAft>
-            </a:pPr>
+              <a:t>NEW · BUG FIXES</a:t>
+            </a:r>
+          </a:p>
+        </p:txBody>
+      </p:sp>
+      <p:sp>
+        <p:nvSpPr>
+          <p:cNvPr id="5" name="TextBox 4"/>
+          <p:cNvSpPr txBox="1"/>
+          <p:nvPr/>
+        </p:nvSpPr>
+        <p:spPr>
+          <a:xfrm>
+            <a:off x="548640" y="402336"/>
+            <a:ext cx="11064240" cy="603504"/>
+          </a:xfrm>
+          <a:prstGeom prst="rect">
+            <a:avLst/>
+          </a:prstGeom>
+          <a:noFill/>
+        </p:spPr>
+        <p:txBody>
+          <a:bodyPr wrap="square" anchor="ctr">
+            <a:spAutoFit/>
+          </a:bodyPr>
+          <a:lstStyle/>
+          <a:p>
+            <a:pPr algn="l">
+              <a:spcAft>
+                <a:spcPts val="600"/>
+              </a:spcAft>
+            </a:pPr>
+            <a:r>
+              <a:rPr sz="2700" b="1">
+                <a:solidFill>
+                  <a:srgbClr val="FFFFFF"/>
+                </a:solidFill>
+                <a:latin typeface="Segoe UI"/>
+              </a:rPr>
+              <a:t>Latest fixes</a:t>
+            </a:r>
+          </a:p>
+        </p:txBody>
+      </p:sp>
+      <p:sp>
+        <p:nvSpPr>
+          <p:cNvPr id="6" name="TextBox 5"/>
+          <p:cNvSpPr txBox="1"/>
+          <p:nvPr/>
+        </p:nvSpPr>
+        <p:spPr>
+          <a:xfrm>
+            <a:off x="731520" y="1371600"/>
+            <a:ext cx="10789920" cy="5029200"/>
+          </a:xfrm>
+          <a:prstGeom prst="rect">
+            <a:avLst/>
+          </a:prstGeom>
+          <a:noFill/>
+        </p:spPr>
+        <p:txBody>
+          <a:bodyPr wrap="square" anchor="t">
+            <a:spAutoFit/>
+          </a:bodyPr>
+          <a:lstStyle/>
+          <a:p>
+            <a:pPr algn="l">
+              <a:spcAft>
+                <a:spcPts val="900"/>
+              </a:spcAft>
+            </a:pPr>
+            <a:r>
+              <a:rPr sz="1400" b="1">
+                <a:solidFill>
+                  <a:srgbClr val="1E6FE0"/>
+                </a:solidFill>
+                <a:latin typeface="Segoe UI"/>
+              </a:rPr>
+              <a:t>•  </a:t>
+            </a:r>
+            <a:r>
+              <a:rPr sz="1400" b="1">
+                <a:solidFill>
+                  <a:srgbClr val="0B1F3A"/>
+                </a:solidFill>
+                <a:latin typeface="Segoe UI"/>
+              </a:rPr>
+              <a:t>Daemon crash </a:t>
+            </a:r>
             <a:r>
               <a:rPr sz="1400" b="0">
                 <a:solidFill>
+                  <a:srgbClr val="4C596B"/>
+                </a:solidFill>
+                <a:latin typeface="Segoe UI"/>
+              </a:rPr>
+              <a:t>— better-sqlite3 built for the wrong Node (NODE_MODULE_VERSION 127 vs 137); rebuilt for Node 24 → no more 'Failed to fetch'</a:t>
+            </a:r>
+          </a:p>
+          <a:p>
+            <a:pPr algn="l">
+              <a:spcAft>
+                <a:spcPts val="900"/>
+              </a:spcAft>
+            </a:pPr>
+            <a:r>
+              <a:rPr sz="1400" b="1">
+                <a:solidFill>
+                  <a:srgbClr val="1E6FE0"/>
+                </a:solidFill>
+                <a:latin typeface="Segoe UI"/>
+              </a:rPr>
+              <a:t>•  </a:t>
+            </a:r>
+            <a:r>
+              <a:rPr sz="1400" b="1">
+                <a:solidFill>
+                  <a:srgbClr val="0B1F3A"/>
+                </a:solidFill>
+                <a:latin typeface="Segoe UI"/>
+              </a:rPr>
+              <a:t>WhatsApp QR </a:t>
+            </a:r>
+            <a:r>
+              <a:rPr sz="1400" b="0">
+                <a:solidFill>
+                  <a:srgbClr val="4C596B"/>
+                </a:solidFill>
+                <a:latin typeface="Segoe UI"/>
+              </a:rPr>
+              <a:t>— web SSE endpoint 404'd the EventSource ?token= form, killing all live events; route + client event-map fixed → QR + status work</a:t>
+            </a:r>
+          </a:p>
+          <a:p>
+            <a:pPr algn="l">
+              <a:spcAft>
+                <a:spcPts val="900"/>
+              </a:spcAft>
+            </a:pPr>
+            <a:r>
+              <a:rPr sz="1400" b="1">
+                <a:solidFill>
+                  <a:srgbClr val="1E6FE0"/>
+                </a:solidFill>
+                <a:latin typeface="Segoe UI"/>
+              </a:rPr>
+              <a:t>•  </a:t>
+            </a:r>
+            <a:r>
+              <a:rPr sz="1400" b="1">
+                <a:solidFill>
+                  <a:srgbClr val="0B1F3A"/>
+                </a:solidFill>
+                <a:latin typeface="Segoe UI"/>
+              </a:rPr>
+              <a:t>Docker </a:t>
+            </a:r>
+            <a:r>
+              <a:rPr sz="1400" b="0">
+                <a:solidFill>
+                  <a:srgbClr val="4C596B"/>
+                </a:solidFill>
+                <a:latin typeface="Segoe UI"/>
+              </a:rPr>
+              <a:t>— daemon now binds HOST (0.0.0.0) so it's reachable from the host; image builds from source under Node 24</a:t>
+            </a:r>
+          </a:p>
+          <a:p>
+            <a:pPr algn="l">
+              <a:spcAft>
+                <a:spcPts val="900"/>
+              </a:spcAft>
+            </a:pPr>
+            <a:r>
+              <a:rPr sz="1400" b="1">
+                <a:solidFill>
+                  <a:srgbClr val="1E6FE0"/>
+                </a:solidFill>
+                <a:latin typeface="Segoe UI"/>
+              </a:rPr>
+              <a:t>•  </a:t>
+            </a:r>
+            <a:r>
+              <a:rPr sz="1400" b="1">
+                <a:solidFill>
+                  <a:srgbClr val="0B1F3A"/>
+                </a:solidFill>
+                <a:latin typeface="Segoe UI"/>
+              </a:rPr>
+              <a:t>Launcher </a:t>
+            </a:r>
+            <a:r>
+              <a:rPr sz="1400" b="0">
+                <a:solidFill>
+                  <a:srgbClr val="4C596B"/>
+                </a:solidFill>
+                <a:latin typeface="Segoe UI"/>
+              </a:rPr>
+              <a:t>— CRLF endings, bundled Node 24, dev test-login forced on</a:t>
+            </a:r>
+          </a:p>
+        </p:txBody>
+      </p:sp>
+    </p:spTree>
+  </p:cSld>
+  <p:clrMapOvr>
+    <a:masterClrMapping/>
+  </p:clrMapOvr>
+</p:sld>
+</file>
+
+<file path=ppt/slides/slide18.xml><?xml version="1.0" encoding="utf-8"?>
+<p:sld xmlns:a="http://schemas.openxmlformats.org/drawingml/2006/main" xmlns:p="http://schemas.openxmlformats.org/presentationml/2006/main" xmlns:r="http://schemas.openxmlformats.org/officeDocument/2006/relationships">
+  <p:cSld>
+    <p:bg>
+      <p:bgPr>
+        <a:solidFill>
+          <a:srgbClr val="F4F7FB"/>
+        </a:solidFill>
+        <a:effectLst/>
+      </p:bgPr>
+    </p:bg>
+    <p:spTree>
+      <p:nvGrpSpPr>
+        <p:cNvPr id="1" name=""/>
+        <p:cNvGrpSpPr/>
+        <p:nvPr/>
+      </p:nvGrpSpPr>
+      <p:grpSpPr/>
+      <p:sp>
+        <p:nvSpPr>
+          <p:cNvPr id="2" name="Rectangle 1"/>
+          <p:cNvSpPr/>
+          <p:nvPr/>
+        </p:nvSpPr>
+        <p:spPr>
+          <a:xfrm>
+            <a:off x="0" y="0"/>
+            <a:ext cx="12191695" cy="1078992"/>
+          </a:xfrm>
+          <a:prstGeom prst="rect">
+            <a:avLst/>
+          </a:prstGeom>
+          <a:solidFill>
+            <a:srgbClr val="0B1F3A"/>
+          </a:solidFill>
+          <a:ln>
+            <a:noFill/>
+          </a:ln>
+          <a:effectLst/>
+        </p:spPr>
+        <p:style>
+          <a:lnRef idx="1">
+            <a:schemeClr val="accent1"/>
+          </a:lnRef>
+          <a:fillRef idx="3">
+            <a:schemeClr val="accent1"/>
+          </a:fillRef>
+          <a:effectRef idx="2">
+            <a:schemeClr val="accent1"/>
+          </a:effectRef>
+          <a:fontRef idx="minor">
+            <a:schemeClr val="lt1"/>
+          </a:fontRef>
+        </p:style>
+        <p:txBody>
+          <a:bodyPr rtlCol="0" anchor="ctr"/>
+          <a:lstStyle/>
+          <a:p>
+            <a:pPr algn="ctr"/>
+          </a:p>
+        </p:txBody>
+      </p:sp>
+      <p:sp>
+        <p:nvSpPr>
+          <p:cNvPr id="3" name="Rectangle 2"/>
+          <p:cNvSpPr/>
+          <p:nvPr/>
+        </p:nvSpPr>
+        <p:spPr>
+          <a:xfrm>
+            <a:off x="0" y="1078992"/>
+            <a:ext cx="12191695" cy="54864"/>
+          </a:xfrm>
+          <a:prstGeom prst="rect">
+            <a:avLst/>
+          </a:prstGeom>
+          <a:solidFill>
+            <a:srgbClr val="1E6FE0"/>
+          </a:solidFill>
+          <a:ln>
+            <a:noFill/>
+          </a:ln>
+          <a:effectLst/>
+        </p:spPr>
+        <p:style>
+          <a:lnRef idx="1">
+            <a:schemeClr val="accent1"/>
+          </a:lnRef>
+          <a:fillRef idx="3">
+            <a:schemeClr val="accent1"/>
+          </a:fillRef>
+          <a:effectRef idx="2">
+            <a:schemeClr val="accent1"/>
+          </a:effectRef>
+          <a:fontRef idx="minor">
+            <a:schemeClr val="lt1"/>
+          </a:fontRef>
+        </p:style>
+        <p:txBody>
+          <a:bodyPr rtlCol="0" anchor="ctr"/>
+          <a:lstStyle/>
+          <a:p>
+            <a:pPr algn="ctr"/>
+          </a:p>
+        </p:txBody>
+      </p:sp>
+      <p:sp>
+        <p:nvSpPr>
+          <p:cNvPr id="4" name="TextBox 3"/>
+          <p:cNvSpPr txBox="1"/>
+          <p:nvPr/>
+        </p:nvSpPr>
+        <p:spPr>
+          <a:xfrm>
+            <a:off x="548640" y="109728"/>
+            <a:ext cx="11064240" cy="384048"/>
+          </a:xfrm>
+          <a:prstGeom prst="rect">
+            <a:avLst/>
+          </a:prstGeom>
+          <a:noFill/>
+        </p:spPr>
+        <p:txBody>
+          <a:bodyPr wrap="square" anchor="ctr">
+            <a:spAutoFit/>
+          </a:bodyPr>
+          <a:lstStyle/>
+          <a:p>
+            <a:pPr algn="l">
+              <a:spcAft>
+                <a:spcPts val="600"/>
+              </a:spcAft>
+            </a:pPr>
+            <a:r>
+              <a:rPr sz="1200" b="1">
+                <a:solidFill>
+                  <a:srgbClr val="8FB6F0"/>
+                </a:solidFill>
+                <a:latin typeface="Segoe UI"/>
+              </a:rPr>
+              <a:t>RUN IT</a:t>
+            </a:r>
+          </a:p>
+        </p:txBody>
+      </p:sp>
+      <p:sp>
+        <p:nvSpPr>
+          <p:cNvPr id="5" name="TextBox 4"/>
+          <p:cNvSpPr txBox="1"/>
+          <p:nvPr/>
+        </p:nvSpPr>
+        <p:spPr>
+          <a:xfrm>
+            <a:off x="548640" y="402336"/>
+            <a:ext cx="11064240" cy="603504"/>
+          </a:xfrm>
+          <a:prstGeom prst="rect">
+            <a:avLst/>
+          </a:prstGeom>
+          <a:noFill/>
+        </p:spPr>
+        <p:txBody>
+          <a:bodyPr wrap="square" anchor="ctr">
+            <a:spAutoFit/>
+          </a:bodyPr>
+          <a:lstStyle/>
+          <a:p>
+            <a:pPr algn="l">
+              <a:spcAft>
+                <a:spcPts val="600"/>
+              </a:spcAft>
+            </a:pPr>
+            <a:r>
+              <a:rPr sz="2700" b="1">
+                <a:solidFill>
+                  <a:srgbClr val="FFFFFF"/>
+                </a:solidFill>
+                <a:latin typeface="Segoe UI"/>
+              </a:rPr>
+              <a:t>Two ways</a:t>
+            </a:r>
+          </a:p>
+        </p:txBody>
+      </p:sp>
+      <p:sp>
+        <p:nvSpPr>
+          <p:cNvPr id="6" name="TextBox 5"/>
+          <p:cNvSpPr txBox="1"/>
+          <p:nvPr/>
+        </p:nvSpPr>
+        <p:spPr>
+          <a:xfrm>
+            <a:off x="640080" y="1325880"/>
+            <a:ext cx="10972800" cy="365760"/>
+          </a:xfrm>
+          <a:prstGeom prst="rect">
+            <a:avLst/>
+          </a:prstGeom>
+          <a:noFill/>
+        </p:spPr>
+        <p:txBody>
+          <a:bodyPr wrap="square" anchor="t">
+            <a:spAutoFit/>
+          </a:bodyPr>
+          <a:lstStyle/>
+          <a:p>
+            <a:pPr algn="l">
+              <a:spcAft>
+                <a:spcPts val="600"/>
+              </a:spcAft>
+            </a:pPr>
+            <a:r>
+              <a:rPr sz="1600" b="1">
+                <a:solidFill>
+                  <a:srgbClr val="0B1F3A"/>
+                </a:solidFill>
+                <a:latin typeface="Segoe UI"/>
+              </a:rPr>
+              <a:t>Windows (recommended)</a:t>
+            </a:r>
+          </a:p>
+        </p:txBody>
+      </p:sp>
+      <p:sp>
+        <p:nvSpPr>
+          <p:cNvPr id="7" name="Rounded Rectangle 6"/>
+          <p:cNvSpPr/>
+          <p:nvPr/>
+        </p:nvSpPr>
+        <p:spPr>
+          <a:xfrm>
+            <a:off x="640080" y="1783080"/>
+            <a:ext cx="10881360" cy="1371600"/>
+          </a:xfrm>
+          <a:prstGeom prst="roundRect">
+            <a:avLst/>
+          </a:prstGeom>
+          <a:solidFill>
+            <a:srgbClr val="122A4A"/>
+          </a:solidFill>
+          <a:ln>
+            <a:noFill/>
+          </a:ln>
+          <a:effectLst/>
+        </p:spPr>
+        <p:style>
+          <a:lnRef idx="1">
+            <a:schemeClr val="accent1"/>
+          </a:lnRef>
+          <a:fillRef idx="3">
+            <a:schemeClr val="accent1"/>
+          </a:fillRef>
+          <a:effectRef idx="2">
+            <a:schemeClr val="accent1"/>
+          </a:effectRef>
+          <a:fontRef idx="minor">
+            <a:schemeClr val="lt1"/>
+          </a:fontRef>
+        </p:style>
+        <p:txBody>
+          <a:bodyPr rtlCol="0" anchor="ctr"/>
+          <a:lstStyle/>
+          <a:p>
+            <a:pPr algn="ctr"/>
+          </a:p>
+        </p:txBody>
+      </p:sp>
+      <p:sp>
+        <p:nvSpPr>
+          <p:cNvPr id="8" name="TextBox 7"/>
+          <p:cNvSpPr txBox="1"/>
+          <p:nvPr/>
+        </p:nvSpPr>
+        <p:spPr>
+          <a:xfrm>
+            <a:off x="822960" y="1892808"/>
+            <a:ext cx="10515600" cy="1188720"/>
+          </a:xfrm>
+          <a:prstGeom prst="rect">
+            <a:avLst/>
+          </a:prstGeom>
+          <a:noFill/>
+        </p:spPr>
+        <p:txBody>
+          <a:bodyPr wrap="square" anchor="t">
+            <a:spAutoFit/>
+          </a:bodyPr>
+          <a:lstStyle/>
+          <a:p>
+            <a:pPr algn="l">
+              <a:spcAft>
+                <a:spcPts val="200"/>
+              </a:spcAft>
+            </a:pPr>
+            <a:r>
+              <a:rPr sz="1500" b="0">
+                <a:solidFill>
                   <a:srgbClr val="CFE3FF"/>
                 </a:solidFill>
-                <a:latin typeface="Segoe UI"/>
-              </a:rPr>
-              <a:t>Initial web transform: Chaithanya</a:t>
-            </a:r>
-          </a:p>
-          <a:p>
-            <a:pPr algn="l">
-              <a:spcAft>
-                <a:spcPts val="800"/>
-              </a:spcAft>
-            </a:pPr>
-            <a:r>
-              <a:rPr sz="1400" b="0">
+                <a:latin typeface="Consolas"/>
+              </a:rPr>
+              <a:t>git clone https://github.com/solutionsDigibull/SRIM-by_Digibull.git</a:t>
+            </a:r>
+          </a:p>
+          <a:p>
+            <a:pPr algn="l">
+              <a:spcAft>
+                <a:spcPts val="200"/>
+              </a:spcAft>
+            </a:pPr>
+            <a:r>
+              <a:rPr sz="1500" b="0">
                 <a:solidFill>
                   <a:srgbClr val="CFE3FF"/>
                 </a:solidFill>
-                <a:latin typeface="Segoe UI"/>
-              </a:rPr>
-              <a:t>SRIM analysis, remediation, UI update, setup &amp; WhatsApp/Docker fixes: Nagabhushana Raju S</a:t>
+                <a:latin typeface="Consolas"/>
+              </a:rPr>
+              <a:t>cd SRIM-by_Digibull  &amp;&amp;  git lfs install  &amp;&amp;  git lfs pull</a:t>
+            </a:r>
+          </a:p>
+          <a:p>
+            <a:pPr algn="l">
+              <a:spcAft>
+                <a:spcPts val="200"/>
+              </a:spcAft>
+            </a:pPr>
+            <a:r>
+              <a:rPr sz="1500" b="0">
+                <a:solidFill>
+                  <a:srgbClr val="CFE3FF"/>
+                </a:solidFill>
+                <a:latin typeface="Consolas"/>
+              </a:rPr>
+              <a:t>INSTALL.bat            then            LAUNCH-WEB.bat</a:t>
+            </a:r>
+          </a:p>
+        </p:txBody>
+      </p:sp>
+      <p:sp>
+        <p:nvSpPr>
+          <p:cNvPr id="9" name="TextBox 8"/>
+          <p:cNvSpPr txBox="1"/>
+          <p:nvPr/>
+        </p:nvSpPr>
+        <p:spPr>
+          <a:xfrm>
+            <a:off x="640080" y="3355848"/>
+            <a:ext cx="10972800" cy="365760"/>
+          </a:xfrm>
+          <a:prstGeom prst="rect">
+            <a:avLst/>
+          </a:prstGeom>
+          <a:noFill/>
+        </p:spPr>
+        <p:txBody>
+          <a:bodyPr wrap="square" anchor="t">
+            <a:spAutoFit/>
+          </a:bodyPr>
+          <a:lstStyle/>
+          <a:p>
+            <a:pPr algn="l">
+              <a:spcAft>
+                <a:spcPts val="600"/>
+              </a:spcAft>
+            </a:pPr>
+            <a:r>
+              <a:rPr sz="1600" b="1">
+                <a:solidFill>
+                  <a:srgbClr val="0B1F3A"/>
+                </a:solidFill>
+                <a:latin typeface="Segoe UI"/>
+              </a:rPr>
+              <a:t>Docker (any OS)</a:t>
+            </a:r>
+          </a:p>
+        </p:txBody>
+      </p:sp>
+      <p:sp>
+        <p:nvSpPr>
+          <p:cNvPr id="10" name="Rounded Rectangle 9"/>
+          <p:cNvSpPr/>
+          <p:nvPr/>
+        </p:nvSpPr>
+        <p:spPr>
+          <a:xfrm>
+            <a:off x="640080" y="3794760"/>
+            <a:ext cx="10881360" cy="1005840"/>
+          </a:xfrm>
+          <a:prstGeom prst="roundRect">
+            <a:avLst/>
+          </a:prstGeom>
+          <a:solidFill>
+            <a:srgbClr val="122A4A"/>
+          </a:solidFill>
+          <a:ln>
+            <a:noFill/>
+          </a:ln>
+          <a:effectLst/>
+        </p:spPr>
+        <p:style>
+          <a:lnRef idx="1">
+            <a:schemeClr val="accent1"/>
+          </a:lnRef>
+          <a:fillRef idx="3">
+            <a:schemeClr val="accent1"/>
+          </a:fillRef>
+          <a:effectRef idx="2">
+            <a:schemeClr val="accent1"/>
+          </a:effectRef>
+          <a:fontRef idx="minor">
+            <a:schemeClr val="lt1"/>
+          </a:fontRef>
+        </p:style>
+        <p:txBody>
+          <a:bodyPr rtlCol="0" anchor="ctr"/>
+          <a:lstStyle/>
+          <a:p>
+            <a:pPr algn="ctr"/>
+          </a:p>
+        </p:txBody>
+      </p:sp>
+      <p:sp>
+        <p:nvSpPr>
+          <p:cNvPr id="11" name="TextBox 10"/>
+          <p:cNvSpPr txBox="1"/>
+          <p:nvPr/>
+        </p:nvSpPr>
+        <p:spPr>
+          <a:xfrm>
+            <a:off x="822960" y="3904488"/>
+            <a:ext cx="10515600" cy="822960"/>
+          </a:xfrm>
+          <a:prstGeom prst="rect">
+            <a:avLst/>
+          </a:prstGeom>
+          <a:noFill/>
+        </p:spPr>
+        <p:txBody>
+          <a:bodyPr wrap="square" anchor="t">
+            <a:spAutoFit/>
+          </a:bodyPr>
+          <a:lstStyle/>
+          <a:p>
+            <a:pPr algn="l">
+              <a:spcAft>
+                <a:spcPts val="200"/>
+              </a:spcAft>
+            </a:pPr>
+            <a:r>
+              <a:rPr sz="1500" b="0">
+                <a:solidFill>
+                  <a:srgbClr val="CFE3FF"/>
+                </a:solidFill>
+                <a:latin typeface="Consolas"/>
+              </a:rPr>
+              <a:t>docker compose up --build</a:t>
+            </a:r>
+          </a:p>
+          <a:p>
+            <a:pPr algn="l">
+              <a:spcAft>
+                <a:spcPts val="200"/>
+              </a:spcAft>
+            </a:pPr>
+            <a:r>
+              <a:rPr sz="1500" b="0">
+                <a:solidFill>
+                  <a:srgbClr val="CFE3FF"/>
+                </a:solidFill>
+                <a:latin typeface="Consolas"/>
+              </a:rPr>
+              <a:t># → http://localhost:5173</a:t>
+            </a:r>
+          </a:p>
+        </p:txBody>
+      </p:sp>
+      <p:sp>
+        <p:nvSpPr>
+          <p:cNvPr id="12" name="TextBox 11"/>
+          <p:cNvSpPr txBox="1"/>
+          <p:nvPr/>
+        </p:nvSpPr>
+        <p:spPr>
+          <a:xfrm>
+            <a:off x="640080" y="5943600"/>
+            <a:ext cx="10972800" cy="457200"/>
+          </a:xfrm>
+          <a:prstGeom prst="rect">
+            <a:avLst/>
+          </a:prstGeom>
+          <a:noFill/>
+        </p:spPr>
+        <p:txBody>
+          <a:bodyPr wrap="square" anchor="t">
+            <a:spAutoFit/>
+          </a:bodyPr>
+          <a:lstStyle/>
+          <a:p>
+            <a:pPr algn="l">
+              <a:spcAft>
+                <a:spcPts val="600"/>
+              </a:spcAft>
+            </a:pPr>
+            <a:r>
+              <a:rPr sz="1300" b="0">
+                <a:solidFill>
+                  <a:srgbClr val="4C596B"/>
+                </a:solidFill>
+                <a:latin typeface="Segoe UI"/>
+              </a:rPr>
+              <a:t>Dev login: 'Sign in as Tester' · token srim-dev-token · digibull / srim-test-2026</a:t>
+            </a:r>
+          </a:p>
+        </p:txBody>
+      </p:sp>
+    </p:spTree>
+  </p:cSld>
+  <p:clrMapOvr>
+    <a:masterClrMapping/>
+  </p:clrMapOvr>
+</p:sld>
+</file>
+
+<file path=ppt/slides/slide19.xml><?xml version="1.0" encoding="utf-8"?>
+<p:sld xmlns:a="http://schemas.openxmlformats.org/drawingml/2006/main" xmlns:p="http://schemas.openxmlformats.org/presentationml/2006/main" xmlns:r="http://schemas.openxmlformats.org/officeDocument/2006/relationships">
+  <p:cSld>
+    <p:bg>
+      <p:bgPr>
+        <a:solidFill>
+          <a:srgbClr val="F4F7FB"/>
+        </a:solidFill>
+        <a:effectLst/>
+      </p:bgPr>
+    </p:bg>
+    <p:spTree>
+      <p:nvGrpSpPr>
+        <p:cNvPr id="1" name=""/>
+        <p:cNvGrpSpPr/>
+        <p:nvPr/>
+      </p:nvGrpSpPr>
+      <p:grpSpPr/>
+      <p:sp>
+        <p:nvSpPr>
+          <p:cNvPr id="2" name="Rectangle 1"/>
+          <p:cNvSpPr/>
+          <p:nvPr/>
+        </p:nvSpPr>
+        <p:spPr>
+          <a:xfrm>
+            <a:off x="0" y="0"/>
+            <a:ext cx="12191695" cy="1078992"/>
+          </a:xfrm>
+          <a:prstGeom prst="rect">
+            <a:avLst/>
+          </a:prstGeom>
+          <a:solidFill>
+            <a:srgbClr val="0B1F3A"/>
+          </a:solidFill>
+          <a:ln>
+            <a:noFill/>
+          </a:ln>
+          <a:effectLst/>
+        </p:spPr>
+        <p:style>
+          <a:lnRef idx="1">
+            <a:schemeClr val="accent1"/>
+          </a:lnRef>
+          <a:fillRef idx="3">
+            <a:schemeClr val="accent1"/>
+          </a:fillRef>
+          <a:effectRef idx="2">
+            <a:schemeClr val="accent1"/>
+          </a:effectRef>
+          <a:fontRef idx="minor">
+            <a:schemeClr val="lt1"/>
+          </a:fontRef>
+        </p:style>
+        <p:txBody>
+          <a:bodyPr rtlCol="0" anchor="ctr"/>
+          <a:lstStyle/>
+          <a:p>
+            <a:pPr algn="ctr"/>
+          </a:p>
+        </p:txBody>
+      </p:sp>
+      <p:sp>
+        <p:nvSpPr>
+          <p:cNvPr id="3" name="Rectangle 2"/>
+          <p:cNvSpPr/>
+          <p:nvPr/>
+        </p:nvSpPr>
+        <p:spPr>
+          <a:xfrm>
+            <a:off x="0" y="1078992"/>
+            <a:ext cx="12191695" cy="54864"/>
+          </a:xfrm>
+          <a:prstGeom prst="rect">
+            <a:avLst/>
+          </a:prstGeom>
+          <a:solidFill>
+            <a:srgbClr val="1E6FE0"/>
+          </a:solidFill>
+          <a:ln>
+            <a:noFill/>
+          </a:ln>
+          <a:effectLst/>
+        </p:spPr>
+        <p:style>
+          <a:lnRef idx="1">
+            <a:schemeClr val="accent1"/>
+          </a:lnRef>
+          <a:fillRef idx="3">
+            <a:schemeClr val="accent1"/>
+          </a:fillRef>
+          <a:effectRef idx="2">
+            <a:schemeClr val="accent1"/>
+          </a:effectRef>
+          <a:fontRef idx="minor">
+            <a:schemeClr val="lt1"/>
+          </a:fontRef>
+        </p:style>
+        <p:txBody>
+          <a:bodyPr rtlCol="0" anchor="ctr"/>
+          <a:lstStyle/>
+          <a:p>
+            <a:pPr algn="ctr"/>
+          </a:p>
+        </p:txBody>
+      </p:sp>
+      <p:sp>
+        <p:nvSpPr>
+          <p:cNvPr id="4" name="TextBox 3"/>
+          <p:cNvSpPr txBox="1"/>
+          <p:nvPr/>
+        </p:nvSpPr>
+        <p:spPr>
+          <a:xfrm>
+            <a:off x="548640" y="109728"/>
+            <a:ext cx="11064240" cy="384048"/>
+          </a:xfrm>
+          <a:prstGeom prst="rect">
+            <a:avLst/>
+          </a:prstGeom>
+          <a:noFill/>
+        </p:spPr>
+        <p:txBody>
+          <a:bodyPr wrap="square" anchor="ctr">
+            <a:spAutoFit/>
+          </a:bodyPr>
+          <a:lstStyle/>
+          <a:p>
+            <a:pPr algn="l">
+              <a:spcAft>
+                <a:spcPts val="600"/>
+              </a:spcAft>
+            </a:pPr>
+            <a:r>
+              <a:rPr sz="1200" b="1">
+                <a:solidFill>
+                  <a:srgbClr val="8FB6F0"/>
+                </a:solidFill>
+                <a:latin typeface="Segoe UI"/>
+              </a:rPr>
+              <a:t>STATUS</a:t>
+            </a:r>
+          </a:p>
+        </p:txBody>
+      </p:sp>
+      <p:sp>
+        <p:nvSpPr>
+          <p:cNvPr id="5" name="TextBox 4"/>
+          <p:cNvSpPr txBox="1"/>
+          <p:nvPr/>
+        </p:nvSpPr>
+        <p:spPr>
+          <a:xfrm>
+            <a:off x="548640" y="402336"/>
+            <a:ext cx="11064240" cy="603504"/>
+          </a:xfrm>
+          <a:prstGeom prst="rect">
+            <a:avLst/>
+          </a:prstGeom>
+          <a:noFill/>
+        </p:spPr>
+        <p:txBody>
+          <a:bodyPr wrap="square" anchor="ctr">
+            <a:spAutoFit/>
+          </a:bodyPr>
+          <a:lstStyle/>
+          <a:p>
+            <a:pPr algn="l">
+              <a:spcAft>
+                <a:spcPts val="600"/>
+              </a:spcAft>
+            </a:pPr>
+            <a:r>
+              <a:rPr sz="2700" b="1">
+                <a:solidFill>
+                  <a:srgbClr val="FFFFFF"/>
+                </a:solidFill>
+                <a:latin typeface="Segoe UI"/>
+              </a:rPr>
+              <a:t>Where it stands</a:t>
+            </a:r>
+          </a:p>
+        </p:txBody>
+      </p:sp>
+      <p:sp>
+        <p:nvSpPr>
+          <p:cNvPr id="6" name="TextBox 5"/>
+          <p:cNvSpPr txBox="1"/>
+          <p:nvPr/>
+        </p:nvSpPr>
+        <p:spPr>
+          <a:xfrm>
+            <a:off x="731520" y="1371600"/>
+            <a:ext cx="10789920" cy="5029200"/>
+          </a:xfrm>
+          <a:prstGeom prst="rect">
+            <a:avLst/>
+          </a:prstGeom>
+          <a:noFill/>
+        </p:spPr>
+        <p:txBody>
+          <a:bodyPr wrap="square" anchor="t">
+            <a:spAutoFit/>
+          </a:bodyPr>
+          <a:lstStyle/>
+          <a:p>
+            <a:pPr algn="l">
+              <a:spcAft>
+                <a:spcPts val="900"/>
+              </a:spcAft>
+            </a:pPr>
+            <a:r>
+              <a:rPr sz="1700" b="1">
+                <a:solidFill>
+                  <a:srgbClr val="1E6FE0"/>
+                </a:solidFill>
+                <a:latin typeface="Segoe UI"/>
+              </a:rPr>
+              <a:t>•  </a:t>
+            </a:r>
+            <a:r>
+              <a:rPr sz="1700" b="0">
+                <a:solidFill>
+                  <a:srgbClr val="4C596B"/>
+                </a:solidFill>
+                <a:latin typeface="Segoe UI"/>
+              </a:rPr>
+              <a:t>Web build works end-to-end (providers connect, tasks run)</a:t>
+            </a:r>
+          </a:p>
+          <a:p>
+            <a:pPr algn="l">
+              <a:spcAft>
+                <a:spcPts val="900"/>
+              </a:spcAft>
+            </a:pPr>
+            <a:r>
+              <a:rPr sz="1700" b="1">
+                <a:solidFill>
+                  <a:srgbClr val="1E6FE0"/>
+                </a:solidFill>
+                <a:latin typeface="Segoe UI"/>
+              </a:rPr>
+              <a:t>•  </a:t>
+            </a:r>
+            <a:r>
+              <a:rPr sz="1700" b="0">
+                <a:solidFill>
+                  <a:srgbClr val="4C596B"/>
+                </a:solidFill>
+                <a:latin typeface="Segoe UI"/>
+              </a:rPr>
+              <a:t>DigiBull Auto + local-model UI verified</a:t>
+            </a:r>
+          </a:p>
+          <a:p>
+            <a:pPr algn="l">
+              <a:spcAft>
+                <a:spcPts val="900"/>
+              </a:spcAft>
+            </a:pPr>
+            <a:r>
+              <a:rPr sz="1700" b="1">
+                <a:solidFill>
+                  <a:srgbClr val="1E6FE0"/>
+                </a:solidFill>
+                <a:latin typeface="Segoe UI"/>
+              </a:rPr>
+              <a:t>•  </a:t>
+            </a:r>
+            <a:r>
+              <a:rPr sz="1700" b="0">
+                <a:solidFill>
+                  <a:srgbClr val="4C596B"/>
+                </a:solidFill>
+                <a:latin typeface="Segoe UI"/>
+              </a:rPr>
+              <a:t>WhatsApp connects &amp; shows QR; Docker reachable from host</a:t>
+            </a:r>
+          </a:p>
+          <a:p>
+            <a:pPr algn="l">
+              <a:spcAft>
+                <a:spcPts val="900"/>
+              </a:spcAft>
+            </a:pPr>
+            <a:r>
+              <a:rPr sz="1700" b="1">
+                <a:solidFill>
+                  <a:srgbClr val="1E6FE0"/>
+                </a:solidFill>
+                <a:latin typeface="Segoe UI"/>
+              </a:rPr>
+              <a:t>•  </a:t>
+            </a:r>
+            <a:r>
+              <a:rPr sz="1700" b="0">
+                <a:solidFill>
+                  <a:srgbClr val="4C596B"/>
+                </a:solidFill>
+                <a:latin typeface="Segoe UI"/>
+              </a:rPr>
+              <a:t>Setup automated via INSTALL.bat / LAUNCH-WEB.bat</a:t>
+            </a:r>
+          </a:p>
+          <a:p>
+            <a:pPr algn="l">
+              <a:spcAft>
+                <a:spcPts val="900"/>
+              </a:spcAft>
+            </a:pPr>
+            <a:r>
+              <a:rPr sz="1700" b="1">
+                <a:solidFill>
+                  <a:srgbClr val="1E6FE0"/>
+                </a:solidFill>
+                <a:latin typeface="Segoe UI"/>
+              </a:rPr>
+              <a:t>•  </a:t>
+            </a:r>
+            <a:r>
+              <a:rPr sz="1700" b="1">
+                <a:solidFill>
+                  <a:srgbClr val="0B1F3A"/>
+                </a:solidFill>
+                <a:latin typeface="Segoe UI"/>
+              </a:rPr>
+              <a:t>Roadmap: </a:t>
+            </a:r>
+            <a:r>
+              <a:rPr sz="1700" b="0">
+                <a:solidFill>
+                  <a:srgbClr val="4C596B"/>
+                </a:solidFill>
+                <a:latin typeface="Segoe UI"/>
+              </a:rPr>
+              <a:t>native subsystems, 0.4.14 source-only features</a:t>
             </a:r>
           </a:p>
         </p:txBody>
@@ -5859,7 +7166,7 @@
         <p:spPr>
           <a:xfrm>
             <a:off x="0" y="0"/>
-            <a:ext cx="12191695" cy="1097280"/>
+            <a:ext cx="12191695" cy="1078992"/>
           </a:xfrm>
           <a:prstGeom prst="rect">
             <a:avLst/>
@@ -5902,7 +7209,7 @@
         </p:nvSpPr>
         <p:spPr>
           <a:xfrm>
-            <a:off x="0" y="1097280"/>
+            <a:off x="0" y="1078992"/>
             <a:ext cx="12191695" cy="54864"/>
           </a:xfrm>
           <a:prstGeom prst="rect">
@@ -5947,7 +7254,7 @@
         <p:spPr>
           <a:xfrm>
             <a:off x="548640" y="109728"/>
-            <a:ext cx="11064240" cy="411480"/>
+            <a:ext cx="11064240" cy="384048"/>
           </a:xfrm>
           <a:prstGeom prst="rect">
             <a:avLst/>
@@ -5985,8 +7292,8 @@
         </p:nvSpPr>
         <p:spPr>
           <a:xfrm>
-            <a:off x="548640" y="411480"/>
-            <a:ext cx="11064240" cy="621792"/>
+            <a:off x="548640" y="402336"/>
+            <a:ext cx="11064240" cy="603504"/>
           </a:xfrm>
           <a:prstGeom prst="rect">
             <a:avLst/>
@@ -6005,7 +7312,7 @@
               </a:spcAft>
             </a:pPr>
             <a:r>
-              <a:rPr sz="2800" b="1">
+              <a:rPr sz="2700" b="1">
                 <a:solidFill>
                   <a:srgbClr val="FFFFFF"/>
                 </a:solidFill>
@@ -6024,8 +7331,8 @@
         </p:nvSpPr>
         <p:spPr>
           <a:xfrm>
-            <a:off x="731520" y="1417320"/>
-            <a:ext cx="10789920" cy="4937760"/>
+            <a:off x="731520" y="1371600"/>
+            <a:ext cx="10789920" cy="5029200"/>
           </a:xfrm>
           <a:prstGeom prst="rect">
             <a:avLst/>
@@ -6040,7 +7347,7 @@
           <a:p>
             <a:pPr algn="l">
               <a:spcAft>
-                <a:spcPts val="1000"/>
+                <a:spcPts val="900"/>
               </a:spcAft>
             </a:pPr>
             <a:r>
@@ -6074,7 +7381,7 @@
           <a:p>
             <a:pPr algn="l">
               <a:spcAft>
-                <a:spcPts val="1000"/>
+                <a:spcPts val="900"/>
               </a:spcAft>
             </a:pPr>
             <a:r>
@@ -6108,7 +7415,7 @@
           <a:p>
             <a:pPr algn="l">
               <a:spcAft>
-                <a:spcPts val="1000"/>
+                <a:spcPts val="900"/>
               </a:spcAft>
             </a:pPr>
             <a:r>
@@ -6142,7 +7449,7 @@
           <a:p>
             <a:pPr algn="l">
               <a:spcAft>
-                <a:spcPts val="1000"/>
+                <a:spcPts val="900"/>
               </a:spcAft>
             </a:pPr>
             <a:r>
@@ -6171,6 +7478,158 @@
                 <a:latin typeface="Segoe UI"/>
               </a:rPr>
               <a:t>SRIM / DigiBull</a:t>
+            </a:r>
+          </a:p>
+        </p:txBody>
+      </p:sp>
+    </p:spTree>
+  </p:cSld>
+  <p:clrMapOvr>
+    <a:masterClrMapping/>
+  </p:clrMapOvr>
+</p:sld>
+</file>
+
+<file path=ppt/slides/slide20.xml><?xml version="1.0" encoding="utf-8"?>
+<p:sld xmlns:a="http://schemas.openxmlformats.org/drawingml/2006/main" xmlns:p="http://schemas.openxmlformats.org/presentationml/2006/main" xmlns:r="http://schemas.openxmlformats.org/officeDocument/2006/relationships">
+  <p:cSld>
+    <p:bg>
+      <p:bgPr>
+        <a:solidFill>
+          <a:srgbClr val="0B1F3A"/>
+        </a:solidFill>
+        <a:effectLst/>
+      </p:bgPr>
+    </p:bg>
+    <p:spTree>
+      <p:nvGrpSpPr>
+        <p:cNvPr id="1" name=""/>
+        <p:cNvGrpSpPr/>
+        <p:nvPr/>
+      </p:nvGrpSpPr>
+      <p:grpSpPr/>
+      <p:sp>
+        <p:nvSpPr>
+          <p:cNvPr id="2" name="TextBox 1"/>
+          <p:cNvSpPr txBox="1"/>
+          <p:nvPr/>
+        </p:nvSpPr>
+        <p:spPr>
+          <a:xfrm>
+            <a:off x="914400" y="2286000"/>
+            <a:ext cx="10515600" cy="914400"/>
+          </a:xfrm>
+          <a:prstGeom prst="rect">
+            <a:avLst/>
+          </a:prstGeom>
+          <a:noFill/>
+        </p:spPr>
+        <p:txBody>
+          <a:bodyPr wrap="square" anchor="t">
+            <a:spAutoFit/>
+          </a:bodyPr>
+          <a:lstStyle/>
+          <a:p>
+            <a:pPr algn="l">
+              <a:spcAft>
+                <a:spcPts val="600"/>
+              </a:spcAft>
+            </a:pPr>
+            <a:r>
+              <a:rPr sz="4600" b="1">
+                <a:solidFill>
+                  <a:srgbClr val="FFFFFF"/>
+                </a:solidFill>
+                <a:latin typeface="Segoe UI"/>
+              </a:rPr>
+              <a:t>Thank you</a:t>
+            </a:r>
+          </a:p>
+        </p:txBody>
+      </p:sp>
+      <p:sp>
+        <p:nvSpPr>
+          <p:cNvPr id="3" name="TextBox 2"/>
+          <p:cNvSpPr txBox="1"/>
+          <p:nvPr/>
+        </p:nvSpPr>
+        <p:spPr>
+          <a:xfrm>
+            <a:off x="914400" y="3383280"/>
+            <a:ext cx="10515600" cy="1645920"/>
+          </a:xfrm>
+          <a:prstGeom prst="rect">
+            <a:avLst/>
+          </a:prstGeom>
+          <a:noFill/>
+        </p:spPr>
+        <p:txBody>
+          <a:bodyPr wrap="square" anchor="t">
+            <a:spAutoFit/>
+          </a:bodyPr>
+          <a:lstStyle/>
+          <a:p>
+            <a:pPr algn="l">
+              <a:spcAft>
+                <a:spcPts val="800"/>
+              </a:spcAft>
+            </a:pPr>
+            <a:r>
+              <a:rPr sz="1800" b="0">
+                <a:solidFill>
+                  <a:srgbClr val="8FB6F0"/>
+                </a:solidFill>
+                <a:latin typeface="Segoe UI"/>
+              </a:rPr>
+              <a:t>DigiBull.ai · Mysore, Karnataka</a:t>
+            </a:r>
+          </a:p>
+          <a:p>
+            <a:pPr algn="l">
+              <a:spcAft>
+                <a:spcPts val="800"/>
+              </a:spcAft>
+            </a:pPr>
+            <a:r>
+              <a:rPr sz="1400" b="0">
+                <a:solidFill>
+                  <a:srgbClr val="CFE3FF"/>
+                </a:solidFill>
+                <a:latin typeface="Segoe UI"/>
+              </a:rPr>
+              <a:t>Initial web transform: Chaithanya</a:t>
+            </a:r>
+          </a:p>
+          <a:p>
+            <a:pPr algn="l">
+              <a:spcAft>
+                <a:spcPts val="800"/>
+              </a:spcAft>
+            </a:pPr>
+            <a:r>
+              <a:rPr sz="1400" b="0">
+                <a:solidFill>
+                  <a:srgbClr val="CFE3FF"/>
+                </a:solidFill>
+                <a:latin typeface="Segoe UI"/>
+              </a:rPr>
+              <a:t>Analysis, remediation, new features, setup &amp; WhatsApp/Docker fixes:</a:t>
+            </a:r>
+          </a:p>
+          <a:p>
+            <a:pPr algn="l">
+              <a:spcAft>
+                <a:spcPts val="800"/>
+              </a:spcAft>
+            </a:pPr>
+            <a:r>
+              <a:rPr sz="1600" b="1">
+                <a:solidFill>
+                  <a:srgbClr val="FFFFFF"/>
+                </a:solidFill>
+                <a:latin typeface="Segoe UI"/>
+              </a:rPr>
+              <a:t>Nagabhushana Raju S</a:t>
             </a:r>
           </a:p>
         </p:txBody>
@@ -6210,7 +7669,7 @@
         <p:spPr>
           <a:xfrm>
             <a:off x="0" y="0"/>
-            <a:ext cx="12191695" cy="1097280"/>
+            <a:ext cx="12191695" cy="1078992"/>
           </a:xfrm>
           <a:prstGeom prst="rect">
             <a:avLst/>
@@ -6253,7 +7712,7 @@
         </p:nvSpPr>
         <p:spPr>
           <a:xfrm>
-            <a:off x="0" y="1097280"/>
+            <a:off x="0" y="1078992"/>
             <a:ext cx="12191695" cy="54864"/>
           </a:xfrm>
           <a:prstGeom prst="rect">
@@ -6298,7 +7757,7 @@
         <p:spPr>
           <a:xfrm>
             <a:off x="548640" y="109728"/>
-            <a:ext cx="11064240" cy="411480"/>
+            <a:ext cx="11064240" cy="384048"/>
           </a:xfrm>
           <a:prstGeom prst="rect">
             <a:avLst/>
@@ -6336,8 +7795,8 @@
         </p:nvSpPr>
         <p:spPr>
           <a:xfrm>
-            <a:off x="548640" y="411480"/>
-            <a:ext cx="11064240" cy="621792"/>
+            <a:off x="548640" y="402336"/>
+            <a:ext cx="11064240" cy="603504"/>
           </a:xfrm>
           <a:prstGeom prst="rect">
             <a:avLst/>
@@ -6356,7 +7815,7 @@
               </a:spcAft>
             </a:pPr>
             <a:r>
-              <a:rPr sz="2800" b="1">
+              <a:rPr sz="2700" b="1">
                 <a:solidFill>
                   <a:srgbClr val="FFFFFF"/>
                 </a:solidFill>
@@ -6375,8 +7834,8 @@
         </p:nvSpPr>
         <p:spPr>
           <a:xfrm>
-            <a:off x="731520" y="1417320"/>
-            <a:ext cx="10789920" cy="4937760"/>
+            <a:off x="731520" y="1371600"/>
+            <a:ext cx="10789920" cy="5029200"/>
           </a:xfrm>
           <a:prstGeom prst="rect">
             <a:avLst/>
@@ -6391,7 +7850,7 @@
           <a:p>
             <a:pPr algn="l">
               <a:spcAft>
-                <a:spcPts val="1000"/>
+                <a:spcPts val="900"/>
               </a:spcAft>
             </a:pPr>
             <a:r>
@@ -6416,7 +7875,7 @@
           <a:p>
             <a:pPr algn="l">
               <a:spcAft>
-                <a:spcPts val="1000"/>
+                <a:spcPts val="900"/>
               </a:spcAft>
             </a:pPr>
             <a:r>
@@ -6441,7 +7900,7 @@
           <a:p>
             <a:pPr algn="l">
               <a:spcAft>
-                <a:spcPts val="1000"/>
+                <a:spcPts val="900"/>
               </a:spcAft>
             </a:pPr>
             <a:r>
@@ -6466,7 +7925,7 @@
           <a:p>
             <a:pPr algn="l">
               <a:spcAft>
-                <a:spcPts val="1000"/>
+                <a:spcPts val="900"/>
               </a:spcAft>
             </a:pPr>
             <a:r>
@@ -6525,7 +7984,7 @@
         <p:spPr>
           <a:xfrm>
             <a:off x="0" y="0"/>
-            <a:ext cx="12191695" cy="1097280"/>
+            <a:ext cx="12191695" cy="1078992"/>
           </a:xfrm>
           <a:prstGeom prst="rect">
             <a:avLst/>
@@ -6568,7 +8027,7 @@
         </p:nvSpPr>
         <p:spPr>
           <a:xfrm>
-            <a:off x="0" y="1097280"/>
+            <a:off x="0" y="1078992"/>
             <a:ext cx="12191695" cy="54864"/>
           </a:xfrm>
           <a:prstGeom prst="rect">
@@ -6613,7 +8072,7 @@
         <p:spPr>
           <a:xfrm>
             <a:off x="548640" y="109728"/>
-            <a:ext cx="11064240" cy="411480"/>
+            <a:ext cx="11064240" cy="384048"/>
           </a:xfrm>
           <a:prstGeom prst="rect">
             <a:avLst/>
@@ -6638,7 +8097,7 @@
                 </a:solidFill>
                 <a:latin typeface="Segoe UI"/>
               </a:rPr>
-              <a:t>BASELINE</a:t>
+              <a:t>WHO DID WHAT</a:t>
             </a:r>
           </a:p>
         </p:txBody>
@@ -6651,8 +8110,8 @@
         </p:nvSpPr>
         <p:spPr>
           <a:xfrm>
-            <a:off x="548640" y="411480"/>
-            <a:ext cx="11064240" cy="621792"/>
+            <a:off x="548640" y="402336"/>
+            <a:ext cx="11064240" cy="603504"/>
           </a:xfrm>
           <a:prstGeom prst="rect">
             <a:avLst/>
@@ -6671,27 +8130,115 @@
               </a:spcAft>
             </a:pPr>
             <a:r>
-              <a:rPr sz="2800" b="1">
+              <a:rPr sz="2700" b="1">
                 <a:solidFill>
                   <a:srgbClr val="FFFFFF"/>
                 </a:solidFill>
                 <a:latin typeface="Segoe UI"/>
               </a:rPr>
-              <a:t>Starting artifact</a:t>
-            </a:r>
-          </a:p>
-        </p:txBody>
-      </p:sp>
-      <p:sp>
-        <p:nvSpPr>
-          <p:cNvPr id="6" name="TextBox 5"/>
+              <a:t>Contributions</a:t>
+            </a:r>
+          </a:p>
+        </p:txBody>
+      </p:sp>
+      <p:sp>
+        <p:nvSpPr>
+          <p:cNvPr id="6" name="Rounded Rectangle 5"/>
+          <p:cNvSpPr/>
+          <p:nvPr/>
+        </p:nvSpPr>
+        <p:spPr>
+          <a:xfrm>
+            <a:off x="640080" y="1417320"/>
+            <a:ext cx="5349240" cy="4937760"/>
+          </a:xfrm>
+          <a:prstGeom prst="roundRect">
+            <a:avLst/>
+          </a:prstGeom>
+          <a:solidFill>
+            <a:srgbClr val="E9EFF7"/>
+          </a:solidFill>
+          <a:ln>
+            <a:noFill/>
+          </a:ln>
+          <a:effectLst/>
+        </p:spPr>
+        <p:style>
+          <a:lnRef idx="1">
+            <a:schemeClr val="accent1"/>
+          </a:lnRef>
+          <a:fillRef idx="3">
+            <a:schemeClr val="accent1"/>
+          </a:fillRef>
+          <a:effectRef idx="2">
+            <a:schemeClr val="accent1"/>
+          </a:effectRef>
+          <a:fontRef idx="minor">
+            <a:schemeClr val="lt1"/>
+          </a:fontRef>
+        </p:style>
+        <p:txBody>
+          <a:bodyPr rtlCol="0" anchor="ctr"/>
+          <a:lstStyle/>
+          <a:p>
+            <a:pPr algn="ctr"/>
+          </a:p>
+        </p:txBody>
+      </p:sp>
+      <p:sp>
+        <p:nvSpPr>
+          <p:cNvPr id="7" name="Rounded Rectangle 6"/>
+          <p:cNvSpPr/>
+          <p:nvPr/>
+        </p:nvSpPr>
+        <p:spPr>
+          <a:xfrm>
+            <a:off x="640080" y="1417320"/>
+            <a:ext cx="5349240" cy="868680"/>
+          </a:xfrm>
+          <a:prstGeom prst="roundRect">
+            <a:avLst/>
+          </a:prstGeom>
+          <a:solidFill>
+            <a:srgbClr val="0E7C86"/>
+          </a:solidFill>
+          <a:ln>
+            <a:noFill/>
+          </a:ln>
+          <a:effectLst/>
+        </p:spPr>
+        <p:style>
+          <a:lnRef idx="1">
+            <a:schemeClr val="accent1"/>
+          </a:lnRef>
+          <a:fillRef idx="3">
+            <a:schemeClr val="accent1"/>
+          </a:fillRef>
+          <a:effectRef idx="2">
+            <a:schemeClr val="accent1"/>
+          </a:effectRef>
+          <a:fontRef idx="minor">
+            <a:schemeClr val="lt1"/>
+          </a:fontRef>
+        </p:style>
+        <p:txBody>
+          <a:bodyPr rtlCol="0" anchor="ctr"/>
+          <a:lstStyle/>
+          <a:p>
+            <a:pPr algn="ctr"/>
+          </a:p>
+        </p:txBody>
+      </p:sp>
+      <p:sp>
+        <p:nvSpPr>
+          <p:cNvPr id="8" name="TextBox 7"/>
           <p:cNvSpPr txBox="1"/>
           <p:nvPr/>
         </p:nvSpPr>
         <p:spPr>
           <a:xfrm>
-            <a:off x="731520" y="1417320"/>
-            <a:ext cx="10789920" cy="4937760"/>
+            <a:off x="914400" y="1527048"/>
+            <a:ext cx="4800600" cy="731520"/>
           </a:xfrm>
           <a:prstGeom prst="rect">
             <a:avLst/>
@@ -6706,11 +8253,407 @@
           <a:p>
             <a:pPr algn="l">
               <a:spcAft>
-                <a:spcPts val="1000"/>
-              </a:spcAft>
-            </a:pPr>
-            <a:r>
-              <a:rPr sz="1700" b="1">
+                <a:spcPts val="200"/>
+              </a:spcAft>
+            </a:pPr>
+            <a:r>
+              <a:rPr sz="2000" b="1">
+                <a:solidFill>
+                  <a:srgbClr val="FFFFFF"/>
+                </a:solidFill>
+                <a:latin typeface="Segoe UI"/>
+              </a:rPr>
+              <a:t>Chaithanya</a:t>
+            </a:r>
+          </a:p>
+          <a:p>
+            <a:pPr algn="l">
+              <a:spcAft>
+                <a:spcPts val="200"/>
+              </a:spcAft>
+            </a:pPr>
+            <a:r>
+              <a:rPr sz="1200" b="0">
+                <a:solidFill>
+                  <a:srgbClr val="EAF0FF"/>
+                </a:solidFill>
+                <a:latin typeface="Segoe UI"/>
+              </a:rPr>
+              <a:t>Phase 1 — web conversion</a:t>
+            </a:r>
+          </a:p>
+        </p:txBody>
+      </p:sp>
+      <p:sp>
+        <p:nvSpPr>
+          <p:cNvPr id="9" name="TextBox 8"/>
+          <p:cNvSpPr txBox="1"/>
+          <p:nvPr/>
+        </p:nvSpPr>
+        <p:spPr>
+          <a:xfrm>
+            <a:off x="914400" y="2468880"/>
+            <a:ext cx="4800600" cy="3749040"/>
+          </a:xfrm>
+          <a:prstGeom prst="rect">
+            <a:avLst/>
+          </a:prstGeom>
+          <a:noFill/>
+        </p:spPr>
+        <p:txBody>
+          <a:bodyPr wrap="square" anchor="t">
+            <a:spAutoFit/>
+          </a:bodyPr>
+          <a:lstStyle/>
+          <a:p>
+            <a:pPr algn="l">
+              <a:spcAft>
+                <a:spcPts val="800"/>
+              </a:spcAft>
+            </a:pPr>
+            <a:r>
+              <a:rPr sz="1400" b="1">
+                <a:solidFill>
+                  <a:srgbClr val="0E7C86"/>
+                </a:solidFill>
+                <a:latin typeface="Segoe UI"/>
+              </a:rPr>
+              <a:t>•  </a:t>
+            </a:r>
+            <a:r>
+              <a:rPr sz="1400" b="0">
+                <a:solidFill>
+                  <a:srgbClr val="4C596B"/>
+                </a:solidFill>
+                <a:latin typeface="Segoe UI"/>
+              </a:rPr>
+              <a:t>First conversion of the Electron app to a web build</a:t>
+            </a:r>
+          </a:p>
+          <a:p>
+            <a:pPr algn="l">
+              <a:spcAft>
+                <a:spcPts val="800"/>
+              </a:spcAft>
+            </a:pPr>
+            <a:r>
+              <a:rPr sz="1400" b="1">
+                <a:solidFill>
+                  <a:srgbClr val="0E7C86"/>
+                </a:solidFill>
+                <a:latin typeface="Segoe UI"/>
+              </a:rPr>
+              <a:t>•  </a:t>
+            </a:r>
+            <a:r>
+              <a:rPr sz="1400" b="0">
+                <a:solidFill>
+                  <a:srgbClr val="4C596B"/>
+                </a:solidFill>
+                <a:latin typeface="Segoe UI"/>
+              </a:rPr>
+              <a:t>Removed the Electron window</a:t>
+            </a:r>
+          </a:p>
+          <a:p>
+            <a:pPr algn="l">
+              <a:spcAft>
+                <a:spcPts val="800"/>
+              </a:spcAft>
+            </a:pPr>
+            <a:r>
+              <a:rPr sz="1400" b="1">
+                <a:solidFill>
+                  <a:srgbClr val="0E7C86"/>
+                </a:solidFill>
+                <a:latin typeface="Segoe UI"/>
+              </a:rPr>
+              <a:t>•  </a:t>
+            </a:r>
+            <a:r>
+              <a:rPr sz="1400" b="0">
+                <a:solidFill>
+                  <a:srgbClr val="4C596B"/>
+                </a:solidFill>
+                <a:latin typeface="Segoe UI"/>
+              </a:rPr>
+              <a:t>Added the daemon HTTP + SSE server on :9234</a:t>
+            </a:r>
+          </a:p>
+          <a:p>
+            <a:pPr algn="l">
+              <a:spcAft>
+                <a:spcPts val="800"/>
+              </a:spcAft>
+            </a:pPr>
+            <a:r>
+              <a:rPr sz="1400" b="1">
+                <a:solidFill>
+                  <a:srgbClr val="0E7C86"/>
+                </a:solidFill>
+                <a:latin typeface="Segoe UI"/>
+              </a:rPr>
+              <a:t>•  </a:t>
+            </a:r>
+            <a:r>
+              <a:rPr sz="1400" b="0">
+                <a:solidFill>
+                  <a:srgbClr val="4C596B"/>
+                </a:solidFill>
+                <a:latin typeface="Segoe UI"/>
+              </a:rPr>
+              <a:t>Browser transport recreates window.accomplish</a:t>
+            </a:r>
+          </a:p>
+          <a:p>
+            <a:pPr algn="l">
+              <a:spcAft>
+                <a:spcPts val="800"/>
+              </a:spcAft>
+            </a:pPr>
+            <a:r>
+              <a:rPr sz="1400" b="1">
+                <a:solidFill>
+                  <a:srgbClr val="0E7C86"/>
+                </a:solidFill>
+                <a:latin typeface="Segoe UI"/>
+              </a:rPr>
+              <a:t>•  </a:t>
+            </a:r>
+            <a:r>
+              <a:rPr sz="1400" b="0">
+                <a:solidFill>
+                  <a:srgbClr val="4C596B"/>
+                </a:solidFill>
+                <a:latin typeface="Segoe UI"/>
+              </a:rPr>
+              <a:t>Login flow + initial DigiBull branding</a:t>
+            </a:r>
+          </a:p>
+          <a:p>
+            <a:pPr algn="l">
+              <a:spcAft>
+                <a:spcPts val="800"/>
+              </a:spcAft>
+            </a:pPr>
+            <a:r>
+              <a:rPr sz="1400" b="1">
+                <a:solidFill>
+                  <a:srgbClr val="0E7C86"/>
+                </a:solidFill>
+                <a:latin typeface="Segoe UI"/>
+              </a:rPr>
+              <a:t>•  </a:t>
+            </a:r>
+            <a:r>
+              <a:rPr sz="1400" b="0">
+                <a:solidFill>
+                  <a:srgbClr val="4C596B"/>
+                </a:solidFill>
+                <a:latin typeface="Segoe UI"/>
+              </a:rPr>
+              <a:t>~96 of ~148 features wired</a:t>
+            </a:r>
+          </a:p>
+          <a:p>
+            <a:pPr algn="l">
+              <a:spcAft>
+                <a:spcPts val="800"/>
+              </a:spcAft>
+            </a:pPr>
+            <a:r>
+              <a:rPr sz="1400" b="1">
+                <a:solidFill>
+                  <a:srgbClr val="0E7C86"/>
+                </a:solidFill>
+                <a:latin typeface="Segoe UI"/>
+              </a:rPr>
+              <a:t>•  </a:t>
+            </a:r>
+            <a:r>
+              <a:rPr sz="1400" b="0">
+                <a:solidFill>
+                  <a:srgbClr val="4C596B"/>
+                </a:solidFill>
+                <a:latin typeface="Segoe UI"/>
+              </a:rPr>
+              <a:t>Delivered as accomplish_Transformed_Chaithanya_Original.zip (~759 MB)</a:t>
+            </a:r>
+          </a:p>
+        </p:txBody>
+      </p:sp>
+      <p:sp>
+        <p:nvSpPr>
+          <p:cNvPr id="10" name="Rounded Rectangle 9"/>
+          <p:cNvSpPr/>
+          <p:nvPr/>
+        </p:nvSpPr>
+        <p:spPr>
+          <a:xfrm>
+            <a:off x="6217920" y="1417320"/>
+            <a:ext cx="5349240" cy="4937760"/>
+          </a:xfrm>
+          <a:prstGeom prst="roundRect">
+            <a:avLst/>
+          </a:prstGeom>
+          <a:solidFill>
+            <a:srgbClr val="E9EFF7"/>
+          </a:solidFill>
+          <a:ln>
+            <a:noFill/>
+          </a:ln>
+          <a:effectLst/>
+        </p:spPr>
+        <p:style>
+          <a:lnRef idx="1">
+            <a:schemeClr val="accent1"/>
+          </a:lnRef>
+          <a:fillRef idx="3">
+            <a:schemeClr val="accent1"/>
+          </a:fillRef>
+          <a:effectRef idx="2">
+            <a:schemeClr val="accent1"/>
+          </a:effectRef>
+          <a:fontRef idx="minor">
+            <a:schemeClr val="lt1"/>
+          </a:fontRef>
+        </p:style>
+        <p:txBody>
+          <a:bodyPr rtlCol="0" anchor="ctr"/>
+          <a:lstStyle/>
+          <a:p>
+            <a:pPr algn="ctr"/>
+          </a:p>
+        </p:txBody>
+      </p:sp>
+      <p:sp>
+        <p:nvSpPr>
+          <p:cNvPr id="11" name="Rounded Rectangle 10"/>
+          <p:cNvSpPr/>
+          <p:nvPr/>
+        </p:nvSpPr>
+        <p:spPr>
+          <a:xfrm>
+            <a:off x="6217920" y="1417320"/>
+            <a:ext cx="5349240" cy="868680"/>
+          </a:xfrm>
+          <a:prstGeom prst="roundRect">
+            <a:avLst/>
+          </a:prstGeom>
+          <a:solidFill>
+            <a:srgbClr val="1E6FE0"/>
+          </a:solidFill>
+          <a:ln>
+            <a:noFill/>
+          </a:ln>
+          <a:effectLst/>
+        </p:spPr>
+        <p:style>
+          <a:lnRef idx="1">
+            <a:schemeClr val="accent1"/>
+          </a:lnRef>
+          <a:fillRef idx="3">
+            <a:schemeClr val="accent1"/>
+          </a:fillRef>
+          <a:effectRef idx="2">
+            <a:schemeClr val="accent1"/>
+          </a:effectRef>
+          <a:fontRef idx="minor">
+            <a:schemeClr val="lt1"/>
+          </a:fontRef>
+        </p:style>
+        <p:txBody>
+          <a:bodyPr rtlCol="0" anchor="ctr"/>
+          <a:lstStyle/>
+          <a:p>
+            <a:pPr algn="ctr"/>
+          </a:p>
+        </p:txBody>
+      </p:sp>
+      <p:sp>
+        <p:nvSpPr>
+          <p:cNvPr id="12" name="TextBox 11"/>
+          <p:cNvSpPr txBox="1"/>
+          <p:nvPr/>
+        </p:nvSpPr>
+        <p:spPr>
+          <a:xfrm>
+            <a:off x="6492240" y="1527048"/>
+            <a:ext cx="4800600" cy="731520"/>
+          </a:xfrm>
+          <a:prstGeom prst="rect">
+            <a:avLst/>
+          </a:prstGeom>
+          <a:noFill/>
+        </p:spPr>
+        <p:txBody>
+          <a:bodyPr wrap="square" anchor="t">
+            <a:spAutoFit/>
+          </a:bodyPr>
+          <a:lstStyle/>
+          <a:p>
+            <a:pPr algn="l">
+              <a:spcAft>
+                <a:spcPts val="200"/>
+              </a:spcAft>
+            </a:pPr>
+            <a:r>
+              <a:rPr sz="2000" b="1">
+                <a:solidFill>
+                  <a:srgbClr val="FFFFFF"/>
+                </a:solidFill>
+                <a:latin typeface="Segoe UI"/>
+              </a:rPr>
+              <a:t>Nagabhushana Raju S</a:t>
+            </a:r>
+          </a:p>
+          <a:p>
+            <a:pPr algn="l">
+              <a:spcAft>
+                <a:spcPts val="200"/>
+              </a:spcAft>
+            </a:pPr>
+            <a:r>
+              <a:rPr sz="1200" b="0">
+                <a:solidFill>
+                  <a:srgbClr val="EAF0FF"/>
+                </a:solidFill>
+                <a:latin typeface="Segoe UI"/>
+              </a:rPr>
+              <a:t>Phase 2 — analysis, remediation, new build</a:t>
+            </a:r>
+          </a:p>
+        </p:txBody>
+      </p:sp>
+      <p:sp>
+        <p:nvSpPr>
+          <p:cNvPr id="13" name="TextBox 12"/>
+          <p:cNvSpPr txBox="1"/>
+          <p:nvPr/>
+        </p:nvSpPr>
+        <p:spPr>
+          <a:xfrm>
+            <a:off x="6492240" y="2468880"/>
+            <a:ext cx="4800600" cy="3749040"/>
+          </a:xfrm>
+          <a:prstGeom prst="rect">
+            <a:avLst/>
+          </a:prstGeom>
+          <a:noFill/>
+        </p:spPr>
+        <p:txBody>
+          <a:bodyPr wrap="square" anchor="t">
+            <a:spAutoFit/>
+          </a:bodyPr>
+          <a:lstStyle/>
+          <a:p>
+            <a:pPr algn="l">
+              <a:spcAft>
+                <a:spcPts val="800"/>
+              </a:spcAft>
+            </a:pPr>
+            <a:r>
+              <a:rPr sz="1400" b="1">
                 <a:solidFill>
                   <a:srgbClr val="1E6FE0"/>
                 </a:solidFill>
@@ -6719,32 +8662,23 @@
               <a:t>•  </a:t>
             </a:r>
             <a:r>
-              <a:rPr sz="1700" b="1">
-                <a:solidFill>
-                  <a:srgbClr val="0B1F3A"/>
-                </a:solidFill>
-                <a:latin typeface="Segoe UI"/>
-              </a:rPr>
-              <a:t>Chaithanya web transform </a:t>
-            </a:r>
-            <a:r>
-              <a:rPr sz="1700" b="0">
+              <a:rPr sz="1400" b="0">
                 <a:solidFill>
                   <a:srgbClr val="4C596B"/>
                 </a:solidFill>
                 <a:latin typeface="Segoe UI"/>
               </a:rPr>
-              <a:t>— accomplish_Transformed_Chaithanya_Original.zip (~759 MB)</a:t>
-            </a:r>
-          </a:p>
-          <a:p>
-            <a:pPr algn="l">
-              <a:spcAft>
-                <a:spcPts val="1000"/>
-              </a:spcAft>
-            </a:pPr>
-            <a:r>
-              <a:rPr sz="1700" b="1">
+              <a:t>Gap analysis vs original: 52 missing features (buckets A–D)</a:t>
+            </a:r>
+          </a:p>
+          <a:p>
+            <a:pPr algn="l">
+              <a:spcAft>
+                <a:spcPts val="800"/>
+              </a:spcAft>
+            </a:pPr>
+            <a:r>
+              <a:rPr sz="1400" b="1">
                 <a:solidFill>
                   <a:srgbClr val="1E6FE0"/>
                 </a:solidFill>
@@ -6753,23 +8687,23 @@
               <a:t>•  </a:t>
             </a:r>
             <a:r>
-              <a:rPr sz="1700" b="0">
+              <a:rPr sz="1400" b="0">
                 <a:solidFill>
                   <a:srgbClr val="4C596B"/>
                 </a:solidFill>
                 <a:latin typeface="Segoe UI"/>
               </a:rPr>
-              <a:t>First conversion of the Electron app to a web build</a:t>
-            </a:r>
-          </a:p>
-          <a:p>
-            <a:pPr algn="l">
-              <a:spcAft>
-                <a:spcPts val="1000"/>
-              </a:spcAft>
-            </a:pPr>
-            <a:r>
-              <a:rPr sz="1700" b="1">
+              <a:t>Reverse-engineered the 0.4.14 .exe (asar extract → IPC diff)</a:t>
+            </a:r>
+          </a:p>
+          <a:p>
+            <a:pPr algn="l">
+              <a:spcAft>
+                <a:spcPts val="800"/>
+              </a:spcAft>
+            </a:pPr>
+            <a:r>
+              <a:rPr sz="1400" b="1">
                 <a:solidFill>
                   <a:srgbClr val="1E6FE0"/>
                 </a:solidFill>
@@ -6778,13 +8712,113 @@
               <a:t>•  </a:t>
             </a:r>
             <a:r>
-              <a:rPr sz="1700" b="0">
+              <a:rPr sz="1400" b="0">
                 <a:solidFill>
                   <a:srgbClr val="4C596B"/>
                 </a:solidFill>
                 <a:latin typeface="Segoe UI"/>
               </a:rPr>
-              <a:t>The current SRIM working tree continues from it</a:t>
+              <a:t>Fixed core bugs (API keys, provider connect, auth)</a:t>
+            </a:r>
+          </a:p>
+          <a:p>
+            <a:pPr algn="l">
+              <a:spcAft>
+                <a:spcPts val="800"/>
+              </a:spcAft>
+            </a:pPr>
+            <a:r>
+              <a:rPr sz="1400" b="1">
+                <a:solidFill>
+                  <a:srgbClr val="1E6FE0"/>
+                </a:solidFill>
+                <a:latin typeface="Segoe UI"/>
+              </a:rPr>
+              <a:t>•  </a:t>
+            </a:r>
+            <a:r>
+              <a:rPr sz="1400" b="0">
+                <a:solidFill>
+                  <a:srgbClr val="4C596B"/>
+                </a:solidFill>
+                <a:latin typeface="Segoe UI"/>
+              </a:rPr>
+              <a:t>New features: Auto routing, inline AI questions, LOCAL LLM advisor</a:t>
+            </a:r>
+          </a:p>
+          <a:p>
+            <a:pPr algn="l">
+              <a:spcAft>
+                <a:spcPts val="800"/>
+              </a:spcAft>
+            </a:pPr>
+            <a:r>
+              <a:rPr sz="1400" b="1">
+                <a:solidFill>
+                  <a:srgbClr val="1E6FE0"/>
+                </a:solidFill>
+                <a:latin typeface="Segoe UI"/>
+              </a:rPr>
+              <a:t>•  </a:t>
+            </a:r>
+            <a:r>
+              <a:rPr sz="1400" b="0">
+                <a:solidFill>
+                  <a:srgbClr val="4C596B"/>
+                </a:solidFill>
+                <a:latin typeface="Segoe UI"/>
+              </a:rPr>
+              <a:t>DigiBull UI rebrand + model UX + appearance</a:t>
+            </a:r>
+          </a:p>
+          <a:p>
+            <a:pPr algn="l">
+              <a:spcAft>
+                <a:spcPts val="800"/>
+              </a:spcAft>
+            </a:pPr>
+            <a:r>
+              <a:rPr sz="1400" b="1">
+                <a:solidFill>
+                  <a:srgbClr val="1E6FE0"/>
+                </a:solidFill>
+                <a:latin typeface="Segoe UI"/>
+              </a:rPr>
+              <a:t>•  </a:t>
+            </a:r>
+            <a:r>
+              <a:rPr sz="1400" b="0">
+                <a:solidFill>
+                  <a:srgbClr val="4C596B"/>
+                </a:solidFill>
+                <a:latin typeface="Segoe UI"/>
+              </a:rPr>
+              <a:t>WhatsApp integration + MCP (in/out)</a:t>
+            </a:r>
+          </a:p>
+          <a:p>
+            <a:pPr algn="l">
+              <a:spcAft>
+                <a:spcPts val="800"/>
+              </a:spcAft>
+            </a:pPr>
+            <a:r>
+              <a:rPr sz="1400" b="1">
+                <a:solidFill>
+                  <a:srgbClr val="1E6FE0"/>
+                </a:solidFill>
+                <a:latin typeface="Segoe UI"/>
+              </a:rPr>
+              <a:t>•  </a:t>
+            </a:r>
+            <a:r>
+              <a:rPr sz="1400" b="0">
+                <a:solidFill>
+                  <a:srgbClr val="4C596B"/>
+                </a:solidFill>
+                <a:latin typeface="Segoe UI"/>
+              </a:rPr>
+              <a:t>Setup automation (INSTALL/LAUNCH) + sqlite/SSE/Docker fixes</a:t>
             </a:r>
           </a:p>
         </p:txBody>
@@ -6824,7 +8858,7 @@
         <p:spPr>
           <a:xfrm>
             <a:off x="0" y="0"/>
-            <a:ext cx="12191695" cy="1097280"/>
+            <a:ext cx="12191695" cy="1078992"/>
           </a:xfrm>
           <a:prstGeom prst="rect">
             <a:avLst/>
@@ -6867,7 +8901,7 @@
         </p:nvSpPr>
         <p:spPr>
           <a:xfrm>
-            <a:off x="0" y="1097280"/>
+            <a:off x="0" y="1078992"/>
             <a:ext cx="12191695" cy="54864"/>
           </a:xfrm>
           <a:prstGeom prst="rect">
@@ -6912,7 +8946,7 @@
         <p:spPr>
           <a:xfrm>
             <a:off x="548640" y="109728"/>
-            <a:ext cx="11064240" cy="411480"/>
+            <a:ext cx="11064240" cy="384048"/>
           </a:xfrm>
           <a:prstGeom prst="rect">
             <a:avLst/>
@@ -6937,7 +8971,7 @@
                 </a:solidFill>
                 <a:latin typeface="Segoe UI"/>
               </a:rPr>
-              <a:t>PHASE 1</a:t>
+              <a:t>BASELINE  ·  CHAITHANYA</a:t>
             </a:r>
           </a:p>
         </p:txBody>
@@ -6950,8 +8984,8 @@
         </p:nvSpPr>
         <p:spPr>
           <a:xfrm>
-            <a:off x="548640" y="411480"/>
-            <a:ext cx="11064240" cy="621792"/>
+            <a:off x="548640" y="402336"/>
+            <a:ext cx="11064240" cy="603504"/>
           </a:xfrm>
           <a:prstGeom prst="rect">
             <a:avLst/>
@@ -6970,13 +9004,13 @@
               </a:spcAft>
             </a:pPr>
             <a:r>
-              <a:rPr sz="2800" b="1">
+              <a:rPr sz="2700" b="1">
                 <a:solidFill>
                   <a:srgbClr val="FFFFFF"/>
                 </a:solidFill>
                 <a:latin typeface="Segoe UI"/>
               </a:rPr>
-              <a:t>Convert to web  (Chaithanya)</a:t>
+              <a:t>Starting artifact</a:t>
             </a:r>
           </a:p>
         </p:txBody>
@@ -6989,8 +9023,8 @@
         </p:nvSpPr>
         <p:spPr>
           <a:xfrm>
-            <a:off x="731520" y="1417320"/>
-            <a:ext cx="10789920" cy="4937760"/>
+            <a:off x="731520" y="1371600"/>
+            <a:ext cx="10789920" cy="5029200"/>
           </a:xfrm>
           <a:prstGeom prst="rect">
             <a:avLst/>
@@ -7005,7 +9039,7 @@
           <a:p>
             <a:pPr algn="l">
               <a:spcAft>
-                <a:spcPts val="1000"/>
+                <a:spcPts val="900"/>
               </a:spcAft>
             </a:pPr>
             <a:r>
@@ -7018,19 +9052,28 @@
               <a:t>•  </a:t>
             </a:r>
             <a:r>
+              <a:rPr sz="1700" b="1">
+                <a:solidFill>
+                  <a:srgbClr val="0B1F3A"/>
+                </a:solidFill>
+                <a:latin typeface="Segoe UI"/>
+              </a:rPr>
+              <a:t>accomplish_Transformed_Chaithanya_Original.zip </a:t>
+            </a:r>
+            <a:r>
               <a:rPr sz="1700" b="0">
                 <a:solidFill>
                   <a:srgbClr val="4C596B"/>
                 </a:solidFill>
                 <a:latin typeface="Segoe UI"/>
               </a:rPr>
-              <a:t>Removed the Electron window</a:t>
-            </a:r>
-          </a:p>
-          <a:p>
-            <a:pPr algn="l">
-              <a:spcAft>
-                <a:spcPts val="1000"/>
+              <a:t>(~759 MB)</a:t>
+            </a:r>
+          </a:p>
+          <a:p>
+            <a:pPr algn="l">
+              <a:spcAft>
+                <a:spcPts val="900"/>
               </a:spcAft>
             </a:pPr>
             <a:r>
@@ -7049,13 +9092,13 @@
                 </a:solidFill>
                 <a:latin typeface="Segoe UI"/>
               </a:rPr>
-              <a:t>Added daemon HTTP + SSE server on :9234</a:t>
-            </a:r>
-          </a:p>
-          <a:p>
-            <a:pPr algn="l">
-              <a:spcAft>
-                <a:spcPts val="1000"/>
+              <a:t>The first web transform of the Electron app</a:t>
+            </a:r>
+          </a:p>
+          <a:p>
+            <a:pPr algn="l">
+              <a:spcAft>
+                <a:spcPts val="900"/>
               </a:spcAft>
             </a:pPr>
             <a:r>
@@ -7074,57 +9117,7 @@
                 </a:solidFill>
                 <a:latin typeface="Segoe UI"/>
               </a:rPr>
-              <a:t>Browser transport recreates window.accomplish</a:t>
-            </a:r>
-          </a:p>
-          <a:p>
-            <a:pPr algn="l">
-              <a:spcAft>
-                <a:spcPts val="1000"/>
-              </a:spcAft>
-            </a:pPr>
-            <a:r>
-              <a:rPr sz="1700" b="1">
-                <a:solidFill>
-                  <a:srgbClr val="1E6FE0"/>
-                </a:solidFill>
-                <a:latin typeface="Segoe UI"/>
-              </a:rPr>
-              <a:t>•  </a:t>
-            </a:r>
-            <a:r>
-              <a:rPr sz="1700" b="0">
-                <a:solidFill>
-                  <a:srgbClr val="4C596B"/>
-                </a:solidFill>
-                <a:latin typeface="Segoe UI"/>
-              </a:rPr>
-              <a:t>Login + DigiBull branding</a:t>
-            </a:r>
-          </a:p>
-          <a:p>
-            <a:pPr algn="l">
-              <a:spcAft>
-                <a:spcPts val="1000"/>
-              </a:spcAft>
-            </a:pPr>
-            <a:r>
-              <a:rPr sz="1700" b="1">
-                <a:solidFill>
-                  <a:srgbClr val="1E6FE0"/>
-                </a:solidFill>
-                <a:latin typeface="Segoe UI"/>
-              </a:rPr>
-              <a:t>•  </a:t>
-            </a:r>
-            <a:r>
-              <a:rPr sz="1700" b="0">
-                <a:solidFill>
-                  <a:srgbClr val="4C596B"/>
-                </a:solidFill>
-                <a:latin typeface="Segoe UI"/>
-              </a:rPr>
-              <a:t>~96 of ~148 features wired</a:t>
+              <a:t>The current SRIM working tree continues from it</a:t>
             </a:r>
           </a:p>
         </p:txBody>
@@ -7164,7 +9157,7 @@
         <p:spPr>
           <a:xfrm>
             <a:off x="0" y="0"/>
-            <a:ext cx="12191695" cy="1097280"/>
+            <a:ext cx="12191695" cy="1078992"/>
           </a:xfrm>
           <a:prstGeom prst="rect">
             <a:avLst/>
@@ -7207,7 +9200,7 @@
         </p:nvSpPr>
         <p:spPr>
           <a:xfrm>
-            <a:off x="0" y="1097280"/>
+            <a:off x="0" y="1078992"/>
             <a:ext cx="12191695" cy="54864"/>
           </a:xfrm>
           <a:prstGeom prst="rect">
@@ -7252,7 +9245,7 @@
         <p:spPr>
           <a:xfrm>
             <a:off x="548640" y="109728"/>
-            <a:ext cx="11064240" cy="411480"/>
+            <a:ext cx="11064240" cy="384048"/>
           </a:xfrm>
           <a:prstGeom prst="rect">
             <a:avLst/>
@@ -7277,7 +9270,7 @@
                 </a:solidFill>
                 <a:latin typeface="Segoe UI"/>
               </a:rPr>
-              <a:t>PHASE 2</a:t>
+              <a:t>PHASE 1  ·  CHAITHANYA</a:t>
             </a:r>
           </a:p>
         </p:txBody>
@@ -7290,8 +9283,8 @@
         </p:nvSpPr>
         <p:spPr>
           <a:xfrm>
-            <a:off x="548640" y="411480"/>
-            <a:ext cx="11064240" cy="621792"/>
+            <a:off x="548640" y="402336"/>
+            <a:ext cx="11064240" cy="603504"/>
           </a:xfrm>
           <a:prstGeom prst="rect">
             <a:avLst/>
@@ -7310,13 +9303,13 @@
               </a:spcAft>
             </a:pPr>
             <a:r>
-              <a:rPr sz="2800" b="1">
+              <a:rPr sz="2700" b="1">
                 <a:solidFill>
                   <a:srgbClr val="FFFFFF"/>
                 </a:solidFill>
                 <a:latin typeface="Segoe UI"/>
               </a:rPr>
-              <a:t>Analyse &amp; reverse-engineer  (Nagabhushana)</a:t>
+              <a:t>Convert to web</a:t>
             </a:r>
           </a:p>
         </p:txBody>
@@ -7329,8 +9322,8 @@
         </p:nvSpPr>
         <p:spPr>
           <a:xfrm>
-            <a:off x="731520" y="1417320"/>
-            <a:ext cx="10789920" cy="4937760"/>
+            <a:off x="731520" y="1371600"/>
+            <a:ext cx="10789920" cy="5029200"/>
           </a:xfrm>
           <a:prstGeom prst="rect">
             <a:avLst/>
@@ -7345,7 +9338,7 @@
           <a:p>
             <a:pPr algn="l">
               <a:spcAft>
-                <a:spcPts val="1000"/>
+                <a:spcPts val="900"/>
               </a:spcAft>
             </a:pPr>
             <a:r>
@@ -7364,13 +9357,13 @@
                 </a:solidFill>
                 <a:latin typeface="Segoe UI"/>
               </a:rPr>
-              <a:t>Compared converted build vs the original</a:t>
-            </a:r>
-          </a:p>
-          <a:p>
-            <a:pPr algn="l">
-              <a:spcAft>
-                <a:spcPts val="1000"/>
+              <a:t>Removed the Electron window</a:t>
+            </a:r>
+          </a:p>
+          <a:p>
+            <a:pPr algn="l">
+              <a:spcAft>
+                <a:spcPts val="900"/>
               </a:spcAft>
             </a:pPr>
             <a:r>
@@ -7389,13 +9382,13 @@
                 </a:solidFill>
                 <a:latin typeface="Segoe UI"/>
               </a:rPr>
-              <a:t>Gap analysis: 52 missing features (buckets A–D)</a:t>
-            </a:r>
-          </a:p>
-          <a:p>
-            <a:pPr algn="l">
-              <a:spcAft>
-                <a:spcPts val="1000"/>
+              <a:t>Added daemon HTTP + SSE server on :9234</a:t>
+            </a:r>
+          </a:p>
+          <a:p>
+            <a:pPr algn="l">
+              <a:spcAft>
+                <a:spcPts val="900"/>
               </a:spcAft>
             </a:pPr>
             <a:r>
@@ -7414,13 +9407,13 @@
                 </a:solidFill>
                 <a:latin typeface="Segoe UI"/>
               </a:rPr>
-              <a:t>Reverse-engineered the 0.4.14 .exe</a:t>
-            </a:r>
-          </a:p>
-          <a:p>
-            <a:pPr algn="l">
-              <a:spcAft>
-                <a:spcPts val="1000"/>
+              <a:t>Browser transport recreates window.accomplish</a:t>
+            </a:r>
+          </a:p>
+          <a:p>
+            <a:pPr algn="l">
+              <a:spcAft>
+                <a:spcPts val="900"/>
               </a:spcAft>
             </a:pPr>
             <a:r>
@@ -7439,7 +9432,32 @@
                 </a:solidFill>
                 <a:latin typeface="Segoe UI"/>
               </a:rPr>
-              <a:t>asar extract → diffed IPC channels</a:t>
+              <a:t>Login + DigiBull branding</a:t>
+            </a:r>
+          </a:p>
+          <a:p>
+            <a:pPr algn="l">
+              <a:spcAft>
+                <a:spcPts val="900"/>
+              </a:spcAft>
+            </a:pPr>
+            <a:r>
+              <a:rPr sz="1700" b="1">
+                <a:solidFill>
+                  <a:srgbClr val="1E6FE0"/>
+                </a:solidFill>
+                <a:latin typeface="Segoe UI"/>
+              </a:rPr>
+              <a:t>•  </a:t>
+            </a:r>
+            <a:r>
+              <a:rPr sz="1700" b="0">
+                <a:solidFill>
+                  <a:srgbClr val="4C596B"/>
+                </a:solidFill>
+                <a:latin typeface="Segoe UI"/>
+              </a:rPr>
+              <a:t>~96 of ~148 features wired</a:t>
             </a:r>
           </a:p>
         </p:txBody>
@@ -7479,7 +9497,7 @@
         <p:spPr>
           <a:xfrm>
             <a:off x="0" y="0"/>
-            <a:ext cx="12191695" cy="1097280"/>
+            <a:ext cx="12191695" cy="1078992"/>
           </a:xfrm>
           <a:prstGeom prst="rect">
             <a:avLst/>
@@ -7522,7 +9540,7 @@
         </p:nvSpPr>
         <p:spPr>
           <a:xfrm>
-            <a:off x="0" y="1097280"/>
+            <a:off x="0" y="1078992"/>
             <a:ext cx="12191695" cy="54864"/>
           </a:xfrm>
           <a:prstGeom prst="rect">
@@ -7567,7 +9585,7 @@
         <p:spPr>
           <a:xfrm>
             <a:off x="548640" y="109728"/>
-            <a:ext cx="11064240" cy="411480"/>
+            <a:ext cx="11064240" cy="384048"/>
           </a:xfrm>
           <a:prstGeom prst="rect">
             <a:avLst/>
@@ -7592,7 +9610,7 @@
                 </a:solidFill>
                 <a:latin typeface="Segoe UI"/>
               </a:rPr>
-              <a:t>FINDINGS</a:t>
+              <a:t>PHASE 2  ·  NAGABHUSHANA</a:t>
             </a:r>
           </a:p>
         </p:txBody>
@@ -7605,8 +9623,8 @@
         </p:nvSpPr>
         <p:spPr>
           <a:xfrm>
-            <a:off x="548640" y="411480"/>
-            <a:ext cx="11064240" cy="621792"/>
+            <a:off x="548640" y="402336"/>
+            <a:ext cx="11064240" cy="603504"/>
           </a:xfrm>
           <a:prstGeom prst="rect">
             <a:avLst/>
@@ -7625,13 +9643,13 @@
               </a:spcAft>
             </a:pPr>
             <a:r>
-              <a:rPr sz="2800" b="1">
+              <a:rPr sz="2700" b="1">
                 <a:solidFill>
                   <a:srgbClr val="FFFFFF"/>
                 </a:solidFill>
                 <a:latin typeface="Segoe UI"/>
               </a:rPr>
-              <a:t>0.4.14 .exe</a:t>
+              <a:t>Analyse &amp; reverse-engineer</a:t>
             </a:r>
           </a:p>
         </p:txBody>
@@ -7644,8 +9662,8 @@
         </p:nvSpPr>
         <p:spPr>
           <a:xfrm>
-            <a:off x="731520" y="1417320"/>
-            <a:ext cx="10789920" cy="4937760"/>
+            <a:off x="731520" y="1371600"/>
+            <a:ext cx="10789920" cy="5029200"/>
           </a:xfrm>
           <a:prstGeom prst="rect">
             <a:avLst/>
@@ -7660,7 +9678,7 @@
           <a:p>
             <a:pPr algn="l">
               <a:spcAft>
-                <a:spcPts val="1000"/>
+                <a:spcPts val="900"/>
               </a:spcAft>
             </a:pPr>
             <a:r>
@@ -7679,13 +9697,13 @@
                 </a:solidFill>
                 <a:latin typeface="Segoe UI"/>
               </a:rPr>
-              <a:t>Newer code than the source we had</a:t>
-            </a:r>
-          </a:p>
-          <a:p>
-            <a:pPr algn="l">
-              <a:spcAft>
-                <a:spcPts val="1000"/>
+              <a:t>Compared the converted build vs the original</a:t>
+            </a:r>
+          </a:p>
+          <a:p>
+            <a:pPr algn="l">
+              <a:spcAft>
+                <a:spcPts val="900"/>
               </a:spcAft>
             </a:pPr>
             <a:r>
@@ -7704,13 +9722,13 @@
                 </a:solidFill>
                 <a:latin typeface="Segoe UI"/>
               </a:rPr>
-              <a:t>~124 IPC channels not in source</a:t>
-            </a:r>
-          </a:p>
-          <a:p>
-            <a:pPr algn="l">
-              <a:spcAft>
-                <a:spcPts val="1000"/>
+              <a:t>Gap analysis: 52 missing features (buckets A–D)</a:t>
+            </a:r>
+          </a:p>
+          <a:p>
+            <a:pPr algn="l">
+              <a:spcAft>
+                <a:spcPts val="900"/>
               </a:spcAft>
             </a:pPr>
             <a:r>
@@ -7729,13 +9747,13 @@
                 </a:solidFill>
                 <a:latin typeface="Segoe UI"/>
               </a:rPr>
-              <a:t>New: Browser Panel, Triggered Tasks, llama.cpp, feature flags</a:t>
-            </a:r>
-          </a:p>
-          <a:p>
-            <a:pPr algn="l">
-              <a:spcAft>
-                <a:spcPts val="1000"/>
+              <a:t>Reverse-engineered the 0.4.14 .exe</a:t>
+            </a:r>
+          </a:p>
+          <a:p>
+            <a:pPr algn="l">
+              <a:spcAft>
+                <a:spcPts val="900"/>
               </a:spcAft>
             </a:pPr>
             <a:r>
@@ -7754,7 +9772,7 @@
                 </a:solidFill>
                 <a:latin typeface="Segoe UI"/>
               </a:rPr>
-              <a:t>Only minified bundles → need source to fully port</a:t>
+              <a:t>asar extract → diffed IPC channels</a:t>
             </a:r>
           </a:p>
         </p:txBody>
@@ -7794,7 +9812,7 @@
         <p:spPr>
           <a:xfrm>
             <a:off x="0" y="0"/>
-            <a:ext cx="12191695" cy="1097280"/>
+            <a:ext cx="12191695" cy="1078992"/>
           </a:xfrm>
           <a:prstGeom prst="rect">
             <a:avLst/>
@@ -7837,7 +9855,7 @@
         </p:nvSpPr>
         <p:spPr>
           <a:xfrm>
-            <a:off x="0" y="1097280"/>
+            <a:off x="0" y="1078992"/>
             <a:ext cx="12191695" cy="54864"/>
           </a:xfrm>
           <a:prstGeom prst="rect">
@@ -7882,7 +9900,7 @@
         <p:spPr>
           <a:xfrm>
             <a:off x="548640" y="109728"/>
-            <a:ext cx="11064240" cy="411480"/>
+            <a:ext cx="11064240" cy="384048"/>
           </a:xfrm>
           <a:prstGeom prst="rect">
             <a:avLst/>
@@ -7907,7 +9925,7 @@
                 </a:solidFill>
                 <a:latin typeface="Segoe UI"/>
               </a:rPr>
-              <a:t>NEW FEATURES</a:t>
+              <a:t>FINDINGS  ·  NAGABHUSHANA</a:t>
             </a:r>
           </a:p>
         </p:txBody>
@@ -7920,8 +9938,8 @@
         </p:nvSpPr>
         <p:spPr>
           <a:xfrm>
-            <a:off x="548640" y="411480"/>
-            <a:ext cx="11064240" cy="621792"/>
+            <a:off x="548640" y="402336"/>
+            <a:ext cx="11064240" cy="603504"/>
           </a:xfrm>
           <a:prstGeom prst="rect">
             <a:avLst/>
@@ -7940,13 +9958,13 @@
               </a:spcAft>
             </a:pPr>
             <a:r>
-              <a:rPr sz="2800" b="1">
+              <a:rPr sz="2700" b="1">
                 <a:solidFill>
                   <a:srgbClr val="FFFFFF"/>
                 </a:solidFill>
                 <a:latin typeface="Segoe UI"/>
               </a:rPr>
-              <a:t>Delivered in SRIM</a:t>
+              <a:t>0.4.14 .exe</a:t>
             </a:r>
           </a:p>
         </p:txBody>
@@ -7959,8 +9977,8 @@
         </p:nvSpPr>
         <p:spPr>
           <a:xfrm>
-            <a:off x="731520" y="1417320"/>
-            <a:ext cx="10789920" cy="4937760"/>
+            <a:off x="731520" y="1371600"/>
+            <a:ext cx="10789920" cy="5029200"/>
           </a:xfrm>
           <a:prstGeom prst="rect">
             <a:avLst/>
@@ -7975,11 +9993,11 @@
           <a:p>
             <a:pPr algn="l">
               <a:spcAft>
-                <a:spcPts val="1000"/>
-              </a:spcAft>
-            </a:pPr>
-            <a:r>
-              <a:rPr sz="1600" b="1">
+                <a:spcPts val="900"/>
+              </a:spcAft>
+            </a:pPr>
+            <a:r>
+              <a:rPr sz="1700" b="1">
                 <a:solidFill>
                   <a:srgbClr val="1E6FE0"/>
                 </a:solidFill>
@@ -7988,23 +10006,23 @@
               <a:t>•  </a:t>
             </a:r>
             <a:r>
-              <a:rPr sz="1600" b="0">
+              <a:rPr sz="1700" b="0">
                 <a:solidFill>
                   <a:srgbClr val="4C596B"/>
                 </a:solidFill>
                 <a:latin typeface="Segoe UI"/>
               </a:rPr>
-              <a:t>Centralized addresses (migration-proof)</a:t>
-            </a:r>
-          </a:p>
-          <a:p>
-            <a:pPr algn="l">
-              <a:spcAft>
-                <a:spcPts val="1000"/>
-              </a:spcAft>
-            </a:pPr>
-            <a:r>
-              <a:rPr sz="1600" b="1">
+              <a:t>Newer code than the source we had</a:t>
+            </a:r>
+          </a:p>
+          <a:p>
+            <a:pPr algn="l">
+              <a:spcAft>
+                <a:spcPts val="900"/>
+              </a:spcAft>
+            </a:pPr>
+            <a:r>
+              <a:rPr sz="1700" b="1">
                 <a:solidFill>
                   <a:srgbClr val="1E6FE0"/>
                 </a:solidFill>
@@ -8013,23 +10031,23 @@
               <a:t>•  </a:t>
             </a:r>
             <a:r>
-              <a:rPr sz="1600" b="0">
+              <a:rPr sz="1700" b="0">
                 <a:solidFill>
                   <a:srgbClr val="4C596B"/>
                 </a:solidFill>
                 <a:latin typeface="Segoe UI"/>
               </a:rPr>
-              <a:t>DigiBull chat rebrand + motion polish</a:t>
-            </a:r>
-          </a:p>
-          <a:p>
-            <a:pPr algn="l">
-              <a:spcAft>
-                <a:spcPts val="1000"/>
-              </a:spcAft>
-            </a:pPr>
-            <a:r>
-              <a:rPr sz="1600" b="1">
+              <a:t>~124 IPC channels not present in source</a:t>
+            </a:r>
+          </a:p>
+          <a:p>
+            <a:pPr algn="l">
+              <a:spcAft>
+                <a:spcPts val="900"/>
+              </a:spcAft>
+            </a:pPr>
+            <a:r>
+              <a:rPr sz="1700" b="1">
                 <a:solidFill>
                   <a:srgbClr val="1E6FE0"/>
                 </a:solidFill>
@@ -8038,23 +10056,23 @@
               <a:t>•  </a:t>
             </a:r>
             <a:r>
-              <a:rPr sz="1600" b="0">
+              <a:rPr sz="1700" b="0">
                 <a:solidFill>
                   <a:srgbClr val="4C596B"/>
                 </a:solidFill>
                 <a:latin typeface="Segoe UI"/>
               </a:rPr>
-              <a:t>Auto model selector (task-aware routing)</a:t>
-            </a:r>
-          </a:p>
-          <a:p>
-            <a:pPr algn="l">
-              <a:spcAft>
-                <a:spcPts val="1000"/>
-              </a:spcAft>
-            </a:pPr>
-            <a:r>
-              <a:rPr sz="1600" b="1">
+              <a:t>New: Browser Panel, Triggered Tasks, llama.cpp, feature flags</a:t>
+            </a:r>
+          </a:p>
+          <a:p>
+            <a:pPr algn="l">
+              <a:spcAft>
+                <a:spcPts val="900"/>
+              </a:spcAft>
+            </a:pPr>
+            <a:r>
+              <a:rPr sz="1700" b="1">
                 <a:solidFill>
                   <a:srgbClr val="1E6FE0"/>
                 </a:solidFill>
@@ -8063,88 +10081,13 @@
               <a:t>•  </a:t>
             </a:r>
             <a:r>
-              <a:rPr sz="1600" b="0">
+              <a:rPr sz="1700" b="0">
                 <a:solidFill>
                   <a:srgbClr val="4C596B"/>
                 </a:solidFill>
                 <a:latin typeface="Segoe UI"/>
               </a:rPr>
-              <a:t>Inline AI question card</a:t>
-            </a:r>
-          </a:p>
-          <a:p>
-            <a:pPr algn="l">
-              <a:spcAft>
-                <a:spcPts val="1000"/>
-              </a:spcAft>
-            </a:pPr>
-            <a:r>
-              <a:rPr sz="1600" b="1">
-                <a:solidFill>
-                  <a:srgbClr val="1E6FE0"/>
-                </a:solidFill>
-                <a:latin typeface="Segoe UI"/>
-              </a:rPr>
-              <a:t>•  </a:t>
-            </a:r>
-            <a:r>
-              <a:rPr sz="1600" b="0">
-                <a:solidFill>
-                  <a:srgbClr val="4C596B"/>
-                </a:solidFill>
-                <a:latin typeface="Segoe UI"/>
-              </a:rPr>
-              <a:t>LOCAL LLM advisor (specs → model picks) + model downloads</a:t>
-            </a:r>
-          </a:p>
-          <a:p>
-            <a:pPr algn="l">
-              <a:spcAft>
-                <a:spcPts val="1000"/>
-              </a:spcAft>
-            </a:pPr>
-            <a:r>
-              <a:rPr sz="1600" b="1">
-                <a:solidFill>
-                  <a:srgbClr val="1E6FE0"/>
-                </a:solidFill>
-                <a:latin typeface="Segoe UI"/>
-              </a:rPr>
-              <a:t>•  </a:t>
-            </a:r>
-            <a:r>
-              <a:rPr sz="1600" b="0">
-                <a:solidFill>
-                  <a:srgbClr val="4C596B"/>
-                </a:solidFill>
-                <a:latin typeface="Segoe UI"/>
-              </a:rPr>
-              <a:t>Appearance: themes / accents / motion · Test-automation skill</a:t>
-            </a:r>
-          </a:p>
-          <a:p>
-            <a:pPr algn="l">
-              <a:spcAft>
-                <a:spcPts val="1000"/>
-              </a:spcAft>
-            </a:pPr>
-            <a:r>
-              <a:rPr sz="1600" b="1">
-                <a:solidFill>
-                  <a:srgbClr val="1E6FE0"/>
-                </a:solidFill>
-                <a:latin typeface="Segoe UI"/>
-              </a:rPr>
-              <a:t>•  </a:t>
-            </a:r>
-            <a:r>
-              <a:rPr sz="1600" b="0">
-                <a:solidFill>
-                  <a:srgbClr val="4C596B"/>
-                </a:solidFill>
-                <a:latin typeface="Segoe UI"/>
-              </a:rPr>
-              <a:t>WhatsApp integration · MCP (in/out)</a:t>
+              <a:t>Only minified bundles → need source to fully port</a:t>
             </a:r>
           </a:p>
         </p:txBody>
@@ -8184,7 +10127,7 @@
         <p:spPr>
           <a:xfrm>
             <a:off x="0" y="0"/>
-            <a:ext cx="12191695" cy="1097280"/>
+            <a:ext cx="12191695" cy="1078992"/>
           </a:xfrm>
           <a:prstGeom prst="rect">
             <a:avLst/>
@@ -8227,7 +10170,7 @@
         </p:nvSpPr>
         <p:spPr>
           <a:xfrm>
-            <a:off x="0" y="1097280"/>
+            <a:off x="0" y="1078992"/>
             <a:ext cx="12191695" cy="54864"/>
           </a:xfrm>
           <a:prstGeom prst="rect">
@@ -8272,7 +10215,7 @@
         <p:spPr>
           <a:xfrm>
             <a:off x="548640" y="109728"/>
-            <a:ext cx="11064240" cy="411480"/>
+            <a:ext cx="11064240" cy="384048"/>
           </a:xfrm>
           <a:prstGeom prst="rect">
             <a:avLst/>
@@ -8297,7 +10240,7 @@
                 </a:solidFill>
                 <a:latin typeface="Segoe UI"/>
               </a:rPr>
-              <a:t>DIGIBULL UI</a:t>
+              <a:t>REMEDIATION  ·  NAGABHUSHANA</a:t>
             </a:r>
           </a:p>
         </p:txBody>
@@ -8310,8 +10253,8 @@
         </p:nvSpPr>
         <p:spPr>
           <a:xfrm>
-            <a:off x="548640" y="411480"/>
-            <a:ext cx="11064240" cy="621792"/>
+            <a:off x="548640" y="402336"/>
+            <a:ext cx="11064240" cy="603504"/>
           </a:xfrm>
           <a:prstGeom prst="rect">
             <a:avLst/>
@@ -8330,13 +10273,13 @@
               </a:spcAft>
             </a:pPr>
             <a:r>
-              <a:rPr sz="2800" b="1">
+              <a:rPr sz="2700" b="1">
                 <a:solidFill>
                   <a:srgbClr val="FFFFFF"/>
                 </a:solidFill>
                 <a:latin typeface="Segoe UI"/>
               </a:rPr>
-              <a:t>Home &amp; model menu</a:t>
+              <a:t>Bugs fixed</a:t>
             </a:r>
           </a:p>
         </p:txBody>
@@ -8349,8 +10292,8 @@
         </p:nvSpPr>
         <p:spPr>
           <a:xfrm>
-            <a:off x="731520" y="1417320"/>
-            <a:ext cx="10789920" cy="4937760"/>
+            <a:off x="731520" y="1371600"/>
+            <a:ext cx="10789920" cy="5029200"/>
           </a:xfrm>
           <a:prstGeom prst="rect">
             <a:avLst/>
@@ -8365,7 +10308,7 @@
           <a:p>
             <a:pPr algn="l">
               <a:spcAft>
-                <a:spcPts val="1000"/>
+                <a:spcPts val="900"/>
               </a:spcAft>
             </a:pPr>
             <a:r>
@@ -8378,19 +10321,28 @@
               <a:t>•  </a:t>
             </a:r>
             <a:r>
+              <a:rPr sz="1700" b="1">
+                <a:solidFill>
+                  <a:srgbClr val="0B1F3A"/>
+                </a:solidFill>
+                <a:latin typeface="Segoe UI"/>
+              </a:rPr>
+              <a:t>Tasks failed </a:t>
+            </a:r>
+            <a:r>
               <a:rPr sz="1700" b="0">
                 <a:solidFill>
                   <a:srgbClr val="4C596B"/>
                 </a:solidFill>
                 <a:latin typeface="Segoe UI"/>
               </a:rPr>
-              <a:t>Home prompt: “What will DigiBull handle today?”</a:t>
-            </a:r>
-          </a:p>
-          <a:p>
-            <a:pPr algn="l">
-              <a:spcAft>
-                <a:spcPts val="1000"/>
+              <a:t>→ API keys now passed to OpenCode</a:t>
+            </a:r>
+          </a:p>
+          <a:p>
+            <a:pPr algn="l">
+              <a:spcAft>
+                <a:spcPts val="900"/>
               </a:spcAft>
             </a:pPr>
             <a:r>
@@ -8409,13 +10361,13 @@
                 </a:solidFill>
                 <a:latin typeface="Segoe UI"/>
               </a:rPr>
-              <a:t>Model menu: Auto · by task type</a:t>
-            </a:r>
-          </a:p>
-          <a:p>
-            <a:pPr algn="l">
-              <a:spcAft>
-                <a:spcPts val="1000"/>
+              <a:t>Provider connect crash (null.valid)</a:t>
+            </a:r>
+          </a:p>
+          <a:p>
+            <a:pPr algn="l">
+              <a:spcAft>
+                <a:spcPts val="900"/>
               </a:spcAft>
             </a:pPr>
             <a:r>
@@ -8434,13 +10386,13 @@
                 </a:solidFill>
                 <a:latin typeface="Segoe UI"/>
               </a:rPr>
-              <a:t>Auto routes simple chat → fast models; code/research → stronger</a:t>
-            </a:r>
-          </a:p>
-          <a:p>
-            <a:pPr algn="l">
-              <a:spcAft>
-                <a:spcPts val="1000"/>
+              <a:t>Valid keys wrongly rejected</a:t>
+            </a:r>
+          </a:p>
+          <a:p>
+            <a:pPr algn="l">
+              <a:spcAft>
+                <a:spcPts val="900"/>
               </a:spcAft>
             </a:pPr>
             <a:r>
@@ -8459,7 +10411,32 @@
                 </a:solidFill>
                 <a:latin typeface="Segoe UI"/>
               </a:rPr>
-              <a:t>Guardrail: if Auto routing times out, the task still starts</a:t>
+              <a:t>Pasted-quote keys broke auth</a:t>
+            </a:r>
+          </a:p>
+          <a:p>
+            <a:pPr algn="l">
+              <a:spcAft>
+                <a:spcPts val="900"/>
+              </a:spcAft>
+            </a:pPr>
+            <a:r>
+              <a:rPr sz="1700" b="1">
+                <a:solidFill>
+                  <a:srgbClr val="1E6FE0"/>
+                </a:solidFill>
+                <a:latin typeface="Segoe UI"/>
+              </a:rPr>
+              <a:t>•  </a:t>
+            </a:r>
+            <a:r>
+              <a:rPr sz="1700" b="0">
+                <a:solidFill>
+                  <a:srgbClr val="4C596B"/>
+                </a:solidFill>
+                <a:latin typeface="Segoe UI"/>
+              </a:rPr>
+              <a:t>Failures now show a reason</a:t>
             </a:r>
           </a:p>
         </p:txBody>

--- a/SRIM/Accomplish/accomplish_Wrapper/LOCAL/docs/SRIM_Master_Deck.pptx
+++ b/SRIM/Accomplish/accomplish_Wrapper/LOCAL/docs/SRIM_Master_Deck.pptx
@@ -25,6 +25,7 @@
     <p:sldId id="273" r:id="rId24"/>
     <p:sldId id="274" r:id="rId25"/>
     <p:sldId id="275" r:id="rId26"/>
+    <p:sldId id="276" r:id="rId27"/>
   </p:sldIdLst>
   <p:sldSz cx="12191695" cy="6858000" type="screen4x3"/>
   <p:notesSz cx="6858000" cy="9144000"/>
@@ -3449,7 +3450,7 @@
                 </a:solidFill>
                 <a:latin typeface="Segoe UI"/>
               </a:rPr>
-              <a:t>NEW FEATURES  ·  NAGABHUSHANA</a:t>
+              <a:t>REMEDIATION  ·  NAGABHUSHANA</a:t>
             </a:r>
           </a:p>
         </p:txBody>
@@ -3488,7 +3489,7 @@
                 </a:solidFill>
                 <a:latin typeface="Segoe UI"/>
               </a:rPr>
-              <a:t>Delivered in SRIM</a:t>
+              <a:t>Bugs fixed</a:t>
             </a:r>
           </a:p>
         </p:txBody>
@@ -3521,7 +3522,7 @@
               </a:spcAft>
             </a:pPr>
             <a:r>
-              <a:rPr sz="1600" b="1">
+              <a:rPr sz="1700" b="1">
                 <a:solidFill>
                   <a:srgbClr val="1E6FE0"/>
                 </a:solidFill>
@@ -3530,13 +3531,22 @@
               <a:t>•  </a:t>
             </a:r>
             <a:r>
-              <a:rPr sz="1600" b="0">
+              <a:rPr sz="1700" b="1">
+                <a:solidFill>
+                  <a:srgbClr val="0B1F3A"/>
+                </a:solidFill>
+                <a:latin typeface="Segoe UI"/>
+              </a:rPr>
+              <a:t>Tasks failed </a:t>
+            </a:r>
+            <a:r>
+              <a:rPr sz="1700" b="0">
                 <a:solidFill>
                   <a:srgbClr val="4C596B"/>
                 </a:solidFill>
                 <a:latin typeface="Segoe UI"/>
               </a:rPr>
-              <a:t>Centralized addresses (migration-proof)</a:t>
+              <a:t>→ API keys now passed to OpenCode</a:t>
             </a:r>
           </a:p>
           <a:p>
@@ -3546,7 +3556,7 @@
               </a:spcAft>
             </a:pPr>
             <a:r>
-              <a:rPr sz="1600" b="1">
+              <a:rPr sz="1700" b="1">
                 <a:solidFill>
                   <a:srgbClr val="1E6FE0"/>
                 </a:solidFill>
@@ -3555,13 +3565,13 @@
               <a:t>•  </a:t>
             </a:r>
             <a:r>
-              <a:rPr sz="1600" b="0">
+              <a:rPr sz="1700" b="0">
                 <a:solidFill>
                   <a:srgbClr val="4C596B"/>
                 </a:solidFill>
                 <a:latin typeface="Segoe UI"/>
               </a:rPr>
-              <a:t>DigiBull chat rebrand + motion polish</a:t>
+              <a:t>Provider connect crash (null.valid)</a:t>
             </a:r>
           </a:p>
           <a:p>
@@ -3571,7 +3581,7 @@
               </a:spcAft>
             </a:pPr>
             <a:r>
-              <a:rPr sz="1600" b="1">
+              <a:rPr sz="1700" b="1">
                 <a:solidFill>
                   <a:srgbClr val="1E6FE0"/>
                 </a:solidFill>
@@ -3580,13 +3590,13 @@
               <a:t>•  </a:t>
             </a:r>
             <a:r>
-              <a:rPr sz="1600" b="0">
+              <a:rPr sz="1700" b="0">
                 <a:solidFill>
                   <a:srgbClr val="4C596B"/>
                 </a:solidFill>
                 <a:latin typeface="Segoe UI"/>
               </a:rPr>
-              <a:t>Auto model selector (task-aware routing)</a:t>
+              <a:t>Valid keys wrongly rejected</a:t>
             </a:r>
           </a:p>
           <a:p>
@@ -3596,7 +3606,7 @@
               </a:spcAft>
             </a:pPr>
             <a:r>
-              <a:rPr sz="1600" b="1">
+              <a:rPr sz="1700" b="1">
                 <a:solidFill>
                   <a:srgbClr val="1E6FE0"/>
                 </a:solidFill>
@@ -3605,13 +3615,13 @@
               <a:t>•  </a:t>
             </a:r>
             <a:r>
-              <a:rPr sz="1600" b="0">
+              <a:rPr sz="1700" b="0">
                 <a:solidFill>
                   <a:srgbClr val="4C596B"/>
                 </a:solidFill>
                 <a:latin typeface="Segoe UI"/>
               </a:rPr>
-              <a:t>Inline AI question card</a:t>
+              <a:t>Pasted-quote keys broke auth</a:t>
             </a:r>
           </a:p>
           <a:p>
@@ -3621,7 +3631,7 @@
               </a:spcAft>
             </a:pPr>
             <a:r>
-              <a:rPr sz="1600" b="1">
+              <a:rPr sz="1700" b="1">
                 <a:solidFill>
                   <a:srgbClr val="1E6FE0"/>
                 </a:solidFill>
@@ -3630,63 +3640,13 @@
               <a:t>•  </a:t>
             </a:r>
             <a:r>
-              <a:rPr sz="1600" b="0">
+              <a:rPr sz="1700" b="0">
                 <a:solidFill>
                   <a:srgbClr val="4C596B"/>
                 </a:solidFill>
                 <a:latin typeface="Segoe UI"/>
               </a:rPr>
-              <a:t>LOCAL LLM advisor (specs → model picks) + model downloads</a:t>
-            </a:r>
-          </a:p>
-          <a:p>
-            <a:pPr algn="l">
-              <a:spcAft>
-                <a:spcPts val="900"/>
-              </a:spcAft>
-            </a:pPr>
-            <a:r>
-              <a:rPr sz="1600" b="1">
-                <a:solidFill>
-                  <a:srgbClr val="1E6FE0"/>
-                </a:solidFill>
-                <a:latin typeface="Segoe UI"/>
-              </a:rPr>
-              <a:t>•  </a:t>
-            </a:r>
-            <a:r>
-              <a:rPr sz="1600" b="0">
-                <a:solidFill>
-                  <a:srgbClr val="4C596B"/>
-                </a:solidFill>
-                <a:latin typeface="Segoe UI"/>
-              </a:rPr>
-              <a:t>Appearance: themes / accents / motion · Test-automation skill</a:t>
-            </a:r>
-          </a:p>
-          <a:p>
-            <a:pPr algn="l">
-              <a:spcAft>
-                <a:spcPts val="900"/>
-              </a:spcAft>
-            </a:pPr>
-            <a:r>
-              <a:rPr sz="1600" b="1">
-                <a:solidFill>
-                  <a:srgbClr val="1E6FE0"/>
-                </a:solidFill>
-                <a:latin typeface="Segoe UI"/>
-              </a:rPr>
-              <a:t>•  </a:t>
-            </a:r>
-            <a:r>
-              <a:rPr sz="1600" b="0">
-                <a:solidFill>
-                  <a:srgbClr val="4C596B"/>
-                </a:solidFill>
-                <a:latin typeface="Segoe UI"/>
-              </a:rPr>
-              <a:t>WhatsApp integration · MCP (in/out)</a:t>
+              <a:t>Failures now show a reason</a:t>
             </a:r>
           </a:p>
         </p:txBody>
@@ -3839,7 +3799,7 @@
                 </a:solidFill>
                 <a:latin typeface="Segoe UI"/>
               </a:rPr>
-              <a:t>COVERAGE</a:t>
+              <a:t>NEW FEATURES  ·  NAGABHUSHANA</a:t>
             </a:r>
           </a:p>
         </p:txBody>
@@ -3878,7 +3838,7 @@
                 </a:solidFill>
                 <a:latin typeface="Segoe UI"/>
               </a:rPr>
-              <a:t>Feature buckets</a:t>
+              <a:t>Delivered in SRIM</a:t>
             </a:r>
           </a:p>
         </p:txBody>
@@ -3911,7 +3871,7 @@
               </a:spcAft>
             </a:pPr>
             <a:r>
-              <a:rPr sz="1700" b="1">
+              <a:rPr sz="1600" b="1">
                 <a:solidFill>
                   <a:srgbClr val="1E6FE0"/>
                 </a:solidFill>
@@ -3920,22 +3880,13 @@
               <a:t>•  </a:t>
             </a:r>
             <a:r>
-              <a:rPr sz="1700" b="1">
-                <a:solidFill>
-                  <a:srgbClr val="0B1F3A"/>
-                </a:solidFill>
-                <a:latin typeface="Segoe UI"/>
-              </a:rPr>
-              <a:t>Bucket A (24): </a:t>
-            </a:r>
-            <a:r>
-              <a:rPr sz="1700" b="0">
+              <a:rPr sz="1600" b="0">
                 <a:solidFill>
                   <a:srgbClr val="4C596B"/>
                 </a:solidFill>
                 <a:latin typeface="Segoe UI"/>
               </a:rPr>
-              <a:t>done</a:t>
+              <a:t>Centralized addresses (migration-proof)</a:t>
             </a:r>
           </a:p>
           <a:p>
@@ -3945,7 +3896,7 @@
               </a:spcAft>
             </a:pPr>
             <a:r>
-              <a:rPr sz="1700" b="1">
+              <a:rPr sz="1600" b="1">
                 <a:solidFill>
                   <a:srgbClr val="1E6FE0"/>
                 </a:solidFill>
@@ -3954,22 +3905,13 @@
               <a:t>•  </a:t>
             </a:r>
             <a:r>
-              <a:rPr sz="1700" b="1">
-                <a:solidFill>
-                  <a:srgbClr val="0B1F3A"/>
-                </a:solidFill>
-                <a:latin typeface="Segoe UI"/>
-              </a:rPr>
-              <a:t>Bucket B portable: </a:t>
-            </a:r>
-            <a:r>
-              <a:rPr sz="1700" b="0">
+              <a:rPr sz="1600" b="0">
                 <a:solidFill>
                   <a:srgbClr val="4C596B"/>
                 </a:solidFill>
                 <a:latin typeface="Segoe UI"/>
               </a:rPr>
-              <a:t>done</a:t>
+              <a:t>DigiBull chat rebrand + motion polish</a:t>
             </a:r>
           </a:p>
           <a:p>
@@ -3979,7 +3921,7 @@
               </a:spcAft>
             </a:pPr>
             <a:r>
-              <a:rPr sz="1700" b="1">
+              <a:rPr sz="1600" b="1">
                 <a:solidFill>
                   <a:srgbClr val="1E6FE0"/>
                 </a:solidFill>
@@ -3988,22 +3930,13 @@
               <a:t>•  </a:t>
             </a:r>
             <a:r>
-              <a:rPr sz="1700" b="1">
-                <a:solidFill>
-                  <a:srgbClr val="0B1F3A"/>
-                </a:solidFill>
-                <a:latin typeface="Segoe UI"/>
-              </a:rPr>
-              <a:t>HF-local UI: </a:t>
-            </a:r>
-            <a:r>
-              <a:rPr sz="1700" b="0">
+              <a:rPr sz="1600" b="0">
                 <a:solidFill>
                   <a:srgbClr val="4C596B"/>
                 </a:solidFill>
                 <a:latin typeface="Segoe UI"/>
               </a:rPr>
-              <a:t>downloads / runtime wired</a:t>
+              <a:t>Auto model selector (task-aware routing)</a:t>
             </a:r>
           </a:p>
           <a:p>
@@ -4013,7 +3946,7 @@
               </a:spcAft>
             </a:pPr>
             <a:r>
-              <a:rPr sz="1700" b="1">
+              <a:rPr sz="1600" b="1">
                 <a:solidFill>
                   <a:srgbClr val="1E6FE0"/>
                 </a:solidFill>
@@ -4022,22 +3955,13 @@
               <a:t>•  </a:t>
             </a:r>
             <a:r>
-              <a:rPr sz="1700" b="1">
-                <a:solidFill>
-                  <a:srgbClr val="0B1F3A"/>
-                </a:solidFill>
-                <a:latin typeface="Segoe UI"/>
-              </a:rPr>
-              <a:t>Native gaps: </a:t>
-            </a:r>
-            <a:r>
-              <a:rPr sz="1700" b="0">
+              <a:rPr sz="1600" b="0">
                 <a:solidFill>
                   <a:srgbClr val="4C596B"/>
                 </a:solidFill>
                 <a:latin typeface="Segoe UI"/>
               </a:rPr>
-              <a:t>per-GPU index, gcloud APIs</a:t>
+              <a:t>Inline AI question card</a:t>
             </a:r>
           </a:p>
           <a:p>
@@ -4047,7 +3971,7 @@
               </a:spcAft>
             </a:pPr>
             <a:r>
-              <a:rPr sz="1700" b="1">
+              <a:rPr sz="1600" b="1">
                 <a:solidFill>
                   <a:srgbClr val="1E6FE0"/>
                 </a:solidFill>
@@ -4056,22 +3980,13 @@
               <a:t>•  </a:t>
             </a:r>
             <a:r>
-              <a:rPr sz="1700" b="1">
-                <a:solidFill>
-                  <a:srgbClr val="0B1F3A"/>
-                </a:solidFill>
-                <a:latin typeface="Segoe UI"/>
-              </a:rPr>
-              <a:t>0.4.14 features: </a:t>
-            </a:r>
-            <a:r>
-              <a:rPr sz="1700" b="0">
+              <a:rPr sz="1600" b="0">
                 <a:solidFill>
                   <a:srgbClr val="4C596B"/>
                 </a:solidFill>
                 <a:latin typeface="Segoe UI"/>
               </a:rPr>
-              <a:t>need source</a:t>
+              <a:t>LOCAL LLM advisor (specs → model picks) + model downloads</a:t>
             </a:r>
           </a:p>
           <a:p>
@@ -4081,7 +3996,7 @@
               </a:spcAft>
             </a:pPr>
             <a:r>
-              <a:rPr sz="1700" b="1">
+              <a:rPr sz="1600" b="1">
                 <a:solidFill>
                   <a:srgbClr val="1E6FE0"/>
                 </a:solidFill>
@@ -4090,22 +4005,38 @@
               <a:t>•  </a:t>
             </a:r>
             <a:r>
-              <a:rPr sz="1700" b="1">
-                <a:solidFill>
-                  <a:srgbClr val="0B1F3A"/>
-                </a:solidFill>
-                <a:latin typeface="Segoe UI"/>
-              </a:rPr>
-              <a:t>Desktop-only (tray/updater): </a:t>
-            </a:r>
-            <a:r>
-              <a:rPr sz="1700" b="0">
+              <a:rPr sz="1600" b="0">
                 <a:solidFill>
                   <a:srgbClr val="4C596B"/>
                 </a:solidFill>
                 <a:latin typeface="Segoe UI"/>
               </a:rPr>
-              <a:t>N/A</a:t>
+              <a:t>Appearance: themes / accents / motion · Test-automation skill</a:t>
+            </a:r>
+          </a:p>
+          <a:p>
+            <a:pPr algn="l">
+              <a:spcAft>
+                <a:spcPts val="900"/>
+              </a:spcAft>
+            </a:pPr>
+            <a:r>
+              <a:rPr sz="1600" b="1">
+                <a:solidFill>
+                  <a:srgbClr val="1E6FE0"/>
+                </a:solidFill>
+                <a:latin typeface="Segoe UI"/>
+              </a:rPr>
+              <a:t>•  </a:t>
+            </a:r>
+            <a:r>
+              <a:rPr sz="1600" b="0">
+                <a:solidFill>
+                  <a:srgbClr val="4C596B"/>
+                </a:solidFill>
+                <a:latin typeface="Segoe UI"/>
+              </a:rPr>
+              <a:t>WhatsApp integration · MCP (in/out)</a:t>
             </a:r>
           </a:p>
         </p:txBody>
@@ -4258,7 +4189,7 @@
                 </a:solidFill>
                 <a:latin typeface="Segoe UI"/>
               </a:rPr>
-              <a:t>DIGIBULL UI</a:t>
+              <a:t>COVERAGE</a:t>
             </a:r>
           </a:p>
         </p:txBody>
@@ -4297,7 +4228,7 @@
                 </a:solidFill>
                 <a:latin typeface="Segoe UI"/>
               </a:rPr>
-              <a:t>Home &amp; model menu</a:t>
+              <a:t>Feature buckets</a:t>
             </a:r>
           </a:p>
         </p:txBody>
@@ -4339,13 +4270,22 @@
               <a:t>•  </a:t>
             </a:r>
             <a:r>
+              <a:rPr sz="1700" b="1">
+                <a:solidFill>
+                  <a:srgbClr val="0B1F3A"/>
+                </a:solidFill>
+                <a:latin typeface="Segoe UI"/>
+              </a:rPr>
+              <a:t>Bucket A (24): </a:t>
+            </a:r>
+            <a:r>
               <a:rPr sz="1700" b="0">
                 <a:solidFill>
                   <a:srgbClr val="4C596B"/>
                 </a:solidFill>
                 <a:latin typeface="Segoe UI"/>
               </a:rPr>
-              <a:t>Home prompt: “What will DigiBull handle today?”</a:t>
+              <a:t>done</a:t>
             </a:r>
           </a:p>
           <a:p>
@@ -4364,13 +4304,22 @@
               <a:t>•  </a:t>
             </a:r>
             <a:r>
+              <a:rPr sz="1700" b="1">
+                <a:solidFill>
+                  <a:srgbClr val="0B1F3A"/>
+                </a:solidFill>
+                <a:latin typeface="Segoe UI"/>
+              </a:rPr>
+              <a:t>Bucket B: </a:t>
+            </a:r>
+            <a:r>
               <a:rPr sz="1700" b="0">
                 <a:solidFill>
                   <a:srgbClr val="4C596B"/>
                 </a:solidFill>
                 <a:latin typeface="Segoe UI"/>
               </a:rPr>
-              <a:t>Model menu: Auto · by task type</a:t>
+              <a:t>ported to daemon (HF-local, Copilot, Vertex, speech, OAuth)</a:t>
             </a:r>
           </a:p>
           <a:p>
@@ -4389,13 +4338,22 @@
               <a:t>•  </a:t>
             </a:r>
             <a:r>
+              <a:rPr sz="1700" b="1">
+                <a:solidFill>
+                  <a:srgbClr val="0B1F3A"/>
+                </a:solidFill>
+                <a:latin typeface="Segoe UI"/>
+              </a:rPr>
+              <a:t>Browser-native (C): </a:t>
+            </a:r>
+            <a:r>
               <a:rPr sz="1700" b="0">
                 <a:solidFill>
                   <a:srgbClr val="4C596B"/>
                 </a:solidFill>
                 <a:latin typeface="Segoe UI"/>
               </a:rPr>
-              <a:t>Auto routes simple chat → fast models; code/research → stronger</a:t>
+              <a:t>exportLogs, screenshot, axtree done</a:t>
             </a:r>
           </a:p>
           <a:p>
@@ -4414,13 +4372,56 @@
               <a:t>•  </a:t>
             </a:r>
             <a:r>
+              <a:rPr sz="1700" b="1">
+                <a:solidFill>
+                  <a:srgbClr val="0B1F3A"/>
+                </a:solidFill>
+                <a:latin typeface="Segoe UI"/>
+              </a:rPr>
+              <a:t>Native gaps: </a:t>
+            </a:r>
+            <a:r>
               <a:rPr sz="1700" b="0">
                 <a:solidFill>
                   <a:srgbClr val="4C596B"/>
                 </a:solidFill>
                 <a:latin typeface="Segoe UI"/>
               </a:rPr>
-              <a:t>Guardrail: if Auto routing times out, the task still starts</a:t>
+              <a:t>Browser Panel, llama.cpp = desktop-only</a:t>
+            </a:r>
+          </a:p>
+          <a:p>
+            <a:pPr algn="l">
+              <a:spcAft>
+                <a:spcPts val="900"/>
+              </a:spcAft>
+            </a:pPr>
+            <a:r>
+              <a:rPr sz="1700" b="1">
+                <a:solidFill>
+                  <a:srgbClr val="1E6FE0"/>
+                </a:solidFill>
+                <a:latin typeface="Segoe UI"/>
+              </a:rPr>
+              <a:t>•  </a:t>
+            </a:r>
+            <a:r>
+              <a:rPr sz="1700" b="1">
+                <a:solidFill>
+                  <a:srgbClr val="0B1F3A"/>
+                </a:solidFill>
+                <a:latin typeface="Segoe UI"/>
+              </a:rPr>
+              <a:t>Desktop-only (tray/updater): </a:t>
+            </a:r>
+            <a:r>
+              <a:rPr sz="1700" b="0">
+                <a:solidFill>
+                  <a:srgbClr val="4C596B"/>
+                </a:solidFill>
+                <a:latin typeface="Segoe UI"/>
+              </a:rPr>
+              <a:t>N/A</a:t>
             </a:r>
           </a:p>
         </p:txBody>
@@ -4573,7 +4574,7 @@
                 </a:solidFill>
                 <a:latin typeface="Segoe UI"/>
               </a:rPr>
-              <a:t>LOCAL MODELS</a:t>
+              <a:t>DIGIBULL UI</a:t>
             </a:r>
           </a:p>
         </p:txBody>
@@ -4612,7 +4613,7 @@
                 </a:solidFill>
                 <a:latin typeface="Segoe UI"/>
               </a:rPr>
-              <a:t>Local model UX</a:t>
+              <a:t>Home &amp; model menu</a:t>
             </a:r>
           </a:p>
         </p:txBody>
@@ -4660,7 +4661,7 @@
                 </a:solidFill>
                 <a:latin typeface="Segoe UI"/>
               </a:rPr>
-              <a:t>Device checker sits above downloads</a:t>
+              <a:t>Home prompt: “What will DigiBull handle today?”</a:t>
             </a:r>
           </a:p>
           <a:p>
@@ -4685,7 +4686,7 @@
                 </a:solidFill>
                 <a:latin typeface="Segoe UI"/>
               </a:rPr>
-              <a:t>Download box: idle / downloading / installed / failed</a:t>
+              <a:t>Model menu: Auto · by task type</a:t>
             </a:r>
           </a:p>
           <a:p>
@@ -4710,7 +4711,7 @@
                 </a:solidFill>
                 <a:latin typeface="Segoe UI"/>
               </a:rPr>
-              <a:t>Runtime targets: Auto · GPU · WebGPU · CPU</a:t>
+              <a:t>Auto routes simple chat → fast models; code/research → stronger</a:t>
             </a:r>
           </a:p>
           <a:p>
@@ -4735,7 +4736,7 @@
                 </a:solidFill>
                 <a:latin typeface="Segoe UI"/>
               </a:rPr>
-              <a:t>Automatic GPU selection for GPU modes</a:t>
+              <a:t>Guardrail: if Auto routing times out, the task still starts</a:t>
             </a:r>
           </a:p>
         </p:txBody>
@@ -4888,7 +4889,7 @@
                 </a:solidFill>
                 <a:latin typeface="Segoe UI"/>
               </a:rPr>
-              <a:t>AI QUESTIONS</a:t>
+              <a:t>LOCAL MODELS</a:t>
             </a:r>
           </a:p>
         </p:txBody>
@@ -4927,7 +4928,7 @@
                 </a:solidFill>
                 <a:latin typeface="Segoe UI"/>
               </a:rPr>
-              <a:t>Inline question card</a:t>
+              <a:t>Local model UX</a:t>
             </a:r>
           </a:p>
         </p:txBody>
@@ -4975,7 +4976,7 @@
                 </a:solidFill>
                 <a:latin typeface="Segoe UI"/>
               </a:rPr>
-              <a:t>SRIM can surface model questions inline</a:t>
+              <a:t>Device checker sits above downloads</a:t>
             </a:r>
           </a:p>
           <a:p>
@@ -5000,7 +5001,7 @@
                 </a:solidFill>
                 <a:latin typeface="Segoe UI"/>
               </a:rPr>
-              <a:t>No more hidden “it is thinking” for question prompts</a:t>
+              <a:t>Download box: idle / downloading / installed / failed</a:t>
             </a:r>
           </a:p>
           <a:p>
@@ -5025,7 +5026,7 @@
                 </a:solidFill>
                 <a:latin typeface="Segoe UI"/>
               </a:rPr>
-              <a:t>Question card accepts a typed answer or choices</a:t>
+              <a:t>Runtime targets: Auto · GPU · WebGPU · CPU</a:t>
             </a:r>
           </a:p>
           <a:p>
@@ -5050,7 +5051,7 @@
                 </a:solidFill>
                 <a:latin typeface="Segoe UI"/>
               </a:rPr>
-              <a:t>File/tool permissions still use the stronger modal</a:t>
+              <a:t>Automatic GPU selection for GPU modes</a:t>
             </a:r>
           </a:p>
         </p:txBody>
@@ -5203,7 +5204,7 @@
                 </a:solidFill>
                 <a:latin typeface="Segoe UI"/>
               </a:rPr>
-              <a:t>MCP</a:t>
+              <a:t>AI QUESTIONS</a:t>
             </a:r>
           </a:p>
         </p:txBody>
@@ -5242,7 +5243,7 @@
                 </a:solidFill>
                 <a:latin typeface="Segoe UI"/>
               </a:rPr>
-              <a:t>Two directions</a:t>
+              <a:t>Inline question card</a:t>
             </a:r>
           </a:p>
         </p:txBody>
@@ -5284,13 +5285,29 @@
               <a:t>•  </a:t>
             </a:r>
             <a:r>
+              <a:rPr sz="1700" b="0">
+                <a:solidFill>
+                  <a:srgbClr val="4C596B"/>
+                </a:solidFill>
+                <a:latin typeface="Segoe UI"/>
+              </a:rPr>
+              <a:t>SRIM can surface model questions inline</a:t>
+            </a:r>
+          </a:p>
+          <a:p>
+            <a:pPr algn="l">
+              <a:spcAft>
+                <a:spcPts val="900"/>
+              </a:spcAft>
+            </a:pPr>
+            <a:r>
               <a:rPr sz="1700" b="1">
                 <a:solidFill>
-                  <a:srgbClr val="0B1F3A"/>
-                </a:solidFill>
-                <a:latin typeface="Segoe UI"/>
-              </a:rPr>
-              <a:t>Outbound: </a:t>
+                  <a:srgbClr val="1E6FE0"/>
+                </a:solidFill>
+                <a:latin typeface="Segoe UI"/>
+              </a:rPr>
+              <a:t>•  </a:t>
             </a:r>
             <a:r>
               <a:rPr sz="1700" b="0">
@@ -5299,7 +5316,7 @@
                 </a:solidFill>
                 <a:latin typeface="Segoe UI"/>
               </a:rPr>
-              <a:t>add MCP servers → the agent uses them</a:t>
+              <a:t>No more hidden “it is thinking” for question prompts</a:t>
             </a:r>
           </a:p>
           <a:p>
@@ -5324,7 +5341,7 @@
                 </a:solidFill>
                 <a:latin typeface="Segoe UI"/>
               </a:rPr>
-              <a:t>Pre-seeded: Dify, FastMCP, MCP Jungle, Postgres, Superset…</a:t>
+              <a:t>Question card accepts a typed answer or choices</a:t>
             </a:r>
           </a:p>
           <a:p>
@@ -5343,47 +5360,13 @@
               <a:t>•  </a:t>
             </a:r>
             <a:r>
-              <a:rPr sz="1700" b="1">
-                <a:solidFill>
-                  <a:srgbClr val="0B1F3A"/>
-                </a:solidFill>
-                <a:latin typeface="Segoe UI"/>
-              </a:rPr>
-              <a:t>Inbound: </a:t>
-            </a:r>
-            <a:r>
               <a:rPr sz="1700" b="0">
                 <a:solidFill>
                   <a:srgbClr val="4C596B"/>
                 </a:solidFill>
                 <a:latin typeface="Segoe UI"/>
               </a:rPr>
-              <a:t>external workflows call /rpc</a:t>
-            </a:r>
-          </a:p>
-          <a:p>
-            <a:pPr algn="l">
-              <a:spcAft>
-                <a:spcPts val="900"/>
-              </a:spcAft>
-            </a:pPr>
-            <a:r>
-              <a:rPr sz="1700" b="1">
-                <a:solidFill>
-                  <a:srgbClr val="1E6FE0"/>
-                </a:solidFill>
-                <a:latin typeface="Segoe UI"/>
-              </a:rPr>
-              <a:t>•  </a:t>
-            </a:r>
-            <a:r>
-              <a:rPr sz="1700" b="0">
-                <a:solidFill>
-                  <a:srgbClr val="4C596B"/>
-                </a:solidFill>
-                <a:latin typeface="Segoe UI"/>
-              </a:rPr>
-              <a:t>Bearer key · loopback-only · opt-in flag</a:t>
+              <a:t>File/tool permissions still use the stronger modal</a:t>
             </a:r>
           </a:p>
         </p:txBody>
@@ -5536,7 +5519,7 @@
                 </a:solidFill>
                 <a:latin typeface="Segoe UI"/>
               </a:rPr>
-              <a:t>NEW · ONE-CLICK SETUP</a:t>
+              <a:t>MCP</a:t>
             </a:r>
           </a:p>
         </p:txBody>
@@ -5575,7 +5558,7 @@
                 </a:solidFill>
                 <a:latin typeface="Segoe UI"/>
               </a:rPr>
-              <a:t>Install &amp; launch on any Windows laptop</a:t>
+              <a:t>Two directions</a:t>
             </a:r>
           </a:p>
         </p:txBody>
@@ -5588,8 +5571,8 @@
         </p:nvSpPr>
         <p:spPr>
           <a:xfrm>
-            <a:off x="731520" y="1417320"/>
-            <a:ext cx="6949440" cy="5029200"/>
+            <a:off x="731520" y="1371600"/>
+            <a:ext cx="10789920" cy="5029200"/>
           </a:xfrm>
           <a:prstGeom prst="rect">
             <a:avLst/>
@@ -5623,7 +5606,7 @@
                 </a:solidFill>
                 <a:latin typeface="Segoe UI"/>
               </a:rPr>
-              <a:t>Self-contained </a:t>
+              <a:t>Outbound: </a:t>
             </a:r>
             <a:r>
               <a:rPr sz="1700" b="0">
@@ -5632,7 +5615,7 @@
                 </a:solidFill>
                 <a:latin typeface="Segoe UI"/>
               </a:rPr>
-              <a:t>— bundled Node 24.15.0, no Node/winget needed</a:t>
+              <a:t>add MCP servers → the agent uses them</a:t>
             </a:r>
           </a:p>
           <a:p>
@@ -5651,13 +5634,38 @@
               <a:t>•  </a:t>
             </a:r>
             <a:r>
+              <a:rPr sz="1700" b="0">
+                <a:solidFill>
+                  <a:srgbClr val="4C596B"/>
+                </a:solidFill>
+                <a:latin typeface="Segoe UI"/>
+              </a:rPr>
+              <a:t>Pre-seeded: Dify, FastMCP, MCP Jungle, Postgres, Superset…</a:t>
+            </a:r>
+          </a:p>
+          <a:p>
+            <a:pPr algn="l">
+              <a:spcAft>
+                <a:spcPts val="900"/>
+              </a:spcAft>
+            </a:pPr>
+            <a:r>
               <a:rPr sz="1700" b="1">
                 <a:solidFill>
+                  <a:srgbClr val="1E6FE0"/>
+                </a:solidFill>
+                <a:latin typeface="Segoe UI"/>
+              </a:rPr>
+              <a:t>•  </a:t>
+            </a:r>
+            <a:r>
+              <a:rPr sz="1700" b="1">
+                <a:solidFill>
                   <a:srgbClr val="0B1F3A"/>
                 </a:solidFill>
                 <a:latin typeface="Segoe UI"/>
               </a:rPr>
-              <a:t>Auto-unblock </a:t>
+              <a:t>Inbound: </a:t>
             </a:r>
             <a:r>
               <a:rPr sz="1700" b="0">
@@ -5666,7 +5674,7 @@
                 </a:solidFill>
                 <a:latin typeface="Segoe UI"/>
               </a:rPr>
-              <a:t>— handles ZIP/USB/download 'blocked file' flag</a:t>
+              <a:t>external workflows call /rpc</a:t>
             </a:r>
           </a:p>
           <a:p>
@@ -5685,225 +5693,13 @@
               <a:t>•  </a:t>
             </a:r>
             <a:r>
-              <a:rPr sz="1700" b="1">
-                <a:solidFill>
-                  <a:srgbClr val="0B1F3A"/>
-                </a:solidFill>
-                <a:latin typeface="Segoe UI"/>
-              </a:rPr>
-              <a:t>Clean reinstall </a:t>
-            </a:r>
-            <a:r>
               <a:rPr sz="1700" b="0">
                 <a:solidFill>
                   <a:srgbClr val="4C596B"/>
                 </a:solidFill>
                 <a:latin typeface="Segoe UI"/>
               </a:rPr>
-              <a:t>+ rebuilds better-sqlite3 for Node 24</a:t>
-            </a:r>
-          </a:p>
-          <a:p>
-            <a:pPr algn="l">
-              <a:spcAft>
-                <a:spcPts val="900"/>
-              </a:spcAft>
-            </a:pPr>
-            <a:r>
-              <a:rPr sz="1700" b="1">
-                <a:solidFill>
-                  <a:srgbClr val="1E6FE0"/>
-                </a:solidFill>
-                <a:latin typeface="Segoe UI"/>
-              </a:rPr>
-              <a:t>•  </a:t>
-            </a:r>
-            <a:r>
-              <a:rPr sz="1700" b="1">
-                <a:solidFill>
-                  <a:srgbClr val="0B1F3A"/>
-                </a:solidFill>
-                <a:latin typeface="Segoe UI"/>
-              </a:rPr>
-              <a:t>LAUNCH frees stale ports </a:t>
-            </a:r>
-            <a:r>
-              <a:rPr sz="1700" b="0">
-                <a:solidFill>
-                  <a:srgbClr val="4C596B"/>
-                </a:solidFill>
-                <a:latin typeface="Segoe UI"/>
-              </a:rPr>
-              <a:t>9234 / 9230 / 5173 before starting</a:t>
-            </a:r>
-          </a:p>
-        </p:txBody>
-      </p:sp>
-      <p:sp>
-        <p:nvSpPr>
-          <p:cNvPr id="7" name="Rounded Rectangle 6">
-            <a:hlinkClick r:id="rId2"/>
-          </p:cNvPr>
-          <p:cNvSpPr/>
-          <p:nvPr/>
-        </p:nvSpPr>
-        <p:spPr>
-          <a:xfrm>
-            <a:off x="7863840" y="1645920"/>
-            <a:ext cx="3749039" cy="868680"/>
-          </a:xfrm>
-          <a:prstGeom prst="roundRect">
-            <a:avLst/>
-          </a:prstGeom>
-          <a:solidFill>
-            <a:srgbClr val="1FA855"/>
-          </a:solidFill>
-          <a:ln>
-            <a:noFill/>
-          </a:ln>
-          <a:effectLst/>
-        </p:spPr>
-        <p:style>
-          <a:lnRef idx="1">
-            <a:schemeClr val="accent1"/>
-          </a:lnRef>
-          <a:fillRef idx="3">
-            <a:schemeClr val="accent1"/>
-          </a:fillRef>
-          <a:effectRef idx="2">
-            <a:schemeClr val="accent1"/>
-          </a:effectRef>
-          <a:fontRef idx="minor">
-            <a:schemeClr val="lt1"/>
-          </a:fontRef>
-        </p:style>
-        <p:txBody>
-          <a:bodyPr rtlCol="0" anchor="ctr" wrap="square"/>
-          <a:lstStyle/>
-          <a:p>
-            <a:pPr algn="ctr"/>
-            <a:r>
-              <a:rPr sz="1800" b="1">
-                <a:solidFill>
-                  <a:srgbClr val="FFFFFF"/>
-                </a:solidFill>
-              </a:rPr>
-              <a:t>▶  INSTALL.bat</a:t>
-            </a:r>
-          </a:p>
-          <a:p>
-            <a:pPr algn="ctr"/>
-            <a:r>
-              <a:rPr sz="1000">
-                <a:solidFill>
-                  <a:srgbClr val="E8FFF0"/>
-                </a:solidFill>
-              </a:rPr>
-              <a:t>click · repo root</a:t>
-            </a:r>
-          </a:p>
-        </p:txBody>
-      </p:sp>
-      <p:sp>
-        <p:nvSpPr>
-          <p:cNvPr id="8" name="Rounded Rectangle 7">
-            <a:hlinkClick r:id="rId3"/>
-          </p:cNvPr>
-          <p:cNvSpPr/>
-          <p:nvPr/>
-        </p:nvSpPr>
-        <p:spPr>
-          <a:xfrm>
-            <a:off x="7863840" y="2743200"/>
-            <a:ext cx="3749039" cy="868680"/>
-          </a:xfrm>
-          <a:prstGeom prst="roundRect">
-            <a:avLst/>
-          </a:prstGeom>
-          <a:solidFill>
-            <a:srgbClr val="1E6FE0"/>
-          </a:solidFill>
-          <a:ln>
-            <a:noFill/>
-          </a:ln>
-          <a:effectLst/>
-        </p:spPr>
-        <p:style>
-          <a:lnRef idx="1">
-            <a:schemeClr val="accent1"/>
-          </a:lnRef>
-          <a:fillRef idx="3">
-            <a:schemeClr val="accent1"/>
-          </a:fillRef>
-          <a:effectRef idx="2">
-            <a:schemeClr val="accent1"/>
-          </a:effectRef>
-          <a:fontRef idx="minor">
-            <a:schemeClr val="lt1"/>
-          </a:fontRef>
-        </p:style>
-        <p:txBody>
-          <a:bodyPr rtlCol="0" anchor="ctr" wrap="square"/>
-          <a:lstStyle/>
-          <a:p>
-            <a:pPr algn="ctr"/>
-            <a:r>
-              <a:rPr sz="1800" b="1">
-                <a:solidFill>
-                  <a:srgbClr val="FFFFFF"/>
-                </a:solidFill>
-              </a:rPr>
-              <a:t>▶  LAUNCH-WEB.bat</a:t>
-            </a:r>
-          </a:p>
-          <a:p>
-            <a:pPr algn="ctr"/>
-            <a:r>
-              <a:rPr sz="1000">
-                <a:solidFill>
-                  <a:srgbClr val="E8FFF0"/>
-                </a:solidFill>
-              </a:rPr>
-              <a:t>click · accomplish-react_</a:t>
-            </a:r>
-          </a:p>
-        </p:txBody>
-      </p:sp>
-      <p:sp>
-        <p:nvSpPr>
-          <p:cNvPr id="9" name="TextBox 8"/>
-          <p:cNvSpPr txBox="1"/>
-          <p:nvPr/>
-        </p:nvSpPr>
-        <p:spPr>
-          <a:xfrm>
-            <a:off x="7863840" y="3703320"/>
-            <a:ext cx="3749039" cy="548640"/>
-          </a:xfrm>
-          <a:prstGeom prst="rect">
-            <a:avLst/>
-          </a:prstGeom>
-          <a:noFill/>
-        </p:spPr>
-        <p:txBody>
-          <a:bodyPr wrap="square" anchor="t">
-            <a:spAutoFit/>
-          </a:bodyPr>
-          <a:lstStyle/>
-          <a:p>
-            <a:pPr algn="ctr">
-              <a:spcAft>
-                <a:spcPts val="600"/>
-              </a:spcAft>
-            </a:pPr>
-            <a:r>
-              <a:rPr sz="1100" b="0">
-                <a:solidFill>
-                  <a:srgbClr val="4C596B"/>
-                </a:solidFill>
-                <a:latin typeface="Segoe UI"/>
-              </a:rPr>
-              <a:t>Buttons open the .bat files directly.</a:t>
+              <a:t>Bearer key · loopback-only · opt-in flag</a:t>
             </a:r>
           </a:p>
         </p:txBody>
@@ -6056,7 +5852,7 @@
                 </a:solidFill>
                 <a:latin typeface="Segoe UI"/>
               </a:rPr>
-              <a:t>NEW · BUG FIXES</a:t>
+              <a:t>NEW · ONE-CLICK SETUP</a:t>
             </a:r>
           </a:p>
         </p:txBody>
@@ -6095,7 +5891,7 @@
                 </a:solidFill>
                 <a:latin typeface="Segoe UI"/>
               </a:rPr>
-              <a:t>Latest fixes</a:t>
+              <a:t>Install &amp; launch on any Windows laptop</a:t>
             </a:r>
           </a:p>
         </p:txBody>
@@ -6108,8 +5904,8 @@
         </p:nvSpPr>
         <p:spPr>
           <a:xfrm>
-            <a:off x="731520" y="1371600"/>
-            <a:ext cx="10789920" cy="5029200"/>
+            <a:off x="731520" y="1417320"/>
+            <a:ext cx="6949440" cy="5029200"/>
           </a:xfrm>
           <a:prstGeom prst="rect">
             <a:avLst/>
@@ -6128,7 +5924,7 @@
               </a:spcAft>
             </a:pPr>
             <a:r>
-              <a:rPr sz="1400" b="1">
+              <a:rPr sz="1700" b="1">
                 <a:solidFill>
                   <a:srgbClr val="1E6FE0"/>
                 </a:solidFill>
@@ -6137,22 +5933,22 @@
               <a:t>•  </a:t>
             </a:r>
             <a:r>
-              <a:rPr sz="1400" b="1">
+              <a:rPr sz="1700" b="1">
                 <a:solidFill>
                   <a:srgbClr val="0B1F3A"/>
                 </a:solidFill>
                 <a:latin typeface="Segoe UI"/>
               </a:rPr>
-              <a:t>Daemon crash </a:t>
-            </a:r>
-            <a:r>
-              <a:rPr sz="1400" b="0">
+              <a:t>Self-contained </a:t>
+            </a:r>
+            <a:r>
+              <a:rPr sz="1700" b="0">
                 <a:solidFill>
                   <a:srgbClr val="4C596B"/>
                 </a:solidFill>
                 <a:latin typeface="Segoe UI"/>
               </a:rPr>
-              <a:t>— better-sqlite3 built for the wrong Node (NODE_MODULE_VERSION 127 vs 137); rebuilt for Node 24 → no more 'Failed to fetch'</a:t>
+              <a:t>— bundled Node 24.15.0, no Node/winget needed</a:t>
             </a:r>
           </a:p>
           <a:p>
@@ -6162,7 +5958,7 @@
               </a:spcAft>
             </a:pPr>
             <a:r>
-              <a:rPr sz="1400" b="1">
+              <a:rPr sz="1700" b="1">
                 <a:solidFill>
                   <a:srgbClr val="1E6FE0"/>
                 </a:solidFill>
@@ -6171,22 +5967,22 @@
               <a:t>•  </a:t>
             </a:r>
             <a:r>
-              <a:rPr sz="1400" b="1">
+              <a:rPr sz="1700" b="1">
                 <a:solidFill>
                   <a:srgbClr val="0B1F3A"/>
                 </a:solidFill>
                 <a:latin typeface="Segoe UI"/>
               </a:rPr>
-              <a:t>WhatsApp QR </a:t>
-            </a:r>
-            <a:r>
-              <a:rPr sz="1400" b="0">
+              <a:t>Auto-unblock </a:t>
+            </a:r>
+            <a:r>
+              <a:rPr sz="1700" b="0">
                 <a:solidFill>
                   <a:srgbClr val="4C596B"/>
                 </a:solidFill>
                 <a:latin typeface="Segoe UI"/>
               </a:rPr>
-              <a:t>— web SSE endpoint 404'd the EventSource ?token= form, killing all live events; route + client event-map fixed → QR + status work</a:t>
+              <a:t>— handles ZIP/USB/download 'blocked file' flag</a:t>
             </a:r>
           </a:p>
           <a:p>
@@ -6196,7 +5992,7 @@
               </a:spcAft>
             </a:pPr>
             <a:r>
-              <a:rPr sz="1400" b="1">
+              <a:rPr sz="1700" b="1">
                 <a:solidFill>
                   <a:srgbClr val="1E6FE0"/>
                 </a:solidFill>
@@ -6205,22 +6001,22 @@
               <a:t>•  </a:t>
             </a:r>
             <a:r>
-              <a:rPr sz="1400" b="1">
+              <a:rPr sz="1700" b="1">
                 <a:solidFill>
                   <a:srgbClr val="0B1F3A"/>
                 </a:solidFill>
                 <a:latin typeface="Segoe UI"/>
               </a:rPr>
-              <a:t>Docker </a:t>
-            </a:r>
-            <a:r>
-              <a:rPr sz="1400" b="0">
+              <a:t>Clean reinstall </a:t>
+            </a:r>
+            <a:r>
+              <a:rPr sz="1700" b="0">
                 <a:solidFill>
                   <a:srgbClr val="4C596B"/>
                 </a:solidFill>
                 <a:latin typeface="Segoe UI"/>
               </a:rPr>
-              <a:t>— daemon now binds HOST (0.0.0.0) so it's reachable from the host; image builds from source under Node 24</a:t>
+              <a:t>+ rebuilds better-sqlite3 for Node 24</a:t>
             </a:r>
           </a:p>
           <a:p>
@@ -6230,7 +6026,7 @@
               </a:spcAft>
             </a:pPr>
             <a:r>
-              <a:rPr sz="1400" b="1">
+              <a:rPr sz="1700" b="1">
                 <a:solidFill>
                   <a:srgbClr val="1E6FE0"/>
                 </a:solidFill>
@@ -6239,22 +6035,191 @@
               <a:t>•  </a:t>
             </a:r>
             <a:r>
-              <a:rPr sz="1400" b="1">
+              <a:rPr sz="1700" b="1">
                 <a:solidFill>
                   <a:srgbClr val="0B1F3A"/>
                 </a:solidFill>
                 <a:latin typeface="Segoe UI"/>
               </a:rPr>
-              <a:t>Launcher </a:t>
-            </a:r>
-            <a:r>
-              <a:rPr sz="1400" b="0">
+              <a:t>LAUNCH frees stale ports </a:t>
+            </a:r>
+            <a:r>
+              <a:rPr sz="1700" b="0">
                 <a:solidFill>
                   <a:srgbClr val="4C596B"/>
                 </a:solidFill>
                 <a:latin typeface="Segoe UI"/>
               </a:rPr>
-              <a:t>— CRLF endings, bundled Node 24, dev test-login forced on</a:t>
+              <a:t>9234 / 9230 / 5173 before starting</a:t>
+            </a:r>
+          </a:p>
+        </p:txBody>
+      </p:sp>
+      <p:sp>
+        <p:nvSpPr>
+          <p:cNvPr id="7" name="Rounded Rectangle 6">
+            <a:hlinkClick r:id="rId2"/>
+          </p:cNvPr>
+          <p:cNvSpPr/>
+          <p:nvPr/>
+        </p:nvSpPr>
+        <p:spPr>
+          <a:xfrm>
+            <a:off x="7863840" y="1645920"/>
+            <a:ext cx="3749039" cy="868680"/>
+          </a:xfrm>
+          <a:prstGeom prst="roundRect">
+            <a:avLst/>
+          </a:prstGeom>
+          <a:solidFill>
+            <a:srgbClr val="1FA855"/>
+          </a:solidFill>
+          <a:ln>
+            <a:noFill/>
+          </a:ln>
+          <a:effectLst/>
+        </p:spPr>
+        <p:style>
+          <a:lnRef idx="1">
+            <a:schemeClr val="accent1"/>
+          </a:lnRef>
+          <a:fillRef idx="3">
+            <a:schemeClr val="accent1"/>
+          </a:fillRef>
+          <a:effectRef idx="2">
+            <a:schemeClr val="accent1"/>
+          </a:effectRef>
+          <a:fontRef idx="minor">
+            <a:schemeClr val="lt1"/>
+          </a:fontRef>
+        </p:style>
+        <p:txBody>
+          <a:bodyPr rtlCol="0" anchor="ctr" wrap="square"/>
+          <a:lstStyle/>
+          <a:p>
+            <a:pPr algn="ctr"/>
+            <a:r>
+              <a:rPr sz="1800" b="1">
+                <a:solidFill>
+                  <a:srgbClr val="FFFFFF"/>
+                </a:solidFill>
+              </a:rPr>
+              <a:t>▶  INSTALL.bat</a:t>
+            </a:r>
+          </a:p>
+          <a:p>
+            <a:pPr algn="ctr"/>
+            <a:r>
+              <a:rPr sz="1000">
+                <a:solidFill>
+                  <a:srgbClr val="E8FFF0"/>
+                </a:solidFill>
+              </a:rPr>
+              <a:t>click · repo root</a:t>
+            </a:r>
+          </a:p>
+        </p:txBody>
+      </p:sp>
+      <p:sp>
+        <p:nvSpPr>
+          <p:cNvPr id="8" name="Rounded Rectangle 7">
+            <a:hlinkClick r:id="rId3"/>
+          </p:cNvPr>
+          <p:cNvSpPr/>
+          <p:nvPr/>
+        </p:nvSpPr>
+        <p:spPr>
+          <a:xfrm>
+            <a:off x="7863840" y="2743200"/>
+            <a:ext cx="3749039" cy="868680"/>
+          </a:xfrm>
+          <a:prstGeom prst="roundRect">
+            <a:avLst/>
+          </a:prstGeom>
+          <a:solidFill>
+            <a:srgbClr val="1E6FE0"/>
+          </a:solidFill>
+          <a:ln>
+            <a:noFill/>
+          </a:ln>
+          <a:effectLst/>
+        </p:spPr>
+        <p:style>
+          <a:lnRef idx="1">
+            <a:schemeClr val="accent1"/>
+          </a:lnRef>
+          <a:fillRef idx="3">
+            <a:schemeClr val="accent1"/>
+          </a:fillRef>
+          <a:effectRef idx="2">
+            <a:schemeClr val="accent1"/>
+          </a:effectRef>
+          <a:fontRef idx="minor">
+            <a:schemeClr val="lt1"/>
+          </a:fontRef>
+        </p:style>
+        <p:txBody>
+          <a:bodyPr rtlCol="0" anchor="ctr" wrap="square"/>
+          <a:lstStyle/>
+          <a:p>
+            <a:pPr algn="ctr"/>
+            <a:r>
+              <a:rPr sz="1800" b="1">
+                <a:solidFill>
+                  <a:srgbClr val="FFFFFF"/>
+                </a:solidFill>
+              </a:rPr>
+              <a:t>▶  LAUNCH-WEB.bat</a:t>
+            </a:r>
+          </a:p>
+          <a:p>
+            <a:pPr algn="ctr"/>
+            <a:r>
+              <a:rPr sz="1000">
+                <a:solidFill>
+                  <a:srgbClr val="E8FFF0"/>
+                </a:solidFill>
+              </a:rPr>
+              <a:t>click · accomplish-react_</a:t>
+            </a:r>
+          </a:p>
+        </p:txBody>
+      </p:sp>
+      <p:sp>
+        <p:nvSpPr>
+          <p:cNvPr id="9" name="TextBox 8"/>
+          <p:cNvSpPr txBox="1"/>
+          <p:nvPr/>
+        </p:nvSpPr>
+        <p:spPr>
+          <a:xfrm>
+            <a:off x="7863840" y="3703320"/>
+            <a:ext cx="3749039" cy="548640"/>
+          </a:xfrm>
+          <a:prstGeom prst="rect">
+            <a:avLst/>
+          </a:prstGeom>
+          <a:noFill/>
+        </p:spPr>
+        <p:txBody>
+          <a:bodyPr wrap="square" anchor="t">
+            <a:spAutoFit/>
+          </a:bodyPr>
+          <a:lstStyle/>
+          <a:p>
+            <a:pPr algn="ctr">
+              <a:spcAft>
+                <a:spcPts val="600"/>
+              </a:spcAft>
+            </a:pPr>
+            <a:r>
+              <a:rPr sz="1100" b="0">
+                <a:solidFill>
+                  <a:srgbClr val="4C596B"/>
+                </a:solidFill>
+                <a:latin typeface="Segoe UI"/>
+              </a:rPr>
+              <a:t>Buttons open the .bat files directly.</a:t>
             </a:r>
           </a:p>
         </p:txBody>
@@ -6407,7 +6372,7 @@
                 </a:solidFill>
                 <a:latin typeface="Segoe UI"/>
               </a:rPr>
-              <a:t>RUN IT</a:t>
+              <a:t>NEW · FIXES &amp; FEATURES</a:t>
             </a:r>
           </a:p>
         </p:txBody>
@@ -6446,7 +6411,7 @@
                 </a:solidFill>
                 <a:latin typeface="Segoe UI"/>
               </a:rPr>
-              <a:t>Two ways</a:t>
+              <a:t>Latest work</a:t>
             </a:r>
           </a:p>
         </p:txBody>
@@ -6459,8 +6424,8 @@
         </p:nvSpPr>
         <p:spPr>
           <a:xfrm>
-            <a:off x="640080" y="1325880"/>
-            <a:ext cx="10972800" cy="365760"/>
+            <a:off x="731520" y="1371600"/>
+            <a:ext cx="10789920" cy="5029200"/>
           </a:xfrm>
           <a:prstGeom prst="rect">
             <a:avLst/>
@@ -6475,309 +6440,171 @@
           <a:p>
             <a:pPr algn="l">
               <a:spcAft>
-                <a:spcPts val="600"/>
-              </a:spcAft>
-            </a:pPr>
-            <a:r>
-              <a:rPr sz="1600" b="1">
+                <a:spcPts val="900"/>
+              </a:spcAft>
+            </a:pPr>
+            <a:r>
+              <a:rPr sz="1400" b="1">
+                <a:solidFill>
+                  <a:srgbClr val="1E6FE0"/>
+                </a:solidFill>
+                <a:latin typeface="Segoe UI"/>
+              </a:rPr>
+              <a:t>•  </a:t>
+            </a:r>
+            <a:r>
+              <a:rPr sz="1400" b="1">
                 <a:solidFill>
                   <a:srgbClr val="0B1F3A"/>
                 </a:solidFill>
                 <a:latin typeface="Segoe UI"/>
               </a:rPr>
-              <a:t>Windows (recommended)</a:t>
-            </a:r>
-          </a:p>
-        </p:txBody>
-      </p:sp>
-      <p:sp>
-        <p:nvSpPr>
-          <p:cNvPr id="7" name="Rounded Rectangle 6"/>
-          <p:cNvSpPr/>
-          <p:nvPr/>
-        </p:nvSpPr>
-        <p:spPr>
-          <a:xfrm>
-            <a:off x="640080" y="1783080"/>
-            <a:ext cx="10881360" cy="1371600"/>
-          </a:xfrm>
-          <a:prstGeom prst="roundRect">
-            <a:avLst/>
-          </a:prstGeom>
-          <a:solidFill>
-            <a:srgbClr val="122A4A"/>
-          </a:solidFill>
-          <a:ln>
-            <a:noFill/>
-          </a:ln>
-          <a:effectLst/>
-        </p:spPr>
-        <p:style>
-          <a:lnRef idx="1">
-            <a:schemeClr val="accent1"/>
-          </a:lnRef>
-          <a:fillRef idx="3">
-            <a:schemeClr val="accent1"/>
-          </a:fillRef>
-          <a:effectRef idx="2">
-            <a:schemeClr val="accent1"/>
-          </a:effectRef>
-          <a:fontRef idx="minor">
-            <a:schemeClr val="lt1"/>
-          </a:fontRef>
-        </p:style>
-        <p:txBody>
-          <a:bodyPr rtlCol="0" anchor="ctr"/>
-          <a:lstStyle/>
-          <a:p>
-            <a:pPr algn="ctr"/>
-          </a:p>
-        </p:txBody>
-      </p:sp>
-      <p:sp>
-        <p:nvSpPr>
-          <p:cNvPr id="8" name="TextBox 7"/>
-          <p:cNvSpPr txBox="1"/>
-          <p:nvPr/>
-        </p:nvSpPr>
-        <p:spPr>
-          <a:xfrm>
-            <a:off x="822960" y="1892808"/>
-            <a:ext cx="10515600" cy="1188720"/>
-          </a:xfrm>
-          <a:prstGeom prst="rect">
-            <a:avLst/>
-          </a:prstGeom>
-          <a:noFill/>
-        </p:spPr>
-        <p:txBody>
-          <a:bodyPr wrap="square" anchor="t">
-            <a:spAutoFit/>
-          </a:bodyPr>
-          <a:lstStyle/>
-          <a:p>
-            <a:pPr algn="l">
-              <a:spcAft>
-                <a:spcPts val="200"/>
-              </a:spcAft>
-            </a:pPr>
-            <a:r>
-              <a:rPr sz="1500" b="0">
-                <a:solidFill>
-                  <a:srgbClr val="CFE3FF"/>
-                </a:solidFill>
-                <a:latin typeface="Consolas"/>
-              </a:rPr>
-              <a:t>git clone https://github.com/solutionsDigibull/SRIM-by_Digibull.git</a:t>
-            </a:r>
-          </a:p>
-          <a:p>
-            <a:pPr algn="l">
-              <a:spcAft>
-                <a:spcPts val="200"/>
-              </a:spcAft>
-            </a:pPr>
-            <a:r>
-              <a:rPr sz="1500" b="0">
-                <a:solidFill>
-                  <a:srgbClr val="CFE3FF"/>
-                </a:solidFill>
-                <a:latin typeface="Consolas"/>
-              </a:rPr>
-              <a:t>cd SRIM-by_Digibull  &amp;&amp;  git lfs install  &amp;&amp;  git lfs pull</a:t>
-            </a:r>
-          </a:p>
-          <a:p>
-            <a:pPr algn="l">
-              <a:spcAft>
-                <a:spcPts val="200"/>
-              </a:spcAft>
-            </a:pPr>
-            <a:r>
-              <a:rPr sz="1500" b="0">
-                <a:solidFill>
-                  <a:srgbClr val="CFE3FF"/>
-                </a:solidFill>
-                <a:latin typeface="Consolas"/>
-              </a:rPr>
-              <a:t>INSTALL.bat            then            LAUNCH-WEB.bat</a:t>
-            </a:r>
-          </a:p>
-        </p:txBody>
-      </p:sp>
-      <p:sp>
-        <p:nvSpPr>
-          <p:cNvPr id="9" name="TextBox 8"/>
-          <p:cNvSpPr txBox="1"/>
-          <p:nvPr/>
-        </p:nvSpPr>
-        <p:spPr>
-          <a:xfrm>
-            <a:off x="640080" y="3355848"/>
-            <a:ext cx="10972800" cy="365760"/>
-          </a:xfrm>
-          <a:prstGeom prst="rect">
-            <a:avLst/>
-          </a:prstGeom>
-          <a:noFill/>
-        </p:spPr>
-        <p:txBody>
-          <a:bodyPr wrap="square" anchor="t">
-            <a:spAutoFit/>
-          </a:bodyPr>
-          <a:lstStyle/>
-          <a:p>
-            <a:pPr algn="l">
-              <a:spcAft>
-                <a:spcPts val="600"/>
-              </a:spcAft>
-            </a:pPr>
-            <a:r>
-              <a:rPr sz="1600" b="1">
+              <a:t>Daemon crash fixed </a:t>
+            </a:r>
+            <a:r>
+              <a:rPr sz="1400" b="0">
+                <a:solidFill>
+                  <a:srgbClr val="4C596B"/>
+                </a:solidFill>
+                <a:latin typeface="Segoe UI"/>
+              </a:rPr>
+              <a:t>— better-sqlite3 rebuilt for Node 24 (NODE_MODULE_VERSION); no more 'Failed to fetch'</a:t>
+            </a:r>
+          </a:p>
+          <a:p>
+            <a:pPr algn="l">
+              <a:spcAft>
+                <a:spcPts val="900"/>
+              </a:spcAft>
+            </a:pPr>
+            <a:r>
+              <a:rPr sz="1400" b="1">
+                <a:solidFill>
+                  <a:srgbClr val="1E6FE0"/>
+                </a:solidFill>
+                <a:latin typeface="Segoe UI"/>
+              </a:rPr>
+              <a:t>•  </a:t>
+            </a:r>
+            <a:r>
+              <a:rPr sz="1400" b="1">
                 <a:solidFill>
                   <a:srgbClr val="0B1F3A"/>
                 </a:solidFill>
                 <a:latin typeface="Segoe UI"/>
               </a:rPr>
-              <a:t>Docker (any OS)</a:t>
-            </a:r>
-          </a:p>
-        </p:txBody>
-      </p:sp>
-      <p:sp>
-        <p:nvSpPr>
-          <p:cNvPr id="10" name="Rounded Rectangle 9"/>
-          <p:cNvSpPr/>
-          <p:nvPr/>
-        </p:nvSpPr>
-        <p:spPr>
-          <a:xfrm>
-            <a:off x="640080" y="3794760"/>
-            <a:ext cx="10881360" cy="1005840"/>
-          </a:xfrm>
-          <a:prstGeom prst="roundRect">
-            <a:avLst/>
-          </a:prstGeom>
-          <a:solidFill>
-            <a:srgbClr val="122A4A"/>
-          </a:solidFill>
-          <a:ln>
-            <a:noFill/>
-          </a:ln>
-          <a:effectLst/>
-        </p:spPr>
-        <p:style>
-          <a:lnRef idx="1">
-            <a:schemeClr val="accent1"/>
-          </a:lnRef>
-          <a:fillRef idx="3">
-            <a:schemeClr val="accent1"/>
-          </a:fillRef>
-          <a:effectRef idx="2">
-            <a:schemeClr val="accent1"/>
-          </a:effectRef>
-          <a:fontRef idx="minor">
-            <a:schemeClr val="lt1"/>
-          </a:fontRef>
-        </p:style>
-        <p:txBody>
-          <a:bodyPr rtlCol="0" anchor="ctr"/>
-          <a:lstStyle/>
-          <a:p>
-            <a:pPr algn="ctr"/>
-          </a:p>
-        </p:txBody>
-      </p:sp>
-      <p:sp>
-        <p:nvSpPr>
-          <p:cNvPr id="11" name="TextBox 10"/>
-          <p:cNvSpPr txBox="1"/>
-          <p:nvPr/>
-        </p:nvSpPr>
-        <p:spPr>
-          <a:xfrm>
-            <a:off x="822960" y="3904488"/>
-            <a:ext cx="10515600" cy="822960"/>
-          </a:xfrm>
-          <a:prstGeom prst="rect">
-            <a:avLst/>
-          </a:prstGeom>
-          <a:noFill/>
-        </p:spPr>
-        <p:txBody>
-          <a:bodyPr wrap="square" anchor="t">
-            <a:spAutoFit/>
-          </a:bodyPr>
-          <a:lstStyle/>
-          <a:p>
-            <a:pPr algn="l">
-              <a:spcAft>
-                <a:spcPts val="200"/>
-              </a:spcAft>
-            </a:pPr>
-            <a:r>
-              <a:rPr sz="1500" b="0">
-                <a:solidFill>
-                  <a:srgbClr val="CFE3FF"/>
-                </a:solidFill>
-                <a:latin typeface="Consolas"/>
-              </a:rPr>
-              <a:t>docker compose up --build</a:t>
-            </a:r>
-          </a:p>
-          <a:p>
-            <a:pPr algn="l">
-              <a:spcAft>
-                <a:spcPts val="200"/>
-              </a:spcAft>
-            </a:pPr>
-            <a:r>
-              <a:rPr sz="1500" b="0">
-                <a:solidFill>
-                  <a:srgbClr val="CFE3FF"/>
-                </a:solidFill>
-                <a:latin typeface="Consolas"/>
-              </a:rPr>
-              <a:t># → http://localhost:5173</a:t>
-            </a:r>
-          </a:p>
-        </p:txBody>
-      </p:sp>
-      <p:sp>
-        <p:nvSpPr>
-          <p:cNvPr id="12" name="TextBox 11"/>
-          <p:cNvSpPr txBox="1"/>
-          <p:nvPr/>
-        </p:nvSpPr>
-        <p:spPr>
-          <a:xfrm>
-            <a:off x="640080" y="5943600"/>
-            <a:ext cx="10972800" cy="457200"/>
-          </a:xfrm>
-          <a:prstGeom prst="rect">
-            <a:avLst/>
-          </a:prstGeom>
-          <a:noFill/>
-        </p:spPr>
-        <p:txBody>
-          <a:bodyPr wrap="square" anchor="t">
-            <a:spAutoFit/>
-          </a:bodyPr>
-          <a:lstStyle/>
-          <a:p>
-            <a:pPr algn="l">
-              <a:spcAft>
-                <a:spcPts val="600"/>
-              </a:spcAft>
-            </a:pPr>
-            <a:r>
-              <a:rPr sz="1300" b="0">
+              <a:t>WhatsApp QR fixed </a:t>
+            </a:r>
+            <a:r>
+              <a:rPr sz="1400" b="0">
                 <a:solidFill>
                   <a:srgbClr val="4C596B"/>
                 </a:solidFill>
                 <a:latin typeface="Segoe UI"/>
               </a:rPr>
-              <a:t>Dev login: 'Sign in as Tester' · token srim-dev-token · digibull / srim-test-2026</a:t>
+              <a:t>— web SSE route + client event-map; QR + status now reach the UI</a:t>
+            </a:r>
+          </a:p>
+          <a:p>
+            <a:pPr algn="l">
+              <a:spcAft>
+                <a:spcPts val="900"/>
+              </a:spcAft>
+            </a:pPr>
+            <a:r>
+              <a:rPr sz="1400" b="1">
+                <a:solidFill>
+                  <a:srgbClr val="1E6FE0"/>
+                </a:solidFill>
+                <a:latin typeface="Segoe UI"/>
+              </a:rPr>
+              <a:t>•  </a:t>
+            </a:r>
+            <a:r>
+              <a:rPr sz="1400" b="1">
+                <a:solidFill>
+                  <a:srgbClr val="0B1F3A"/>
+                </a:solidFill>
+                <a:latin typeface="Segoe UI"/>
+              </a:rPr>
+              <a:t>Docker </a:t>
+            </a:r>
+            <a:r>
+              <a:rPr sz="1400" b="0">
+                <a:solidFill>
+                  <a:srgbClr val="4C596B"/>
+                </a:solidFill>
+                <a:latin typeface="Segoe UI"/>
+              </a:rPr>
+              <a:t>— daemon binds HOST; image builds from source on Node 24</a:t>
+            </a:r>
+          </a:p>
+          <a:p>
+            <a:pPr algn="l">
+              <a:spcAft>
+                <a:spcPts val="900"/>
+              </a:spcAft>
+            </a:pPr>
+            <a:r>
+              <a:rPr sz="1400" b="1">
+                <a:solidFill>
+                  <a:srgbClr val="1E6FE0"/>
+                </a:solidFill>
+                <a:latin typeface="Segoe UI"/>
+              </a:rPr>
+              <a:t>•  </a:t>
+            </a:r>
+            <a:r>
+              <a:rPr sz="1400" b="1">
+                <a:solidFill>
+                  <a:srgbClr val="0B1F3A"/>
+                </a:solidFill>
+                <a:latin typeface="Segoe UI"/>
+              </a:rPr>
+              <a:t>Ported to web/daemon </a:t>
+            </a:r>
+            <a:r>
+              <a:rPr sz="1400" b="0">
+                <a:solidFill>
+                  <a:srgbClr val="4C596B"/>
+                </a:solidFill>
+                <a:latin typeface="Segoe UI"/>
+              </a:rPr>
+              <a:t>— HuggingFace-local models, GitHub Copilot OAuth, Vertex gcloud, Ollama derived models</a:t>
+            </a:r>
+          </a:p>
+          <a:p>
+            <a:pPr algn="l">
+              <a:spcAft>
+                <a:spcPts val="900"/>
+              </a:spcAft>
+            </a:pPr>
+            <a:r>
+              <a:rPr sz="1400" b="1">
+                <a:solidFill>
+                  <a:srgbClr val="1E6FE0"/>
+                </a:solidFill>
+                <a:latin typeface="Segoe UI"/>
+              </a:rPr>
+              <a:t>•  </a:t>
+            </a:r>
+            <a:r>
+              <a:rPr sz="1400" b="1">
+                <a:solidFill>
+                  <a:srgbClr val="0B1F3A"/>
+                </a:solidFill>
+                <a:latin typeface="Segoe UI"/>
+              </a:rPr>
+              <a:t>Added </a:t>
+            </a:r>
+            <a:r>
+              <a:rPr sz="1400" b="0">
+                <a:solidFill>
+                  <a:srgbClr val="4C596B"/>
+                </a:solidFill>
+                <a:latin typeface="Segoe UI"/>
+              </a:rPr>
+              <a:t>— feature flags (migration v032), exportLogs, screenshot, a11y-tree capture</a:t>
             </a:r>
           </a:p>
         </p:txBody>
@@ -6930,7 +6757,7 @@
                 </a:solidFill>
                 <a:latin typeface="Segoe UI"/>
               </a:rPr>
-              <a:t>STATUS</a:t>
+              <a:t>RUN IT</a:t>
             </a:r>
           </a:p>
         </p:txBody>
@@ -6969,7 +6796,7 @@
                 </a:solidFill>
                 <a:latin typeface="Segoe UI"/>
               </a:rPr>
-              <a:t>Where it stands</a:t>
+              <a:t>Two ways</a:t>
             </a:r>
           </a:p>
         </p:txBody>
@@ -6982,8 +6809,8 @@
         </p:nvSpPr>
         <p:spPr>
           <a:xfrm>
-            <a:off x="731520" y="1371600"/>
-            <a:ext cx="10789920" cy="5029200"/>
+            <a:off x="640080" y="1325880"/>
+            <a:ext cx="10972800" cy="365760"/>
           </a:xfrm>
           <a:prstGeom prst="rect">
             <a:avLst/>
@@ -6998,135 +6825,309 @@
           <a:p>
             <a:pPr algn="l">
               <a:spcAft>
-                <a:spcPts val="900"/>
-              </a:spcAft>
-            </a:pPr>
-            <a:r>
-              <a:rPr sz="1700" b="1">
-                <a:solidFill>
-                  <a:srgbClr val="1E6FE0"/>
-                </a:solidFill>
-                <a:latin typeface="Segoe UI"/>
-              </a:rPr>
-              <a:t>•  </a:t>
-            </a:r>
-            <a:r>
-              <a:rPr sz="1700" b="0">
+                <a:spcPts val="600"/>
+              </a:spcAft>
+            </a:pPr>
+            <a:r>
+              <a:rPr sz="1600" b="1">
+                <a:solidFill>
+                  <a:srgbClr val="0B1F3A"/>
+                </a:solidFill>
+                <a:latin typeface="Segoe UI"/>
+              </a:rPr>
+              <a:t>Windows (recommended)</a:t>
+            </a:r>
+          </a:p>
+        </p:txBody>
+      </p:sp>
+      <p:sp>
+        <p:nvSpPr>
+          <p:cNvPr id="7" name="Rounded Rectangle 6"/>
+          <p:cNvSpPr/>
+          <p:nvPr/>
+        </p:nvSpPr>
+        <p:spPr>
+          <a:xfrm>
+            <a:off x="640080" y="1783080"/>
+            <a:ext cx="10881360" cy="1371600"/>
+          </a:xfrm>
+          <a:prstGeom prst="roundRect">
+            <a:avLst/>
+          </a:prstGeom>
+          <a:solidFill>
+            <a:srgbClr val="122A4A"/>
+          </a:solidFill>
+          <a:ln>
+            <a:noFill/>
+          </a:ln>
+          <a:effectLst/>
+        </p:spPr>
+        <p:style>
+          <a:lnRef idx="1">
+            <a:schemeClr val="accent1"/>
+          </a:lnRef>
+          <a:fillRef idx="3">
+            <a:schemeClr val="accent1"/>
+          </a:fillRef>
+          <a:effectRef idx="2">
+            <a:schemeClr val="accent1"/>
+          </a:effectRef>
+          <a:fontRef idx="minor">
+            <a:schemeClr val="lt1"/>
+          </a:fontRef>
+        </p:style>
+        <p:txBody>
+          <a:bodyPr rtlCol="0" anchor="ctr"/>
+          <a:lstStyle/>
+          <a:p>
+            <a:pPr algn="ctr"/>
+          </a:p>
+        </p:txBody>
+      </p:sp>
+      <p:sp>
+        <p:nvSpPr>
+          <p:cNvPr id="8" name="TextBox 7"/>
+          <p:cNvSpPr txBox="1"/>
+          <p:nvPr/>
+        </p:nvSpPr>
+        <p:spPr>
+          <a:xfrm>
+            <a:off x="822960" y="1892808"/>
+            <a:ext cx="10515600" cy="1188720"/>
+          </a:xfrm>
+          <a:prstGeom prst="rect">
+            <a:avLst/>
+          </a:prstGeom>
+          <a:noFill/>
+        </p:spPr>
+        <p:txBody>
+          <a:bodyPr wrap="square" anchor="t">
+            <a:spAutoFit/>
+          </a:bodyPr>
+          <a:lstStyle/>
+          <a:p>
+            <a:pPr algn="l">
+              <a:spcAft>
+                <a:spcPts val="200"/>
+              </a:spcAft>
+            </a:pPr>
+            <a:r>
+              <a:rPr sz="1500" b="0">
+                <a:solidFill>
+                  <a:srgbClr val="CFE3FF"/>
+                </a:solidFill>
+                <a:latin typeface="Consolas"/>
+              </a:rPr>
+              <a:t>git clone https://github.com/solutionsDigibull/SRIM-by_Digibull.git</a:t>
+            </a:r>
+          </a:p>
+          <a:p>
+            <a:pPr algn="l">
+              <a:spcAft>
+                <a:spcPts val="200"/>
+              </a:spcAft>
+            </a:pPr>
+            <a:r>
+              <a:rPr sz="1500" b="0">
+                <a:solidFill>
+                  <a:srgbClr val="CFE3FF"/>
+                </a:solidFill>
+                <a:latin typeface="Consolas"/>
+              </a:rPr>
+              <a:t>cd SRIM-by_Digibull  &amp;&amp;  git lfs install  &amp;&amp;  git lfs pull</a:t>
+            </a:r>
+          </a:p>
+          <a:p>
+            <a:pPr algn="l">
+              <a:spcAft>
+                <a:spcPts val="200"/>
+              </a:spcAft>
+            </a:pPr>
+            <a:r>
+              <a:rPr sz="1500" b="0">
+                <a:solidFill>
+                  <a:srgbClr val="CFE3FF"/>
+                </a:solidFill>
+                <a:latin typeface="Consolas"/>
+              </a:rPr>
+              <a:t>INSTALL.bat            then            LAUNCH-WEB.bat</a:t>
+            </a:r>
+          </a:p>
+        </p:txBody>
+      </p:sp>
+      <p:sp>
+        <p:nvSpPr>
+          <p:cNvPr id="9" name="TextBox 8"/>
+          <p:cNvSpPr txBox="1"/>
+          <p:nvPr/>
+        </p:nvSpPr>
+        <p:spPr>
+          <a:xfrm>
+            <a:off x="640080" y="3355848"/>
+            <a:ext cx="10972800" cy="365760"/>
+          </a:xfrm>
+          <a:prstGeom prst="rect">
+            <a:avLst/>
+          </a:prstGeom>
+          <a:noFill/>
+        </p:spPr>
+        <p:txBody>
+          <a:bodyPr wrap="square" anchor="t">
+            <a:spAutoFit/>
+          </a:bodyPr>
+          <a:lstStyle/>
+          <a:p>
+            <a:pPr algn="l">
+              <a:spcAft>
+                <a:spcPts val="600"/>
+              </a:spcAft>
+            </a:pPr>
+            <a:r>
+              <a:rPr sz="1600" b="1">
+                <a:solidFill>
+                  <a:srgbClr val="0B1F3A"/>
+                </a:solidFill>
+                <a:latin typeface="Segoe UI"/>
+              </a:rPr>
+              <a:t>Docker (any OS)</a:t>
+            </a:r>
+          </a:p>
+        </p:txBody>
+      </p:sp>
+      <p:sp>
+        <p:nvSpPr>
+          <p:cNvPr id="10" name="Rounded Rectangle 9"/>
+          <p:cNvSpPr/>
+          <p:nvPr/>
+        </p:nvSpPr>
+        <p:spPr>
+          <a:xfrm>
+            <a:off x="640080" y="3794760"/>
+            <a:ext cx="10881360" cy="1005840"/>
+          </a:xfrm>
+          <a:prstGeom prst="roundRect">
+            <a:avLst/>
+          </a:prstGeom>
+          <a:solidFill>
+            <a:srgbClr val="122A4A"/>
+          </a:solidFill>
+          <a:ln>
+            <a:noFill/>
+          </a:ln>
+          <a:effectLst/>
+        </p:spPr>
+        <p:style>
+          <a:lnRef idx="1">
+            <a:schemeClr val="accent1"/>
+          </a:lnRef>
+          <a:fillRef idx="3">
+            <a:schemeClr val="accent1"/>
+          </a:fillRef>
+          <a:effectRef idx="2">
+            <a:schemeClr val="accent1"/>
+          </a:effectRef>
+          <a:fontRef idx="minor">
+            <a:schemeClr val="lt1"/>
+          </a:fontRef>
+        </p:style>
+        <p:txBody>
+          <a:bodyPr rtlCol="0" anchor="ctr"/>
+          <a:lstStyle/>
+          <a:p>
+            <a:pPr algn="ctr"/>
+          </a:p>
+        </p:txBody>
+      </p:sp>
+      <p:sp>
+        <p:nvSpPr>
+          <p:cNvPr id="11" name="TextBox 10"/>
+          <p:cNvSpPr txBox="1"/>
+          <p:nvPr/>
+        </p:nvSpPr>
+        <p:spPr>
+          <a:xfrm>
+            <a:off x="822960" y="3904488"/>
+            <a:ext cx="10515600" cy="822960"/>
+          </a:xfrm>
+          <a:prstGeom prst="rect">
+            <a:avLst/>
+          </a:prstGeom>
+          <a:noFill/>
+        </p:spPr>
+        <p:txBody>
+          <a:bodyPr wrap="square" anchor="t">
+            <a:spAutoFit/>
+          </a:bodyPr>
+          <a:lstStyle/>
+          <a:p>
+            <a:pPr algn="l">
+              <a:spcAft>
+                <a:spcPts val="200"/>
+              </a:spcAft>
+            </a:pPr>
+            <a:r>
+              <a:rPr sz="1500" b="0">
+                <a:solidFill>
+                  <a:srgbClr val="CFE3FF"/>
+                </a:solidFill>
+                <a:latin typeface="Consolas"/>
+              </a:rPr>
+              <a:t>docker compose up --build</a:t>
+            </a:r>
+          </a:p>
+          <a:p>
+            <a:pPr algn="l">
+              <a:spcAft>
+                <a:spcPts val="200"/>
+              </a:spcAft>
+            </a:pPr>
+            <a:r>
+              <a:rPr sz="1500" b="0">
+                <a:solidFill>
+                  <a:srgbClr val="CFE3FF"/>
+                </a:solidFill>
+                <a:latin typeface="Consolas"/>
+              </a:rPr>
+              <a:t># → http://localhost:5173</a:t>
+            </a:r>
+          </a:p>
+        </p:txBody>
+      </p:sp>
+      <p:sp>
+        <p:nvSpPr>
+          <p:cNvPr id="12" name="TextBox 11"/>
+          <p:cNvSpPr txBox="1"/>
+          <p:nvPr/>
+        </p:nvSpPr>
+        <p:spPr>
+          <a:xfrm>
+            <a:off x="640080" y="5943600"/>
+            <a:ext cx="10972800" cy="457200"/>
+          </a:xfrm>
+          <a:prstGeom prst="rect">
+            <a:avLst/>
+          </a:prstGeom>
+          <a:noFill/>
+        </p:spPr>
+        <p:txBody>
+          <a:bodyPr wrap="square" anchor="t">
+            <a:spAutoFit/>
+          </a:bodyPr>
+          <a:lstStyle/>
+          <a:p>
+            <a:pPr algn="l">
+              <a:spcAft>
+                <a:spcPts val="600"/>
+              </a:spcAft>
+            </a:pPr>
+            <a:r>
+              <a:rPr sz="1300" b="0">
                 <a:solidFill>
                   <a:srgbClr val="4C596B"/>
                 </a:solidFill>
                 <a:latin typeface="Segoe UI"/>
               </a:rPr>
-              <a:t>Web build works end-to-end (providers connect, tasks run)</a:t>
-            </a:r>
-          </a:p>
-          <a:p>
-            <a:pPr algn="l">
-              <a:spcAft>
-                <a:spcPts val="900"/>
-              </a:spcAft>
-            </a:pPr>
-            <a:r>
-              <a:rPr sz="1700" b="1">
-                <a:solidFill>
-                  <a:srgbClr val="1E6FE0"/>
-                </a:solidFill>
-                <a:latin typeface="Segoe UI"/>
-              </a:rPr>
-              <a:t>•  </a:t>
-            </a:r>
-            <a:r>
-              <a:rPr sz="1700" b="0">
-                <a:solidFill>
-                  <a:srgbClr val="4C596B"/>
-                </a:solidFill>
-                <a:latin typeface="Segoe UI"/>
-              </a:rPr>
-              <a:t>DigiBull Auto + local-model UI verified</a:t>
-            </a:r>
-          </a:p>
-          <a:p>
-            <a:pPr algn="l">
-              <a:spcAft>
-                <a:spcPts val="900"/>
-              </a:spcAft>
-            </a:pPr>
-            <a:r>
-              <a:rPr sz="1700" b="1">
-                <a:solidFill>
-                  <a:srgbClr val="1E6FE0"/>
-                </a:solidFill>
-                <a:latin typeface="Segoe UI"/>
-              </a:rPr>
-              <a:t>•  </a:t>
-            </a:r>
-            <a:r>
-              <a:rPr sz="1700" b="0">
-                <a:solidFill>
-                  <a:srgbClr val="4C596B"/>
-                </a:solidFill>
-                <a:latin typeface="Segoe UI"/>
-              </a:rPr>
-              <a:t>WhatsApp connects &amp; shows QR; Docker reachable from host</a:t>
-            </a:r>
-          </a:p>
-          <a:p>
-            <a:pPr algn="l">
-              <a:spcAft>
-                <a:spcPts val="900"/>
-              </a:spcAft>
-            </a:pPr>
-            <a:r>
-              <a:rPr sz="1700" b="1">
-                <a:solidFill>
-                  <a:srgbClr val="1E6FE0"/>
-                </a:solidFill>
-                <a:latin typeface="Segoe UI"/>
-              </a:rPr>
-              <a:t>•  </a:t>
-            </a:r>
-            <a:r>
-              <a:rPr sz="1700" b="0">
-                <a:solidFill>
-                  <a:srgbClr val="4C596B"/>
-                </a:solidFill>
-                <a:latin typeface="Segoe UI"/>
-              </a:rPr>
-              <a:t>Setup automated via INSTALL.bat / LAUNCH-WEB.bat</a:t>
-            </a:r>
-          </a:p>
-          <a:p>
-            <a:pPr algn="l">
-              <a:spcAft>
-                <a:spcPts val="900"/>
-              </a:spcAft>
-            </a:pPr>
-            <a:r>
-              <a:rPr sz="1700" b="1">
-                <a:solidFill>
-                  <a:srgbClr val="1E6FE0"/>
-                </a:solidFill>
-                <a:latin typeface="Segoe UI"/>
-              </a:rPr>
-              <a:t>•  </a:t>
-            </a:r>
-            <a:r>
-              <a:rPr sz="1700" b="1">
-                <a:solidFill>
-                  <a:srgbClr val="0B1F3A"/>
-                </a:solidFill>
-                <a:latin typeface="Segoe UI"/>
-              </a:rPr>
-              <a:t>Roadmap: </a:t>
-            </a:r>
-            <a:r>
-              <a:rPr sz="1700" b="0">
-                <a:solidFill>
-                  <a:srgbClr val="4C596B"/>
-                </a:solidFill>
-                <a:latin typeface="Segoe UI"/>
-              </a:rPr>
-              <a:t>native subsystems, 0.4.14 source-only features</a:t>
+              <a:t>Dev login: 'Sign in as Tester' · token srim-dev-token · digibull / srim-test-2026</a:t>
             </a:r>
           </a:p>
         </p:txBody>
@@ -7496,6 +7497,355 @@
     <p:bg>
       <p:bgPr>
         <a:solidFill>
+          <a:srgbClr val="F4F7FB"/>
+        </a:solidFill>
+        <a:effectLst/>
+      </p:bgPr>
+    </p:bg>
+    <p:spTree>
+      <p:nvGrpSpPr>
+        <p:cNvPr id="1" name=""/>
+        <p:cNvGrpSpPr/>
+        <p:nvPr/>
+      </p:nvGrpSpPr>
+      <p:grpSpPr/>
+      <p:sp>
+        <p:nvSpPr>
+          <p:cNvPr id="2" name="Rectangle 1"/>
+          <p:cNvSpPr/>
+          <p:nvPr/>
+        </p:nvSpPr>
+        <p:spPr>
+          <a:xfrm>
+            <a:off x="0" y="0"/>
+            <a:ext cx="12191695" cy="1078992"/>
+          </a:xfrm>
+          <a:prstGeom prst="rect">
+            <a:avLst/>
+          </a:prstGeom>
+          <a:solidFill>
+            <a:srgbClr val="0B1F3A"/>
+          </a:solidFill>
+          <a:ln>
+            <a:noFill/>
+          </a:ln>
+          <a:effectLst/>
+        </p:spPr>
+        <p:style>
+          <a:lnRef idx="1">
+            <a:schemeClr val="accent1"/>
+          </a:lnRef>
+          <a:fillRef idx="3">
+            <a:schemeClr val="accent1"/>
+          </a:fillRef>
+          <a:effectRef idx="2">
+            <a:schemeClr val="accent1"/>
+          </a:effectRef>
+          <a:fontRef idx="minor">
+            <a:schemeClr val="lt1"/>
+          </a:fontRef>
+        </p:style>
+        <p:txBody>
+          <a:bodyPr rtlCol="0" anchor="ctr"/>
+          <a:lstStyle/>
+          <a:p>
+            <a:pPr algn="ctr"/>
+          </a:p>
+        </p:txBody>
+      </p:sp>
+      <p:sp>
+        <p:nvSpPr>
+          <p:cNvPr id="3" name="Rectangle 2"/>
+          <p:cNvSpPr/>
+          <p:nvPr/>
+        </p:nvSpPr>
+        <p:spPr>
+          <a:xfrm>
+            <a:off x="0" y="1078992"/>
+            <a:ext cx="12191695" cy="54864"/>
+          </a:xfrm>
+          <a:prstGeom prst="rect">
+            <a:avLst/>
+          </a:prstGeom>
+          <a:solidFill>
+            <a:srgbClr val="1E6FE0"/>
+          </a:solidFill>
+          <a:ln>
+            <a:noFill/>
+          </a:ln>
+          <a:effectLst/>
+        </p:spPr>
+        <p:style>
+          <a:lnRef idx="1">
+            <a:schemeClr val="accent1"/>
+          </a:lnRef>
+          <a:fillRef idx="3">
+            <a:schemeClr val="accent1"/>
+          </a:fillRef>
+          <a:effectRef idx="2">
+            <a:schemeClr val="accent1"/>
+          </a:effectRef>
+          <a:fontRef idx="minor">
+            <a:schemeClr val="lt1"/>
+          </a:fontRef>
+        </p:style>
+        <p:txBody>
+          <a:bodyPr rtlCol="0" anchor="ctr"/>
+          <a:lstStyle/>
+          <a:p>
+            <a:pPr algn="ctr"/>
+          </a:p>
+        </p:txBody>
+      </p:sp>
+      <p:sp>
+        <p:nvSpPr>
+          <p:cNvPr id="4" name="TextBox 3"/>
+          <p:cNvSpPr txBox="1"/>
+          <p:nvPr/>
+        </p:nvSpPr>
+        <p:spPr>
+          <a:xfrm>
+            <a:off x="548640" y="109728"/>
+            <a:ext cx="11064240" cy="384048"/>
+          </a:xfrm>
+          <a:prstGeom prst="rect">
+            <a:avLst/>
+          </a:prstGeom>
+          <a:noFill/>
+        </p:spPr>
+        <p:txBody>
+          <a:bodyPr wrap="square" anchor="ctr">
+            <a:spAutoFit/>
+          </a:bodyPr>
+          <a:lstStyle/>
+          <a:p>
+            <a:pPr algn="l">
+              <a:spcAft>
+                <a:spcPts val="600"/>
+              </a:spcAft>
+            </a:pPr>
+            <a:r>
+              <a:rPr sz="1200" b="1">
+                <a:solidFill>
+                  <a:srgbClr val="8FB6F0"/>
+                </a:solidFill>
+                <a:latin typeface="Segoe UI"/>
+              </a:rPr>
+              <a:t>STATUS</a:t>
+            </a:r>
+          </a:p>
+        </p:txBody>
+      </p:sp>
+      <p:sp>
+        <p:nvSpPr>
+          <p:cNvPr id="5" name="TextBox 4"/>
+          <p:cNvSpPr txBox="1"/>
+          <p:nvPr/>
+        </p:nvSpPr>
+        <p:spPr>
+          <a:xfrm>
+            <a:off x="548640" y="402336"/>
+            <a:ext cx="11064240" cy="603504"/>
+          </a:xfrm>
+          <a:prstGeom prst="rect">
+            <a:avLst/>
+          </a:prstGeom>
+          <a:noFill/>
+        </p:spPr>
+        <p:txBody>
+          <a:bodyPr wrap="square" anchor="ctr">
+            <a:spAutoFit/>
+          </a:bodyPr>
+          <a:lstStyle/>
+          <a:p>
+            <a:pPr algn="l">
+              <a:spcAft>
+                <a:spcPts val="600"/>
+              </a:spcAft>
+            </a:pPr>
+            <a:r>
+              <a:rPr sz="2700" b="1">
+                <a:solidFill>
+                  <a:srgbClr val="FFFFFF"/>
+                </a:solidFill>
+                <a:latin typeface="Segoe UI"/>
+              </a:rPr>
+              <a:t>Where it stands</a:t>
+            </a:r>
+          </a:p>
+        </p:txBody>
+      </p:sp>
+      <p:sp>
+        <p:nvSpPr>
+          <p:cNvPr id="6" name="TextBox 5"/>
+          <p:cNvSpPr txBox="1"/>
+          <p:nvPr/>
+        </p:nvSpPr>
+        <p:spPr>
+          <a:xfrm>
+            <a:off x="731520" y="1371600"/>
+            <a:ext cx="10789920" cy="5029200"/>
+          </a:xfrm>
+          <a:prstGeom prst="rect">
+            <a:avLst/>
+          </a:prstGeom>
+          <a:noFill/>
+        </p:spPr>
+        <p:txBody>
+          <a:bodyPr wrap="square" anchor="t">
+            <a:spAutoFit/>
+          </a:bodyPr>
+          <a:lstStyle/>
+          <a:p>
+            <a:pPr algn="l">
+              <a:spcAft>
+                <a:spcPts val="900"/>
+              </a:spcAft>
+            </a:pPr>
+            <a:r>
+              <a:rPr sz="1700" b="1">
+                <a:solidFill>
+                  <a:srgbClr val="1E6FE0"/>
+                </a:solidFill>
+                <a:latin typeface="Segoe UI"/>
+              </a:rPr>
+              <a:t>•  </a:t>
+            </a:r>
+            <a:r>
+              <a:rPr sz="1700" b="0">
+                <a:solidFill>
+                  <a:srgbClr val="4C596B"/>
+                </a:solidFill>
+                <a:latin typeface="Segoe UI"/>
+              </a:rPr>
+              <a:t>Web build works end-to-end (providers connect, tasks run)</a:t>
+            </a:r>
+          </a:p>
+          <a:p>
+            <a:pPr algn="l">
+              <a:spcAft>
+                <a:spcPts val="900"/>
+              </a:spcAft>
+            </a:pPr>
+            <a:r>
+              <a:rPr sz="1700" b="1">
+                <a:solidFill>
+                  <a:srgbClr val="1E6FE0"/>
+                </a:solidFill>
+                <a:latin typeface="Segoe UI"/>
+              </a:rPr>
+              <a:t>•  </a:t>
+            </a:r>
+            <a:r>
+              <a:rPr sz="1700" b="0">
+                <a:solidFill>
+                  <a:srgbClr val="4C596B"/>
+                </a:solidFill>
+                <a:latin typeface="Segoe UI"/>
+              </a:rPr>
+              <a:t>DigiBull Auto + local-model UI verified</a:t>
+            </a:r>
+          </a:p>
+          <a:p>
+            <a:pPr algn="l">
+              <a:spcAft>
+                <a:spcPts val="900"/>
+              </a:spcAft>
+            </a:pPr>
+            <a:r>
+              <a:rPr sz="1700" b="1">
+                <a:solidFill>
+                  <a:srgbClr val="1E6FE0"/>
+                </a:solidFill>
+                <a:latin typeface="Segoe UI"/>
+              </a:rPr>
+              <a:t>•  </a:t>
+            </a:r>
+            <a:r>
+              <a:rPr sz="1700" b="0">
+                <a:solidFill>
+                  <a:srgbClr val="4C596B"/>
+                </a:solidFill>
+                <a:latin typeface="Segoe UI"/>
+              </a:rPr>
+              <a:t>WhatsApp connects &amp; shows QR; Docker reachable from host</a:t>
+            </a:r>
+          </a:p>
+          <a:p>
+            <a:pPr algn="l">
+              <a:spcAft>
+                <a:spcPts val="900"/>
+              </a:spcAft>
+            </a:pPr>
+            <a:r>
+              <a:rPr sz="1700" b="1">
+                <a:solidFill>
+                  <a:srgbClr val="1E6FE0"/>
+                </a:solidFill>
+                <a:latin typeface="Segoe UI"/>
+              </a:rPr>
+              <a:t>•  </a:t>
+            </a:r>
+            <a:r>
+              <a:rPr sz="1700" b="0">
+                <a:solidFill>
+                  <a:srgbClr val="4C596B"/>
+                </a:solidFill>
+                <a:latin typeface="Segoe UI"/>
+              </a:rPr>
+              <a:t>Bucket A/B/C features ported; setup automated</a:t>
+            </a:r>
+          </a:p>
+          <a:p>
+            <a:pPr algn="l">
+              <a:spcAft>
+                <a:spcPts val="900"/>
+              </a:spcAft>
+            </a:pPr>
+            <a:r>
+              <a:rPr sz="1700" b="1">
+                <a:solidFill>
+                  <a:srgbClr val="1E6FE0"/>
+                </a:solidFill>
+                <a:latin typeface="Segoe UI"/>
+              </a:rPr>
+              <a:t>•  </a:t>
+            </a:r>
+            <a:r>
+              <a:rPr sz="1700" b="1">
+                <a:solidFill>
+                  <a:srgbClr val="0B1F3A"/>
+                </a:solidFill>
+                <a:latin typeface="Segoe UI"/>
+              </a:rPr>
+              <a:t>Roadmap: </a:t>
+            </a:r>
+            <a:r>
+              <a:rPr sz="1700" b="0">
+                <a:solidFill>
+                  <a:srgbClr val="4C596B"/>
+                </a:solidFill>
+                <a:latin typeface="Segoe UI"/>
+              </a:rPr>
+              <a:t>Browser Panel + llama.cpp (desktop-only), 0.4.14 source features</a:t>
+            </a:r>
+          </a:p>
+        </p:txBody>
+      </p:sp>
+    </p:spTree>
+  </p:cSld>
+  <p:clrMapOvr>
+    <a:masterClrMapping/>
+  </p:clrMapOvr>
+</p:sld>
+</file>
+
+<file path=ppt/slides/slide21.xml><?xml version="1.0" encoding="utf-8"?>
+<p:sld xmlns:a="http://schemas.openxmlformats.org/drawingml/2006/main" xmlns:p="http://schemas.openxmlformats.org/presentationml/2006/main" xmlns:r="http://schemas.openxmlformats.org/officeDocument/2006/relationships">
+  <p:cSld>
+    <p:bg>
+      <p:bgPr>
+        <a:solidFill>
           <a:srgbClr val="0B1F3A"/>
         </a:solidFill>
         <a:effectLst/>
@@ -7782,7 +8132,7 @@
                 </a:solidFill>
                 <a:latin typeface="Segoe UI"/>
               </a:rPr>
-              <a:t>ARCHITECTURE</a:t>
+              <a:t>HOW IT DIFFERS</a:t>
             </a:r>
           </a:p>
         </p:txBody>
@@ -7821,21 +8171,109 @@
                 </a:solidFill>
                 <a:latin typeface="Segoe UI"/>
               </a:rPr>
-              <a:t>Original (Electron)</a:t>
-            </a:r>
-          </a:p>
-        </p:txBody>
-      </p:sp>
-      <p:sp>
-        <p:nvSpPr>
-          <p:cNvPr id="6" name="TextBox 5"/>
+              <a:t>Upstream Accomplish  vs  DigiBull SRIM</a:t>
+            </a:r>
+          </a:p>
+        </p:txBody>
+      </p:sp>
+      <p:sp>
+        <p:nvSpPr>
+          <p:cNvPr id="6" name="Rounded Rectangle 5"/>
+          <p:cNvSpPr/>
+          <p:nvPr/>
+        </p:nvSpPr>
+        <p:spPr>
+          <a:xfrm>
+            <a:off x="640080" y="1417320"/>
+            <a:ext cx="5349240" cy="4937760"/>
+          </a:xfrm>
+          <a:prstGeom prst="roundRect">
+            <a:avLst/>
+          </a:prstGeom>
+          <a:solidFill>
+            <a:srgbClr val="E9EFF7"/>
+          </a:solidFill>
+          <a:ln>
+            <a:noFill/>
+          </a:ln>
+          <a:effectLst/>
+        </p:spPr>
+        <p:style>
+          <a:lnRef idx="1">
+            <a:schemeClr val="accent1"/>
+          </a:lnRef>
+          <a:fillRef idx="3">
+            <a:schemeClr val="accent1"/>
+          </a:fillRef>
+          <a:effectRef idx="2">
+            <a:schemeClr val="accent1"/>
+          </a:effectRef>
+          <a:fontRef idx="minor">
+            <a:schemeClr val="lt1"/>
+          </a:fontRef>
+        </p:style>
+        <p:txBody>
+          <a:bodyPr rtlCol="0" anchor="ctr"/>
+          <a:lstStyle/>
+          <a:p>
+            <a:pPr algn="ctr"/>
+          </a:p>
+        </p:txBody>
+      </p:sp>
+      <p:sp>
+        <p:nvSpPr>
+          <p:cNvPr id="7" name="Rounded Rectangle 6"/>
+          <p:cNvSpPr/>
+          <p:nvPr/>
+        </p:nvSpPr>
+        <p:spPr>
+          <a:xfrm>
+            <a:off x="640080" y="1417320"/>
+            <a:ext cx="5349240" cy="868680"/>
+          </a:xfrm>
+          <a:prstGeom prst="roundRect">
+            <a:avLst/>
+          </a:prstGeom>
+          <a:solidFill>
+            <a:srgbClr val="536070"/>
+          </a:solidFill>
+          <a:ln>
+            <a:noFill/>
+          </a:ln>
+          <a:effectLst/>
+        </p:spPr>
+        <p:style>
+          <a:lnRef idx="1">
+            <a:schemeClr val="accent1"/>
+          </a:lnRef>
+          <a:fillRef idx="3">
+            <a:schemeClr val="accent1"/>
+          </a:fillRef>
+          <a:effectRef idx="2">
+            <a:schemeClr val="accent1"/>
+          </a:effectRef>
+          <a:fontRef idx="minor">
+            <a:schemeClr val="lt1"/>
+          </a:fontRef>
+        </p:style>
+        <p:txBody>
+          <a:bodyPr rtlCol="0" anchor="ctr"/>
+          <a:lstStyle/>
+          <a:p>
+            <a:pPr algn="ctr"/>
+          </a:p>
+        </p:txBody>
+      </p:sp>
+      <p:sp>
+        <p:nvSpPr>
+          <p:cNvPr id="8" name="TextBox 7"/>
           <p:cNvSpPr txBox="1"/>
           <p:nvPr/>
         </p:nvSpPr>
         <p:spPr>
           <a:xfrm>
-            <a:off x="731520" y="1371600"/>
-            <a:ext cx="10789920" cy="5029200"/>
+            <a:off x="914400" y="1527048"/>
+            <a:ext cx="4800600" cy="731520"/>
           </a:xfrm>
           <a:prstGeom prst="rect">
             <a:avLst/>
@@ -7850,11 +8288,432 @@
           <a:p>
             <a:pPr algn="l">
               <a:spcAft>
-                <a:spcPts val="900"/>
-              </a:spcAft>
-            </a:pPr>
-            <a:r>
-              <a:rPr sz="1700" b="1">
+                <a:spcPts val="200"/>
+              </a:spcAft>
+            </a:pPr>
+            <a:r>
+              <a:rPr sz="1900" b="1">
+                <a:solidFill>
+                  <a:srgbClr val="FFFFFF"/>
+                </a:solidFill>
+                <a:latin typeface="Segoe UI"/>
+              </a:rPr>
+              <a:t>Upstream Accomplish</a:t>
+            </a:r>
+          </a:p>
+          <a:p>
+            <a:pPr algn="l">
+              <a:spcAft>
+                <a:spcPts val="200"/>
+              </a:spcAft>
+            </a:pPr>
+            <a:r>
+              <a:rPr sz="1100" b="0">
+                <a:solidFill>
+                  <a:srgbClr val="EAF0FF"/>
+                </a:solidFill>
+                <a:latin typeface="Segoe UI"/>
+              </a:rPr>
+              <a:t>github.com/accomplish-ai/accomplish · MIT</a:t>
+            </a:r>
+          </a:p>
+        </p:txBody>
+      </p:sp>
+      <p:sp>
+        <p:nvSpPr>
+          <p:cNvPr id="9" name="TextBox 8"/>
+          <p:cNvSpPr txBox="1"/>
+          <p:nvPr/>
+        </p:nvSpPr>
+        <p:spPr>
+          <a:xfrm>
+            <a:off x="914400" y="2423160"/>
+            <a:ext cx="4800600" cy="3794760"/>
+          </a:xfrm>
+          <a:prstGeom prst="rect">
+            <a:avLst/>
+          </a:prstGeom>
+          <a:noFill/>
+        </p:spPr>
+        <p:txBody>
+          <a:bodyPr wrap="square" anchor="t">
+            <a:spAutoFit/>
+          </a:bodyPr>
+          <a:lstStyle/>
+          <a:p>
+            <a:pPr algn="l">
+              <a:spcAft>
+                <a:spcPts val="700"/>
+              </a:spcAft>
+            </a:pPr>
+            <a:r>
+              <a:rPr sz="1400" b="1">
+                <a:solidFill>
+                  <a:srgbClr val="536070"/>
+                </a:solidFill>
+                <a:latin typeface="Segoe UI"/>
+              </a:rPr>
+              <a:t>•  </a:t>
+            </a:r>
+            <a:r>
+              <a:rPr sz="1400" b="0">
+                <a:solidFill>
+                  <a:srgbClr val="4C596B"/>
+                </a:solidFill>
+                <a:latin typeface="Segoe UI"/>
+              </a:rPr>
+              <a:t>Electron DESKTOP app (single native window)</a:t>
+            </a:r>
+          </a:p>
+          <a:p>
+            <a:pPr algn="l">
+              <a:spcAft>
+                <a:spcPts val="700"/>
+              </a:spcAft>
+            </a:pPr>
+            <a:r>
+              <a:rPr sz="1400" b="1">
+                <a:solidFill>
+                  <a:srgbClr val="536070"/>
+                </a:solidFill>
+                <a:latin typeface="Segoe UI"/>
+              </a:rPr>
+              <a:t>•  </a:t>
+            </a:r>
+            <a:r>
+              <a:rPr sz="1400" b="0">
+                <a:solidFill>
+                  <a:srgbClr val="4C596B"/>
+                </a:solidFill>
+                <a:latin typeface="Segoe UI"/>
+              </a:rPr>
+              <a:t>UI talks to backend via preload IPC bridge (~462 methods)</a:t>
+            </a:r>
+          </a:p>
+          <a:p>
+            <a:pPr algn="l">
+              <a:spcAft>
+                <a:spcPts val="700"/>
+              </a:spcAft>
+            </a:pPr>
+            <a:r>
+              <a:rPr sz="1400" b="1">
+                <a:solidFill>
+                  <a:srgbClr val="536070"/>
+                </a:solidFill>
+                <a:latin typeface="Segoe UI"/>
+              </a:rPr>
+              <a:t>•  </a:t>
+            </a:r>
+            <a:r>
+              <a:rPr sz="1400" b="0">
+                <a:solidFill>
+                  <a:srgbClr val="4C596B"/>
+                </a:solidFill>
+                <a:latin typeface="Segoe UI"/>
+              </a:rPr>
+              <a:t>Login: NetBird Personal Access Token only</a:t>
+            </a:r>
+          </a:p>
+          <a:p>
+            <a:pPr algn="l">
+              <a:spcAft>
+                <a:spcPts val="700"/>
+              </a:spcAft>
+            </a:pPr>
+            <a:r>
+              <a:rPr sz="1400" b="1">
+                <a:solidFill>
+                  <a:srgbClr val="536070"/>
+                </a:solidFill>
+                <a:latin typeface="Segoe UI"/>
+              </a:rPr>
+              <a:t>•  </a:t>
+            </a:r>
+            <a:r>
+              <a:rPr sz="1400" b="0">
+                <a:solidFill>
+                  <a:srgbClr val="4C596B"/>
+                </a:solidFill>
+                <a:latin typeface="Segoe UI"/>
+              </a:rPr>
+              <a:t>Ships as a desktop installer + auto-updater</a:t>
+            </a:r>
+          </a:p>
+          <a:p>
+            <a:pPr algn="l">
+              <a:spcAft>
+                <a:spcPts val="700"/>
+              </a:spcAft>
+            </a:pPr>
+            <a:r>
+              <a:rPr sz="1400" b="1">
+                <a:solidFill>
+                  <a:srgbClr val="536070"/>
+                </a:solidFill>
+                <a:latin typeface="Segoe UI"/>
+              </a:rPr>
+              <a:t>•  </a:t>
+            </a:r>
+            <a:r>
+              <a:rPr sz="1400" b="0">
+                <a:solidFill>
+                  <a:srgbClr val="4C596B"/>
+                </a:solidFill>
+                <a:latin typeface="Segoe UI"/>
+              </a:rPr>
+              <a:t>No WhatsApp channel</a:t>
+            </a:r>
+          </a:p>
+          <a:p>
+            <a:pPr algn="l">
+              <a:spcAft>
+                <a:spcPts val="700"/>
+              </a:spcAft>
+            </a:pPr>
+            <a:r>
+              <a:rPr sz="1400" b="1">
+                <a:solidFill>
+                  <a:srgbClr val="536070"/>
+                </a:solidFill>
+                <a:latin typeface="Segoe UI"/>
+              </a:rPr>
+              <a:t>•  </a:t>
+            </a:r>
+            <a:r>
+              <a:rPr sz="1400" b="0">
+                <a:solidFill>
+                  <a:srgbClr val="4C596B"/>
+                </a:solidFill>
+                <a:latin typeface="Segoe UI"/>
+              </a:rPr>
+              <a:t>Manual model selection</a:t>
+            </a:r>
+          </a:p>
+          <a:p>
+            <a:pPr algn="l">
+              <a:spcAft>
+                <a:spcPts val="700"/>
+              </a:spcAft>
+            </a:pPr>
+            <a:r>
+              <a:rPr sz="1400" b="1">
+                <a:solidFill>
+                  <a:srgbClr val="536070"/>
+                </a:solidFill>
+                <a:latin typeface="Segoe UI"/>
+              </a:rPr>
+              <a:t>•  </a:t>
+            </a:r>
+            <a:r>
+              <a:rPr sz="1400" b="0">
+                <a:solidFill>
+                  <a:srgbClr val="4C596B"/>
+                </a:solidFill>
+                <a:latin typeface="Segoe UI"/>
+              </a:rPr>
+              <a:t>Local models / providers are desktop-main only</a:t>
+            </a:r>
+          </a:p>
+          <a:p>
+            <a:pPr algn="l">
+              <a:spcAft>
+                <a:spcPts val="700"/>
+              </a:spcAft>
+            </a:pPr>
+            <a:r>
+              <a:rPr sz="1400" b="1">
+                <a:solidFill>
+                  <a:srgbClr val="536070"/>
+                </a:solidFill>
+                <a:latin typeface="Segoe UI"/>
+              </a:rPr>
+              <a:t>•  </a:t>
+            </a:r>
+            <a:r>
+              <a:rPr sz="1400" b="0">
+                <a:solidFill>
+                  <a:srgbClr val="4C596B"/>
+                </a:solidFill>
+                <a:latin typeface="Segoe UI"/>
+              </a:rPr>
+              <a:t>No one-click web setup</a:t>
+            </a:r>
+          </a:p>
+        </p:txBody>
+      </p:sp>
+      <p:sp>
+        <p:nvSpPr>
+          <p:cNvPr id="10" name="Rounded Rectangle 9"/>
+          <p:cNvSpPr/>
+          <p:nvPr/>
+        </p:nvSpPr>
+        <p:spPr>
+          <a:xfrm>
+            <a:off x="6217920" y="1417320"/>
+            <a:ext cx="5349240" cy="4937760"/>
+          </a:xfrm>
+          <a:prstGeom prst="roundRect">
+            <a:avLst/>
+          </a:prstGeom>
+          <a:solidFill>
+            <a:srgbClr val="E9EFF7"/>
+          </a:solidFill>
+          <a:ln>
+            <a:noFill/>
+          </a:ln>
+          <a:effectLst/>
+        </p:spPr>
+        <p:style>
+          <a:lnRef idx="1">
+            <a:schemeClr val="accent1"/>
+          </a:lnRef>
+          <a:fillRef idx="3">
+            <a:schemeClr val="accent1"/>
+          </a:fillRef>
+          <a:effectRef idx="2">
+            <a:schemeClr val="accent1"/>
+          </a:effectRef>
+          <a:fontRef idx="minor">
+            <a:schemeClr val="lt1"/>
+          </a:fontRef>
+        </p:style>
+        <p:txBody>
+          <a:bodyPr rtlCol="0" anchor="ctr"/>
+          <a:lstStyle/>
+          <a:p>
+            <a:pPr algn="ctr"/>
+          </a:p>
+        </p:txBody>
+      </p:sp>
+      <p:sp>
+        <p:nvSpPr>
+          <p:cNvPr id="11" name="Rounded Rectangle 10"/>
+          <p:cNvSpPr/>
+          <p:nvPr/>
+        </p:nvSpPr>
+        <p:spPr>
+          <a:xfrm>
+            <a:off x="6217920" y="1417320"/>
+            <a:ext cx="5349240" cy="868680"/>
+          </a:xfrm>
+          <a:prstGeom prst="roundRect">
+            <a:avLst/>
+          </a:prstGeom>
+          <a:solidFill>
+            <a:srgbClr val="1E6FE0"/>
+          </a:solidFill>
+          <a:ln>
+            <a:noFill/>
+          </a:ln>
+          <a:effectLst/>
+        </p:spPr>
+        <p:style>
+          <a:lnRef idx="1">
+            <a:schemeClr val="accent1"/>
+          </a:lnRef>
+          <a:fillRef idx="3">
+            <a:schemeClr val="accent1"/>
+          </a:fillRef>
+          <a:effectRef idx="2">
+            <a:schemeClr val="accent1"/>
+          </a:effectRef>
+          <a:fontRef idx="minor">
+            <a:schemeClr val="lt1"/>
+          </a:fontRef>
+        </p:style>
+        <p:txBody>
+          <a:bodyPr rtlCol="0" anchor="ctr"/>
+          <a:lstStyle/>
+          <a:p>
+            <a:pPr algn="ctr"/>
+          </a:p>
+        </p:txBody>
+      </p:sp>
+      <p:sp>
+        <p:nvSpPr>
+          <p:cNvPr id="12" name="TextBox 11"/>
+          <p:cNvSpPr txBox="1"/>
+          <p:nvPr/>
+        </p:nvSpPr>
+        <p:spPr>
+          <a:xfrm>
+            <a:off x="6492240" y="1527048"/>
+            <a:ext cx="4800600" cy="731520"/>
+          </a:xfrm>
+          <a:prstGeom prst="rect">
+            <a:avLst/>
+          </a:prstGeom>
+          <a:noFill/>
+        </p:spPr>
+        <p:txBody>
+          <a:bodyPr wrap="square" anchor="t">
+            <a:spAutoFit/>
+          </a:bodyPr>
+          <a:lstStyle/>
+          <a:p>
+            <a:pPr algn="l">
+              <a:spcAft>
+                <a:spcPts val="200"/>
+              </a:spcAft>
+            </a:pPr>
+            <a:r>
+              <a:rPr sz="1900" b="1">
+                <a:solidFill>
+                  <a:srgbClr val="FFFFFF"/>
+                </a:solidFill>
+                <a:latin typeface="Segoe UI"/>
+              </a:rPr>
+              <a:t>DigiBull SRIM (this app)</a:t>
+            </a:r>
+          </a:p>
+          <a:p>
+            <a:pPr algn="l">
+              <a:spcAft>
+                <a:spcPts val="200"/>
+              </a:spcAft>
+            </a:pPr>
+            <a:r>
+              <a:rPr sz="1100" b="0">
+                <a:solidFill>
+                  <a:srgbClr val="EAF0FF"/>
+                </a:solidFill>
+                <a:latin typeface="Segoe UI"/>
+              </a:rPr>
+              <a:t>web build + rebrand + extensions</a:t>
+            </a:r>
+          </a:p>
+        </p:txBody>
+      </p:sp>
+      <p:sp>
+        <p:nvSpPr>
+          <p:cNvPr id="13" name="TextBox 12"/>
+          <p:cNvSpPr txBox="1"/>
+          <p:nvPr/>
+        </p:nvSpPr>
+        <p:spPr>
+          <a:xfrm>
+            <a:off x="6492240" y="2423160"/>
+            <a:ext cx="4800600" cy="3794760"/>
+          </a:xfrm>
+          <a:prstGeom prst="rect">
+            <a:avLst/>
+          </a:prstGeom>
+          <a:noFill/>
+        </p:spPr>
+        <p:txBody>
+          <a:bodyPr wrap="square" anchor="t">
+            <a:spAutoFit/>
+          </a:bodyPr>
+          <a:lstStyle/>
+          <a:p>
+            <a:pPr algn="l">
+              <a:spcAft>
+                <a:spcPts val="700"/>
+              </a:spcAft>
+            </a:pPr>
+            <a:r>
+              <a:rPr sz="1400" b="1">
                 <a:solidFill>
                   <a:srgbClr val="1E6FE0"/>
                 </a:solidFill>
@@ -7863,23 +8722,23 @@
               <a:t>•  </a:t>
             </a:r>
             <a:r>
-              <a:rPr sz="1700" b="0">
+              <a:rPr sz="1400" b="0">
                 <a:solidFill>
                   <a:srgbClr val="4C596B"/>
                 </a:solidFill>
                 <a:latin typeface="Segoe UI"/>
               </a:rPr>
-              <a:t>React UI ↔ preload bridge (~462 methods)</a:t>
-            </a:r>
-          </a:p>
-          <a:p>
-            <a:pPr algn="l">
-              <a:spcAft>
-                <a:spcPts val="900"/>
-              </a:spcAft>
-            </a:pPr>
-            <a:r>
-              <a:rPr sz="1700" b="1">
+              <a:t>Local WEB app: browser tab :5173 + daemon :9234 (HTTP+SSE)</a:t>
+            </a:r>
+          </a:p>
+          <a:p>
+            <a:pPr algn="l">
+              <a:spcAft>
+                <a:spcPts val="700"/>
+              </a:spcAft>
+            </a:pPr>
+            <a:r>
+              <a:rPr sz="1400" b="1">
                 <a:solidFill>
                   <a:srgbClr val="1E6FE0"/>
                 </a:solidFill>
@@ -7888,23 +8747,23 @@
               <a:t>•  </a:t>
             </a:r>
             <a:r>
-              <a:rPr sz="1700" b="0">
+              <a:rPr sz="1400" b="0">
                 <a:solidFill>
                   <a:srgbClr val="4C596B"/>
                 </a:solidFill>
                 <a:latin typeface="Segoe UI"/>
               </a:rPr>
-              <a:t>Electron main → daemon (Node)</a:t>
-            </a:r>
-          </a:p>
-          <a:p>
-            <a:pPr algn="l">
-              <a:spcAft>
-                <a:spcPts val="900"/>
-              </a:spcAft>
-            </a:pPr>
-            <a:r>
-              <a:rPr sz="1700" b="1">
+              <a:t>window.accomplish recreated over HTTP/SSE (no Electron needed)</a:t>
+            </a:r>
+          </a:p>
+          <a:p>
+            <a:pPr algn="l">
+              <a:spcAft>
+                <a:spcPts val="700"/>
+              </a:spcAft>
+            </a:pPr>
+            <a:r>
+              <a:rPr sz="1400" b="1">
                 <a:solidFill>
                   <a:srgbClr val="1E6FE0"/>
                 </a:solidFill>
@@ -7913,23 +8772,23 @@
               <a:t>•  </a:t>
             </a:r>
             <a:r>
-              <a:rPr sz="1700" b="0">
+              <a:rPr sz="1400" b="0">
                 <a:solidFill>
                   <a:srgbClr val="4C596B"/>
                 </a:solidFill>
                 <a:latin typeface="Segoe UI"/>
               </a:rPr>
-              <a:t>Daemon: OpenCode + SQLite</a:t>
-            </a:r>
-          </a:p>
-          <a:p>
-            <a:pPr algn="l">
-              <a:spcAft>
-                <a:spcPts val="900"/>
-              </a:spcAft>
-            </a:pPr>
-            <a:r>
-              <a:rPr sz="1700" b="1">
+              <a:t>+ dev 'Sign in as Tester' bypass (srim-dev-token)</a:t>
+            </a:r>
+          </a:p>
+          <a:p>
+            <a:pPr algn="l">
+              <a:spcAft>
+                <a:spcPts val="700"/>
+              </a:spcAft>
+            </a:pPr>
+            <a:r>
+              <a:rPr sz="1400" b="1">
                 <a:solidFill>
                   <a:srgbClr val="1E6FE0"/>
                 </a:solidFill>
@@ -7938,13 +8797,113 @@
               <a:t>•  </a:t>
             </a:r>
             <a:r>
-              <a:rPr sz="1700" b="0">
+              <a:rPr sz="1400" b="0">
                 <a:solidFill>
                   <a:srgbClr val="4C596B"/>
                 </a:solidFill>
                 <a:latin typeface="Segoe UI"/>
               </a:rPr>
-              <a:t>UI was already browser-safe</a:t>
+              <a:t>DigiBull rebrand + motion/appearance polish</a:t>
+            </a:r>
+          </a:p>
+          <a:p>
+            <a:pPr algn="l">
+              <a:spcAft>
+                <a:spcPts val="700"/>
+              </a:spcAft>
+            </a:pPr>
+            <a:r>
+              <a:rPr sz="1400" b="1">
+                <a:solidFill>
+                  <a:srgbClr val="1E6FE0"/>
+                </a:solidFill>
+                <a:latin typeface="Segoe UI"/>
+              </a:rPr>
+              <a:t>•  </a:t>
+            </a:r>
+            <a:r>
+              <a:rPr sz="1400" b="0">
+                <a:solidFill>
+                  <a:srgbClr val="4C596B"/>
+                </a:solidFill>
+                <a:latin typeface="Segoe UI"/>
+              </a:rPr>
+              <a:t>WhatsApp: self-chat + group @mention triggers</a:t>
+            </a:r>
+          </a:p>
+          <a:p>
+            <a:pPr algn="l">
+              <a:spcAft>
+                <a:spcPts val="700"/>
+              </a:spcAft>
+            </a:pPr>
+            <a:r>
+              <a:rPr sz="1400" b="1">
+                <a:solidFill>
+                  <a:srgbClr val="1E6FE0"/>
+                </a:solidFill>
+                <a:latin typeface="Segoe UI"/>
+              </a:rPr>
+              <a:t>•  </a:t>
+            </a:r>
+            <a:r>
+              <a:rPr sz="1400" b="0">
+                <a:solidFill>
+                  <a:srgbClr val="4C596B"/>
+                </a:solidFill>
+                <a:latin typeface="Segoe UI"/>
+              </a:rPr>
+              <a:t>Auto task-aware model routing + inline AI question card</a:t>
+            </a:r>
+          </a:p>
+          <a:p>
+            <a:pPr algn="l">
+              <a:spcAft>
+                <a:spcPts val="700"/>
+              </a:spcAft>
+            </a:pPr>
+            <a:r>
+              <a:rPr sz="1400" b="1">
+                <a:solidFill>
+                  <a:srgbClr val="1E6FE0"/>
+                </a:solidFill>
+                <a:latin typeface="Segoe UI"/>
+              </a:rPr>
+              <a:t>•  </a:t>
+            </a:r>
+            <a:r>
+              <a:rPr sz="1400" b="0">
+                <a:solidFill>
+                  <a:srgbClr val="4C596B"/>
+                </a:solidFill>
+                <a:latin typeface="Segoe UI"/>
+              </a:rPr>
+              <a:t>HF-local, Copilot OAuth, Vertex, Ollama ported to the daemon</a:t>
+            </a:r>
+          </a:p>
+          <a:p>
+            <a:pPr algn="l">
+              <a:spcAft>
+                <a:spcPts val="700"/>
+              </a:spcAft>
+            </a:pPr>
+            <a:r>
+              <a:rPr sz="1400" b="1">
+                <a:solidFill>
+                  <a:srgbClr val="1E6FE0"/>
+                </a:solidFill>
+                <a:latin typeface="Segoe UI"/>
+              </a:rPr>
+              <a:t>•  </a:t>
+            </a:r>
+            <a:r>
+              <a:rPr sz="1400" b="0">
+                <a:solidFill>
+                  <a:srgbClr val="4C596B"/>
+                </a:solidFill>
+                <a:latin typeface="Segoe UI"/>
+              </a:rPr>
+              <a:t>One-click INSTALL.bat / LAUNCH-WEB.bat + Docker</a:t>
             </a:r>
           </a:p>
         </p:txBody>
@@ -8097,7 +9056,7 @@
                 </a:solidFill>
                 <a:latin typeface="Segoe UI"/>
               </a:rPr>
-              <a:t>WHO DID WHAT</a:t>
+              <a:t>ARCHITECTURE</a:t>
             </a:r>
           </a:p>
         </p:txBody>
@@ -8136,109 +9095,21 @@
                 </a:solidFill>
                 <a:latin typeface="Segoe UI"/>
               </a:rPr>
-              <a:t>Contributions</a:t>
-            </a:r>
-          </a:p>
-        </p:txBody>
-      </p:sp>
-      <p:sp>
-        <p:nvSpPr>
-          <p:cNvPr id="6" name="Rounded Rectangle 5"/>
-          <p:cNvSpPr/>
-          <p:nvPr/>
-        </p:nvSpPr>
-        <p:spPr>
-          <a:xfrm>
-            <a:off x="640080" y="1417320"/>
-            <a:ext cx="5349240" cy="4937760"/>
-          </a:xfrm>
-          <a:prstGeom prst="roundRect">
-            <a:avLst/>
-          </a:prstGeom>
-          <a:solidFill>
-            <a:srgbClr val="E9EFF7"/>
-          </a:solidFill>
-          <a:ln>
-            <a:noFill/>
-          </a:ln>
-          <a:effectLst/>
-        </p:spPr>
-        <p:style>
-          <a:lnRef idx="1">
-            <a:schemeClr val="accent1"/>
-          </a:lnRef>
-          <a:fillRef idx="3">
-            <a:schemeClr val="accent1"/>
-          </a:fillRef>
-          <a:effectRef idx="2">
-            <a:schemeClr val="accent1"/>
-          </a:effectRef>
-          <a:fontRef idx="minor">
-            <a:schemeClr val="lt1"/>
-          </a:fontRef>
-        </p:style>
-        <p:txBody>
-          <a:bodyPr rtlCol="0" anchor="ctr"/>
-          <a:lstStyle/>
-          <a:p>
-            <a:pPr algn="ctr"/>
-          </a:p>
-        </p:txBody>
-      </p:sp>
-      <p:sp>
-        <p:nvSpPr>
-          <p:cNvPr id="7" name="Rounded Rectangle 6"/>
-          <p:cNvSpPr/>
-          <p:nvPr/>
-        </p:nvSpPr>
-        <p:spPr>
-          <a:xfrm>
-            <a:off x="640080" y="1417320"/>
-            <a:ext cx="5349240" cy="868680"/>
-          </a:xfrm>
-          <a:prstGeom prst="roundRect">
-            <a:avLst/>
-          </a:prstGeom>
-          <a:solidFill>
-            <a:srgbClr val="0E7C86"/>
-          </a:solidFill>
-          <a:ln>
-            <a:noFill/>
-          </a:ln>
-          <a:effectLst/>
-        </p:spPr>
-        <p:style>
-          <a:lnRef idx="1">
-            <a:schemeClr val="accent1"/>
-          </a:lnRef>
-          <a:fillRef idx="3">
-            <a:schemeClr val="accent1"/>
-          </a:fillRef>
-          <a:effectRef idx="2">
-            <a:schemeClr val="accent1"/>
-          </a:effectRef>
-          <a:fontRef idx="minor">
-            <a:schemeClr val="lt1"/>
-          </a:fontRef>
-        </p:style>
-        <p:txBody>
-          <a:bodyPr rtlCol="0" anchor="ctr"/>
-          <a:lstStyle/>
-          <a:p>
-            <a:pPr algn="ctr"/>
-          </a:p>
-        </p:txBody>
-      </p:sp>
-      <p:sp>
-        <p:nvSpPr>
-          <p:cNvPr id="8" name="TextBox 7"/>
+              <a:t>Original (Electron)</a:t>
+            </a:r>
+          </a:p>
+        </p:txBody>
+      </p:sp>
+      <p:sp>
+        <p:nvSpPr>
+          <p:cNvPr id="6" name="TextBox 5"/>
           <p:cNvSpPr txBox="1"/>
           <p:nvPr/>
         </p:nvSpPr>
         <p:spPr>
           <a:xfrm>
-            <a:off x="914400" y="1527048"/>
-            <a:ext cx="4800600" cy="731520"/>
+            <a:off x="731520" y="1371600"/>
+            <a:ext cx="10789920" cy="5029200"/>
           </a:xfrm>
           <a:prstGeom prst="rect">
             <a:avLst/>
@@ -8253,572 +9124,101 @@
           <a:p>
             <a:pPr algn="l">
               <a:spcAft>
-                <a:spcPts val="200"/>
-              </a:spcAft>
-            </a:pPr>
-            <a:r>
-              <a:rPr sz="2000" b="1">
-                <a:solidFill>
-                  <a:srgbClr val="FFFFFF"/>
-                </a:solidFill>
-                <a:latin typeface="Segoe UI"/>
-              </a:rPr>
-              <a:t>Chaithanya</a:t>
-            </a:r>
-          </a:p>
-          <a:p>
-            <a:pPr algn="l">
-              <a:spcAft>
-                <a:spcPts val="200"/>
-              </a:spcAft>
-            </a:pPr>
-            <a:r>
-              <a:rPr sz="1200" b="0">
-                <a:solidFill>
-                  <a:srgbClr val="EAF0FF"/>
-                </a:solidFill>
-                <a:latin typeface="Segoe UI"/>
-              </a:rPr>
-              <a:t>Phase 1 — web conversion</a:t>
-            </a:r>
-          </a:p>
-        </p:txBody>
-      </p:sp>
-      <p:sp>
-        <p:nvSpPr>
-          <p:cNvPr id="9" name="TextBox 8"/>
-          <p:cNvSpPr txBox="1"/>
-          <p:nvPr/>
-        </p:nvSpPr>
-        <p:spPr>
-          <a:xfrm>
-            <a:off x="914400" y="2468880"/>
-            <a:ext cx="4800600" cy="3749040"/>
-          </a:xfrm>
-          <a:prstGeom prst="rect">
-            <a:avLst/>
-          </a:prstGeom>
-          <a:noFill/>
-        </p:spPr>
-        <p:txBody>
-          <a:bodyPr wrap="square" anchor="t">
-            <a:spAutoFit/>
-          </a:bodyPr>
-          <a:lstStyle/>
-          <a:p>
-            <a:pPr algn="l">
-              <a:spcAft>
-                <a:spcPts val="800"/>
-              </a:spcAft>
-            </a:pPr>
-            <a:r>
-              <a:rPr sz="1400" b="1">
-                <a:solidFill>
-                  <a:srgbClr val="0E7C86"/>
+                <a:spcPts val="900"/>
+              </a:spcAft>
+            </a:pPr>
+            <a:r>
+              <a:rPr sz="1700" b="1">
+                <a:solidFill>
+                  <a:srgbClr val="1E6FE0"/>
                 </a:solidFill>
                 <a:latin typeface="Segoe UI"/>
               </a:rPr>
               <a:t>•  </a:t>
             </a:r>
             <a:r>
-              <a:rPr sz="1400" b="0">
+              <a:rPr sz="1700" b="0">
                 <a:solidFill>
                   <a:srgbClr val="4C596B"/>
                 </a:solidFill>
                 <a:latin typeface="Segoe UI"/>
               </a:rPr>
-              <a:t>First conversion of the Electron app to a web build</a:t>
-            </a:r>
-          </a:p>
-          <a:p>
-            <a:pPr algn="l">
-              <a:spcAft>
-                <a:spcPts val="800"/>
-              </a:spcAft>
-            </a:pPr>
-            <a:r>
-              <a:rPr sz="1400" b="1">
-                <a:solidFill>
-                  <a:srgbClr val="0E7C86"/>
+              <a:t>React UI ↔ preload bridge (~462 methods)</a:t>
+            </a:r>
+          </a:p>
+          <a:p>
+            <a:pPr algn="l">
+              <a:spcAft>
+                <a:spcPts val="900"/>
+              </a:spcAft>
+            </a:pPr>
+            <a:r>
+              <a:rPr sz="1700" b="1">
+                <a:solidFill>
+                  <a:srgbClr val="1E6FE0"/>
                 </a:solidFill>
                 <a:latin typeface="Segoe UI"/>
               </a:rPr>
               <a:t>•  </a:t>
             </a:r>
             <a:r>
-              <a:rPr sz="1400" b="0">
+              <a:rPr sz="1700" b="0">
                 <a:solidFill>
                   <a:srgbClr val="4C596B"/>
                 </a:solidFill>
                 <a:latin typeface="Segoe UI"/>
               </a:rPr>
-              <a:t>Removed the Electron window</a:t>
-            </a:r>
-          </a:p>
-          <a:p>
-            <a:pPr algn="l">
-              <a:spcAft>
-                <a:spcPts val="800"/>
-              </a:spcAft>
-            </a:pPr>
-            <a:r>
-              <a:rPr sz="1400" b="1">
-                <a:solidFill>
-                  <a:srgbClr val="0E7C86"/>
+              <a:t>Electron main → daemon (Node)</a:t>
+            </a:r>
+          </a:p>
+          <a:p>
+            <a:pPr algn="l">
+              <a:spcAft>
+                <a:spcPts val="900"/>
+              </a:spcAft>
+            </a:pPr>
+            <a:r>
+              <a:rPr sz="1700" b="1">
+                <a:solidFill>
+                  <a:srgbClr val="1E6FE0"/>
                 </a:solidFill>
                 <a:latin typeface="Segoe UI"/>
               </a:rPr>
               <a:t>•  </a:t>
             </a:r>
             <a:r>
-              <a:rPr sz="1400" b="0">
+              <a:rPr sz="1700" b="0">
                 <a:solidFill>
                   <a:srgbClr val="4C596B"/>
                 </a:solidFill>
                 <a:latin typeface="Segoe UI"/>
               </a:rPr>
-              <a:t>Added the daemon HTTP + SSE server on :9234</a:t>
-            </a:r>
-          </a:p>
-          <a:p>
-            <a:pPr algn="l">
-              <a:spcAft>
-                <a:spcPts val="800"/>
-              </a:spcAft>
-            </a:pPr>
-            <a:r>
-              <a:rPr sz="1400" b="1">
-                <a:solidFill>
-                  <a:srgbClr val="0E7C86"/>
+              <a:t>Daemon: OpenCode + SQLite</a:t>
+            </a:r>
+          </a:p>
+          <a:p>
+            <a:pPr algn="l">
+              <a:spcAft>
+                <a:spcPts val="900"/>
+              </a:spcAft>
+            </a:pPr>
+            <a:r>
+              <a:rPr sz="1700" b="1">
+                <a:solidFill>
+                  <a:srgbClr val="1E6FE0"/>
                 </a:solidFill>
                 <a:latin typeface="Segoe UI"/>
               </a:rPr>
               <a:t>•  </a:t>
             </a:r>
             <a:r>
-              <a:rPr sz="1400" b="0">
+              <a:rPr sz="1700" b="0">
                 <a:solidFill>
                   <a:srgbClr val="4C596B"/>
                 </a:solidFill>
                 <a:latin typeface="Segoe UI"/>
               </a:rPr>
-              <a:t>Browser transport recreates window.accomplish</a:t>
-            </a:r>
-          </a:p>
-          <a:p>
-            <a:pPr algn="l">
-              <a:spcAft>
-                <a:spcPts val="800"/>
-              </a:spcAft>
-            </a:pPr>
-            <a:r>
-              <a:rPr sz="1400" b="1">
-                <a:solidFill>
-                  <a:srgbClr val="0E7C86"/>
-                </a:solidFill>
-                <a:latin typeface="Segoe UI"/>
-              </a:rPr>
-              <a:t>•  </a:t>
-            </a:r>
-            <a:r>
-              <a:rPr sz="1400" b="0">
-                <a:solidFill>
-                  <a:srgbClr val="4C596B"/>
-                </a:solidFill>
-                <a:latin typeface="Segoe UI"/>
-              </a:rPr>
-              <a:t>Login flow + initial DigiBull branding</a:t>
-            </a:r>
-          </a:p>
-          <a:p>
-            <a:pPr algn="l">
-              <a:spcAft>
-                <a:spcPts val="800"/>
-              </a:spcAft>
-            </a:pPr>
-            <a:r>
-              <a:rPr sz="1400" b="1">
-                <a:solidFill>
-                  <a:srgbClr val="0E7C86"/>
-                </a:solidFill>
-                <a:latin typeface="Segoe UI"/>
-              </a:rPr>
-              <a:t>•  </a:t>
-            </a:r>
-            <a:r>
-              <a:rPr sz="1400" b="0">
-                <a:solidFill>
-                  <a:srgbClr val="4C596B"/>
-                </a:solidFill>
-                <a:latin typeface="Segoe UI"/>
-              </a:rPr>
-              <a:t>~96 of ~148 features wired</a:t>
-            </a:r>
-          </a:p>
-          <a:p>
-            <a:pPr algn="l">
-              <a:spcAft>
-                <a:spcPts val="800"/>
-              </a:spcAft>
-            </a:pPr>
-            <a:r>
-              <a:rPr sz="1400" b="1">
-                <a:solidFill>
-                  <a:srgbClr val="0E7C86"/>
-                </a:solidFill>
-                <a:latin typeface="Segoe UI"/>
-              </a:rPr>
-              <a:t>•  </a:t>
-            </a:r>
-            <a:r>
-              <a:rPr sz="1400" b="0">
-                <a:solidFill>
-                  <a:srgbClr val="4C596B"/>
-                </a:solidFill>
-                <a:latin typeface="Segoe UI"/>
-              </a:rPr>
-              <a:t>Delivered as accomplish_Transformed_Chaithanya_Original.zip (~759 MB)</a:t>
-            </a:r>
-          </a:p>
-        </p:txBody>
-      </p:sp>
-      <p:sp>
-        <p:nvSpPr>
-          <p:cNvPr id="10" name="Rounded Rectangle 9"/>
-          <p:cNvSpPr/>
-          <p:nvPr/>
-        </p:nvSpPr>
-        <p:spPr>
-          <a:xfrm>
-            <a:off x="6217920" y="1417320"/>
-            <a:ext cx="5349240" cy="4937760"/>
-          </a:xfrm>
-          <a:prstGeom prst="roundRect">
-            <a:avLst/>
-          </a:prstGeom>
-          <a:solidFill>
-            <a:srgbClr val="E9EFF7"/>
-          </a:solidFill>
-          <a:ln>
-            <a:noFill/>
-          </a:ln>
-          <a:effectLst/>
-        </p:spPr>
-        <p:style>
-          <a:lnRef idx="1">
-            <a:schemeClr val="accent1"/>
-          </a:lnRef>
-          <a:fillRef idx="3">
-            <a:schemeClr val="accent1"/>
-          </a:fillRef>
-          <a:effectRef idx="2">
-            <a:schemeClr val="accent1"/>
-          </a:effectRef>
-          <a:fontRef idx="minor">
-            <a:schemeClr val="lt1"/>
-          </a:fontRef>
-        </p:style>
-        <p:txBody>
-          <a:bodyPr rtlCol="0" anchor="ctr"/>
-          <a:lstStyle/>
-          <a:p>
-            <a:pPr algn="ctr"/>
-          </a:p>
-        </p:txBody>
-      </p:sp>
-      <p:sp>
-        <p:nvSpPr>
-          <p:cNvPr id="11" name="Rounded Rectangle 10"/>
-          <p:cNvSpPr/>
-          <p:nvPr/>
-        </p:nvSpPr>
-        <p:spPr>
-          <a:xfrm>
-            <a:off x="6217920" y="1417320"/>
-            <a:ext cx="5349240" cy="868680"/>
-          </a:xfrm>
-          <a:prstGeom prst="roundRect">
-            <a:avLst/>
-          </a:prstGeom>
-          <a:solidFill>
-            <a:srgbClr val="1E6FE0"/>
-          </a:solidFill>
-          <a:ln>
-            <a:noFill/>
-          </a:ln>
-          <a:effectLst/>
-        </p:spPr>
-        <p:style>
-          <a:lnRef idx="1">
-            <a:schemeClr val="accent1"/>
-          </a:lnRef>
-          <a:fillRef idx="3">
-            <a:schemeClr val="accent1"/>
-          </a:fillRef>
-          <a:effectRef idx="2">
-            <a:schemeClr val="accent1"/>
-          </a:effectRef>
-          <a:fontRef idx="minor">
-            <a:schemeClr val="lt1"/>
-          </a:fontRef>
-        </p:style>
-        <p:txBody>
-          <a:bodyPr rtlCol="0" anchor="ctr"/>
-          <a:lstStyle/>
-          <a:p>
-            <a:pPr algn="ctr"/>
-          </a:p>
-        </p:txBody>
-      </p:sp>
-      <p:sp>
-        <p:nvSpPr>
-          <p:cNvPr id="12" name="TextBox 11"/>
-          <p:cNvSpPr txBox="1"/>
-          <p:nvPr/>
-        </p:nvSpPr>
-        <p:spPr>
-          <a:xfrm>
-            <a:off x="6492240" y="1527048"/>
-            <a:ext cx="4800600" cy="731520"/>
-          </a:xfrm>
-          <a:prstGeom prst="rect">
-            <a:avLst/>
-          </a:prstGeom>
-          <a:noFill/>
-        </p:spPr>
-        <p:txBody>
-          <a:bodyPr wrap="square" anchor="t">
-            <a:spAutoFit/>
-          </a:bodyPr>
-          <a:lstStyle/>
-          <a:p>
-            <a:pPr algn="l">
-              <a:spcAft>
-                <a:spcPts val="200"/>
-              </a:spcAft>
-            </a:pPr>
-            <a:r>
-              <a:rPr sz="2000" b="1">
-                <a:solidFill>
-                  <a:srgbClr val="FFFFFF"/>
-                </a:solidFill>
-                <a:latin typeface="Segoe UI"/>
-              </a:rPr>
-              <a:t>Nagabhushana Raju S</a:t>
-            </a:r>
-          </a:p>
-          <a:p>
-            <a:pPr algn="l">
-              <a:spcAft>
-                <a:spcPts val="200"/>
-              </a:spcAft>
-            </a:pPr>
-            <a:r>
-              <a:rPr sz="1200" b="0">
-                <a:solidFill>
-                  <a:srgbClr val="EAF0FF"/>
-                </a:solidFill>
-                <a:latin typeface="Segoe UI"/>
-              </a:rPr>
-              <a:t>Phase 2 — analysis, remediation, new build</a:t>
-            </a:r>
-          </a:p>
-        </p:txBody>
-      </p:sp>
-      <p:sp>
-        <p:nvSpPr>
-          <p:cNvPr id="13" name="TextBox 12"/>
-          <p:cNvSpPr txBox="1"/>
-          <p:nvPr/>
-        </p:nvSpPr>
-        <p:spPr>
-          <a:xfrm>
-            <a:off x="6492240" y="2468880"/>
-            <a:ext cx="4800600" cy="3749040"/>
-          </a:xfrm>
-          <a:prstGeom prst="rect">
-            <a:avLst/>
-          </a:prstGeom>
-          <a:noFill/>
-        </p:spPr>
-        <p:txBody>
-          <a:bodyPr wrap="square" anchor="t">
-            <a:spAutoFit/>
-          </a:bodyPr>
-          <a:lstStyle/>
-          <a:p>
-            <a:pPr algn="l">
-              <a:spcAft>
-                <a:spcPts val="800"/>
-              </a:spcAft>
-            </a:pPr>
-            <a:r>
-              <a:rPr sz="1400" b="1">
-                <a:solidFill>
-                  <a:srgbClr val="1E6FE0"/>
-                </a:solidFill>
-                <a:latin typeface="Segoe UI"/>
-              </a:rPr>
-              <a:t>•  </a:t>
-            </a:r>
-            <a:r>
-              <a:rPr sz="1400" b="0">
-                <a:solidFill>
-                  <a:srgbClr val="4C596B"/>
-                </a:solidFill>
-                <a:latin typeface="Segoe UI"/>
-              </a:rPr>
-              <a:t>Gap analysis vs original: 52 missing features (buckets A–D)</a:t>
-            </a:r>
-          </a:p>
-          <a:p>
-            <a:pPr algn="l">
-              <a:spcAft>
-                <a:spcPts val="800"/>
-              </a:spcAft>
-            </a:pPr>
-            <a:r>
-              <a:rPr sz="1400" b="1">
-                <a:solidFill>
-                  <a:srgbClr val="1E6FE0"/>
-                </a:solidFill>
-                <a:latin typeface="Segoe UI"/>
-              </a:rPr>
-              <a:t>•  </a:t>
-            </a:r>
-            <a:r>
-              <a:rPr sz="1400" b="0">
-                <a:solidFill>
-                  <a:srgbClr val="4C596B"/>
-                </a:solidFill>
-                <a:latin typeface="Segoe UI"/>
-              </a:rPr>
-              <a:t>Reverse-engineered the 0.4.14 .exe (asar extract → IPC diff)</a:t>
-            </a:r>
-          </a:p>
-          <a:p>
-            <a:pPr algn="l">
-              <a:spcAft>
-                <a:spcPts val="800"/>
-              </a:spcAft>
-            </a:pPr>
-            <a:r>
-              <a:rPr sz="1400" b="1">
-                <a:solidFill>
-                  <a:srgbClr val="1E6FE0"/>
-                </a:solidFill>
-                <a:latin typeface="Segoe UI"/>
-              </a:rPr>
-              <a:t>•  </a:t>
-            </a:r>
-            <a:r>
-              <a:rPr sz="1400" b="0">
-                <a:solidFill>
-                  <a:srgbClr val="4C596B"/>
-                </a:solidFill>
-                <a:latin typeface="Segoe UI"/>
-              </a:rPr>
-              <a:t>Fixed core bugs (API keys, provider connect, auth)</a:t>
-            </a:r>
-          </a:p>
-          <a:p>
-            <a:pPr algn="l">
-              <a:spcAft>
-                <a:spcPts val="800"/>
-              </a:spcAft>
-            </a:pPr>
-            <a:r>
-              <a:rPr sz="1400" b="1">
-                <a:solidFill>
-                  <a:srgbClr val="1E6FE0"/>
-                </a:solidFill>
-                <a:latin typeface="Segoe UI"/>
-              </a:rPr>
-              <a:t>•  </a:t>
-            </a:r>
-            <a:r>
-              <a:rPr sz="1400" b="0">
-                <a:solidFill>
-                  <a:srgbClr val="4C596B"/>
-                </a:solidFill>
-                <a:latin typeface="Segoe UI"/>
-              </a:rPr>
-              <a:t>New features: Auto routing, inline AI questions, LOCAL LLM advisor</a:t>
-            </a:r>
-          </a:p>
-          <a:p>
-            <a:pPr algn="l">
-              <a:spcAft>
-                <a:spcPts val="800"/>
-              </a:spcAft>
-            </a:pPr>
-            <a:r>
-              <a:rPr sz="1400" b="1">
-                <a:solidFill>
-                  <a:srgbClr val="1E6FE0"/>
-                </a:solidFill>
-                <a:latin typeface="Segoe UI"/>
-              </a:rPr>
-              <a:t>•  </a:t>
-            </a:r>
-            <a:r>
-              <a:rPr sz="1400" b="0">
-                <a:solidFill>
-                  <a:srgbClr val="4C596B"/>
-                </a:solidFill>
-                <a:latin typeface="Segoe UI"/>
-              </a:rPr>
-              <a:t>DigiBull UI rebrand + model UX + appearance</a:t>
-            </a:r>
-          </a:p>
-          <a:p>
-            <a:pPr algn="l">
-              <a:spcAft>
-                <a:spcPts val="800"/>
-              </a:spcAft>
-            </a:pPr>
-            <a:r>
-              <a:rPr sz="1400" b="1">
-                <a:solidFill>
-                  <a:srgbClr val="1E6FE0"/>
-                </a:solidFill>
-                <a:latin typeface="Segoe UI"/>
-              </a:rPr>
-              <a:t>•  </a:t>
-            </a:r>
-            <a:r>
-              <a:rPr sz="1400" b="0">
-                <a:solidFill>
-                  <a:srgbClr val="4C596B"/>
-                </a:solidFill>
-                <a:latin typeface="Segoe UI"/>
-              </a:rPr>
-              <a:t>WhatsApp integration + MCP (in/out)</a:t>
-            </a:r>
-          </a:p>
-          <a:p>
-            <a:pPr algn="l">
-              <a:spcAft>
-                <a:spcPts val="800"/>
-              </a:spcAft>
-            </a:pPr>
-            <a:r>
-              <a:rPr sz="1400" b="1">
-                <a:solidFill>
-                  <a:srgbClr val="1E6FE0"/>
-                </a:solidFill>
-                <a:latin typeface="Segoe UI"/>
-              </a:rPr>
-              <a:t>•  </a:t>
-            </a:r>
-            <a:r>
-              <a:rPr sz="1400" b="0">
-                <a:solidFill>
-                  <a:srgbClr val="4C596B"/>
-                </a:solidFill>
-                <a:latin typeface="Segoe UI"/>
-              </a:rPr>
-              <a:t>Setup automation (INSTALL/LAUNCH) + sqlite/SSE/Docker fixes</a:t>
+              <a:t>UI was already browser-safe</a:t>
             </a:r>
           </a:p>
         </p:txBody>
@@ -8971,7 +9371,7 @@
                 </a:solidFill>
                 <a:latin typeface="Segoe UI"/>
               </a:rPr>
-              <a:t>BASELINE  ·  CHAITHANYA</a:t>
+              <a:t>WHO DID WHAT</a:t>
             </a:r>
           </a:p>
         </p:txBody>
@@ -9010,21 +9410,109 @@
                 </a:solidFill>
                 <a:latin typeface="Segoe UI"/>
               </a:rPr>
-              <a:t>Starting artifact</a:t>
-            </a:r>
-          </a:p>
-        </p:txBody>
-      </p:sp>
-      <p:sp>
-        <p:nvSpPr>
-          <p:cNvPr id="6" name="TextBox 5"/>
+              <a:t>Contributions</a:t>
+            </a:r>
+          </a:p>
+        </p:txBody>
+      </p:sp>
+      <p:sp>
+        <p:nvSpPr>
+          <p:cNvPr id="6" name="Rounded Rectangle 5"/>
+          <p:cNvSpPr/>
+          <p:nvPr/>
+        </p:nvSpPr>
+        <p:spPr>
+          <a:xfrm>
+            <a:off x="640080" y="1417320"/>
+            <a:ext cx="5349240" cy="4937760"/>
+          </a:xfrm>
+          <a:prstGeom prst="roundRect">
+            <a:avLst/>
+          </a:prstGeom>
+          <a:solidFill>
+            <a:srgbClr val="E9EFF7"/>
+          </a:solidFill>
+          <a:ln>
+            <a:noFill/>
+          </a:ln>
+          <a:effectLst/>
+        </p:spPr>
+        <p:style>
+          <a:lnRef idx="1">
+            <a:schemeClr val="accent1"/>
+          </a:lnRef>
+          <a:fillRef idx="3">
+            <a:schemeClr val="accent1"/>
+          </a:fillRef>
+          <a:effectRef idx="2">
+            <a:schemeClr val="accent1"/>
+          </a:effectRef>
+          <a:fontRef idx="minor">
+            <a:schemeClr val="lt1"/>
+          </a:fontRef>
+        </p:style>
+        <p:txBody>
+          <a:bodyPr rtlCol="0" anchor="ctr"/>
+          <a:lstStyle/>
+          <a:p>
+            <a:pPr algn="ctr"/>
+          </a:p>
+        </p:txBody>
+      </p:sp>
+      <p:sp>
+        <p:nvSpPr>
+          <p:cNvPr id="7" name="Rounded Rectangle 6"/>
+          <p:cNvSpPr/>
+          <p:nvPr/>
+        </p:nvSpPr>
+        <p:spPr>
+          <a:xfrm>
+            <a:off x="640080" y="1417320"/>
+            <a:ext cx="5349240" cy="868680"/>
+          </a:xfrm>
+          <a:prstGeom prst="roundRect">
+            <a:avLst/>
+          </a:prstGeom>
+          <a:solidFill>
+            <a:srgbClr val="0E7C86"/>
+          </a:solidFill>
+          <a:ln>
+            <a:noFill/>
+          </a:ln>
+          <a:effectLst/>
+        </p:spPr>
+        <p:style>
+          <a:lnRef idx="1">
+            <a:schemeClr val="accent1"/>
+          </a:lnRef>
+          <a:fillRef idx="3">
+            <a:schemeClr val="accent1"/>
+          </a:fillRef>
+          <a:effectRef idx="2">
+            <a:schemeClr val="accent1"/>
+          </a:effectRef>
+          <a:fontRef idx="minor">
+            <a:schemeClr val="lt1"/>
+          </a:fontRef>
+        </p:style>
+        <p:txBody>
+          <a:bodyPr rtlCol="0" anchor="ctr"/>
+          <a:lstStyle/>
+          <a:p>
+            <a:pPr algn="ctr"/>
+          </a:p>
+        </p:txBody>
+      </p:sp>
+      <p:sp>
+        <p:nvSpPr>
+          <p:cNvPr id="8" name="TextBox 7"/>
           <p:cNvSpPr txBox="1"/>
           <p:nvPr/>
         </p:nvSpPr>
         <p:spPr>
           <a:xfrm>
-            <a:off x="731520" y="1371600"/>
-            <a:ext cx="10789920" cy="5029200"/>
+            <a:off x="914400" y="1527048"/>
+            <a:ext cx="4800600" cy="731520"/>
           </a:xfrm>
           <a:prstGeom prst="rect">
             <a:avLst/>
@@ -9039,11 +9527,407 @@
           <a:p>
             <a:pPr algn="l">
               <a:spcAft>
-                <a:spcPts val="900"/>
-              </a:spcAft>
-            </a:pPr>
-            <a:r>
-              <a:rPr sz="1700" b="1">
+                <a:spcPts val="200"/>
+              </a:spcAft>
+            </a:pPr>
+            <a:r>
+              <a:rPr sz="1900" b="1">
+                <a:solidFill>
+                  <a:srgbClr val="FFFFFF"/>
+                </a:solidFill>
+                <a:latin typeface="Segoe UI"/>
+              </a:rPr>
+              <a:t>Chaithanya</a:t>
+            </a:r>
+          </a:p>
+          <a:p>
+            <a:pPr algn="l">
+              <a:spcAft>
+                <a:spcPts val="200"/>
+              </a:spcAft>
+            </a:pPr>
+            <a:r>
+              <a:rPr sz="1100" b="0">
+                <a:solidFill>
+                  <a:srgbClr val="EAF0FF"/>
+                </a:solidFill>
+                <a:latin typeface="Segoe UI"/>
+              </a:rPr>
+              <a:t>Phase 1 — web conversion</a:t>
+            </a:r>
+          </a:p>
+        </p:txBody>
+      </p:sp>
+      <p:sp>
+        <p:nvSpPr>
+          <p:cNvPr id="9" name="TextBox 8"/>
+          <p:cNvSpPr txBox="1"/>
+          <p:nvPr/>
+        </p:nvSpPr>
+        <p:spPr>
+          <a:xfrm>
+            <a:off x="914400" y="2423160"/>
+            <a:ext cx="4800600" cy="3794760"/>
+          </a:xfrm>
+          <a:prstGeom prst="rect">
+            <a:avLst/>
+          </a:prstGeom>
+          <a:noFill/>
+        </p:spPr>
+        <p:txBody>
+          <a:bodyPr wrap="square" anchor="t">
+            <a:spAutoFit/>
+          </a:bodyPr>
+          <a:lstStyle/>
+          <a:p>
+            <a:pPr algn="l">
+              <a:spcAft>
+                <a:spcPts val="700"/>
+              </a:spcAft>
+            </a:pPr>
+            <a:r>
+              <a:rPr sz="1400" b="1">
+                <a:solidFill>
+                  <a:srgbClr val="0E7C86"/>
+                </a:solidFill>
+                <a:latin typeface="Segoe UI"/>
+              </a:rPr>
+              <a:t>•  </a:t>
+            </a:r>
+            <a:r>
+              <a:rPr sz="1400" b="0">
+                <a:solidFill>
+                  <a:srgbClr val="4C596B"/>
+                </a:solidFill>
+                <a:latin typeface="Segoe UI"/>
+              </a:rPr>
+              <a:t>First conversion of the Electron app to a web build</a:t>
+            </a:r>
+          </a:p>
+          <a:p>
+            <a:pPr algn="l">
+              <a:spcAft>
+                <a:spcPts val="700"/>
+              </a:spcAft>
+            </a:pPr>
+            <a:r>
+              <a:rPr sz="1400" b="1">
+                <a:solidFill>
+                  <a:srgbClr val="0E7C86"/>
+                </a:solidFill>
+                <a:latin typeface="Segoe UI"/>
+              </a:rPr>
+              <a:t>•  </a:t>
+            </a:r>
+            <a:r>
+              <a:rPr sz="1400" b="0">
+                <a:solidFill>
+                  <a:srgbClr val="4C596B"/>
+                </a:solidFill>
+                <a:latin typeface="Segoe UI"/>
+              </a:rPr>
+              <a:t>Removed the Electron window</a:t>
+            </a:r>
+          </a:p>
+          <a:p>
+            <a:pPr algn="l">
+              <a:spcAft>
+                <a:spcPts val="700"/>
+              </a:spcAft>
+            </a:pPr>
+            <a:r>
+              <a:rPr sz="1400" b="1">
+                <a:solidFill>
+                  <a:srgbClr val="0E7C86"/>
+                </a:solidFill>
+                <a:latin typeface="Segoe UI"/>
+              </a:rPr>
+              <a:t>•  </a:t>
+            </a:r>
+            <a:r>
+              <a:rPr sz="1400" b="0">
+                <a:solidFill>
+                  <a:srgbClr val="4C596B"/>
+                </a:solidFill>
+                <a:latin typeface="Segoe UI"/>
+              </a:rPr>
+              <a:t>Added the daemon HTTP + SSE server on :9234</a:t>
+            </a:r>
+          </a:p>
+          <a:p>
+            <a:pPr algn="l">
+              <a:spcAft>
+                <a:spcPts val="700"/>
+              </a:spcAft>
+            </a:pPr>
+            <a:r>
+              <a:rPr sz="1400" b="1">
+                <a:solidFill>
+                  <a:srgbClr val="0E7C86"/>
+                </a:solidFill>
+                <a:latin typeface="Segoe UI"/>
+              </a:rPr>
+              <a:t>•  </a:t>
+            </a:r>
+            <a:r>
+              <a:rPr sz="1400" b="0">
+                <a:solidFill>
+                  <a:srgbClr val="4C596B"/>
+                </a:solidFill>
+                <a:latin typeface="Segoe UI"/>
+              </a:rPr>
+              <a:t>Browser transport recreates window.accomplish</a:t>
+            </a:r>
+          </a:p>
+          <a:p>
+            <a:pPr algn="l">
+              <a:spcAft>
+                <a:spcPts val="700"/>
+              </a:spcAft>
+            </a:pPr>
+            <a:r>
+              <a:rPr sz="1400" b="1">
+                <a:solidFill>
+                  <a:srgbClr val="0E7C86"/>
+                </a:solidFill>
+                <a:latin typeface="Segoe UI"/>
+              </a:rPr>
+              <a:t>•  </a:t>
+            </a:r>
+            <a:r>
+              <a:rPr sz="1400" b="0">
+                <a:solidFill>
+                  <a:srgbClr val="4C596B"/>
+                </a:solidFill>
+                <a:latin typeface="Segoe UI"/>
+              </a:rPr>
+              <a:t>Login flow + initial DigiBull branding</a:t>
+            </a:r>
+          </a:p>
+          <a:p>
+            <a:pPr algn="l">
+              <a:spcAft>
+                <a:spcPts val="700"/>
+              </a:spcAft>
+            </a:pPr>
+            <a:r>
+              <a:rPr sz="1400" b="1">
+                <a:solidFill>
+                  <a:srgbClr val="0E7C86"/>
+                </a:solidFill>
+                <a:latin typeface="Segoe UI"/>
+              </a:rPr>
+              <a:t>•  </a:t>
+            </a:r>
+            <a:r>
+              <a:rPr sz="1400" b="0">
+                <a:solidFill>
+                  <a:srgbClr val="4C596B"/>
+                </a:solidFill>
+                <a:latin typeface="Segoe UI"/>
+              </a:rPr>
+              <a:t>~96 of ~148 features wired</a:t>
+            </a:r>
+          </a:p>
+          <a:p>
+            <a:pPr algn="l">
+              <a:spcAft>
+                <a:spcPts val="700"/>
+              </a:spcAft>
+            </a:pPr>
+            <a:r>
+              <a:rPr sz="1400" b="1">
+                <a:solidFill>
+                  <a:srgbClr val="0E7C86"/>
+                </a:solidFill>
+                <a:latin typeface="Segoe UI"/>
+              </a:rPr>
+              <a:t>•  </a:t>
+            </a:r>
+            <a:r>
+              <a:rPr sz="1400" b="0">
+                <a:solidFill>
+                  <a:srgbClr val="4C596B"/>
+                </a:solidFill>
+                <a:latin typeface="Segoe UI"/>
+              </a:rPr>
+              <a:t>Delivered as accomplish_Transformed_Chaithanya_Original.zip (~759 MB)</a:t>
+            </a:r>
+          </a:p>
+        </p:txBody>
+      </p:sp>
+      <p:sp>
+        <p:nvSpPr>
+          <p:cNvPr id="10" name="Rounded Rectangle 9"/>
+          <p:cNvSpPr/>
+          <p:nvPr/>
+        </p:nvSpPr>
+        <p:spPr>
+          <a:xfrm>
+            <a:off x="6217920" y="1417320"/>
+            <a:ext cx="5349240" cy="4937760"/>
+          </a:xfrm>
+          <a:prstGeom prst="roundRect">
+            <a:avLst/>
+          </a:prstGeom>
+          <a:solidFill>
+            <a:srgbClr val="E9EFF7"/>
+          </a:solidFill>
+          <a:ln>
+            <a:noFill/>
+          </a:ln>
+          <a:effectLst/>
+        </p:spPr>
+        <p:style>
+          <a:lnRef idx="1">
+            <a:schemeClr val="accent1"/>
+          </a:lnRef>
+          <a:fillRef idx="3">
+            <a:schemeClr val="accent1"/>
+          </a:fillRef>
+          <a:effectRef idx="2">
+            <a:schemeClr val="accent1"/>
+          </a:effectRef>
+          <a:fontRef idx="minor">
+            <a:schemeClr val="lt1"/>
+          </a:fontRef>
+        </p:style>
+        <p:txBody>
+          <a:bodyPr rtlCol="0" anchor="ctr"/>
+          <a:lstStyle/>
+          <a:p>
+            <a:pPr algn="ctr"/>
+          </a:p>
+        </p:txBody>
+      </p:sp>
+      <p:sp>
+        <p:nvSpPr>
+          <p:cNvPr id="11" name="Rounded Rectangle 10"/>
+          <p:cNvSpPr/>
+          <p:nvPr/>
+        </p:nvSpPr>
+        <p:spPr>
+          <a:xfrm>
+            <a:off x="6217920" y="1417320"/>
+            <a:ext cx="5349240" cy="868680"/>
+          </a:xfrm>
+          <a:prstGeom prst="roundRect">
+            <a:avLst/>
+          </a:prstGeom>
+          <a:solidFill>
+            <a:srgbClr val="1E6FE0"/>
+          </a:solidFill>
+          <a:ln>
+            <a:noFill/>
+          </a:ln>
+          <a:effectLst/>
+        </p:spPr>
+        <p:style>
+          <a:lnRef idx="1">
+            <a:schemeClr val="accent1"/>
+          </a:lnRef>
+          <a:fillRef idx="3">
+            <a:schemeClr val="accent1"/>
+          </a:fillRef>
+          <a:effectRef idx="2">
+            <a:schemeClr val="accent1"/>
+          </a:effectRef>
+          <a:fontRef idx="minor">
+            <a:schemeClr val="lt1"/>
+          </a:fontRef>
+        </p:style>
+        <p:txBody>
+          <a:bodyPr rtlCol="0" anchor="ctr"/>
+          <a:lstStyle/>
+          <a:p>
+            <a:pPr algn="ctr"/>
+          </a:p>
+        </p:txBody>
+      </p:sp>
+      <p:sp>
+        <p:nvSpPr>
+          <p:cNvPr id="12" name="TextBox 11"/>
+          <p:cNvSpPr txBox="1"/>
+          <p:nvPr/>
+        </p:nvSpPr>
+        <p:spPr>
+          <a:xfrm>
+            <a:off x="6492240" y="1527048"/>
+            <a:ext cx="4800600" cy="731520"/>
+          </a:xfrm>
+          <a:prstGeom prst="rect">
+            <a:avLst/>
+          </a:prstGeom>
+          <a:noFill/>
+        </p:spPr>
+        <p:txBody>
+          <a:bodyPr wrap="square" anchor="t">
+            <a:spAutoFit/>
+          </a:bodyPr>
+          <a:lstStyle/>
+          <a:p>
+            <a:pPr algn="l">
+              <a:spcAft>
+                <a:spcPts val="200"/>
+              </a:spcAft>
+            </a:pPr>
+            <a:r>
+              <a:rPr sz="1900" b="1">
+                <a:solidFill>
+                  <a:srgbClr val="FFFFFF"/>
+                </a:solidFill>
+                <a:latin typeface="Segoe UI"/>
+              </a:rPr>
+              <a:t>Nagabhushana Raju S</a:t>
+            </a:r>
+          </a:p>
+          <a:p>
+            <a:pPr algn="l">
+              <a:spcAft>
+                <a:spcPts val="200"/>
+              </a:spcAft>
+            </a:pPr>
+            <a:r>
+              <a:rPr sz="1100" b="0">
+                <a:solidFill>
+                  <a:srgbClr val="EAF0FF"/>
+                </a:solidFill>
+                <a:latin typeface="Segoe UI"/>
+              </a:rPr>
+              <a:t>Phase 2 — analysis, remediation, new build</a:t>
+            </a:r>
+          </a:p>
+        </p:txBody>
+      </p:sp>
+      <p:sp>
+        <p:nvSpPr>
+          <p:cNvPr id="13" name="TextBox 12"/>
+          <p:cNvSpPr txBox="1"/>
+          <p:nvPr/>
+        </p:nvSpPr>
+        <p:spPr>
+          <a:xfrm>
+            <a:off x="6492240" y="2423160"/>
+            <a:ext cx="4800600" cy="3794760"/>
+          </a:xfrm>
+          <a:prstGeom prst="rect">
+            <a:avLst/>
+          </a:prstGeom>
+          <a:noFill/>
+        </p:spPr>
+        <p:txBody>
+          <a:bodyPr wrap="square" anchor="t">
+            <a:spAutoFit/>
+          </a:bodyPr>
+          <a:lstStyle/>
+          <a:p>
+            <a:pPr algn="l">
+              <a:spcAft>
+                <a:spcPts val="700"/>
+              </a:spcAft>
+            </a:pPr>
+            <a:r>
+              <a:rPr sz="1400" b="1">
                 <a:solidFill>
                   <a:srgbClr val="1E6FE0"/>
                 </a:solidFill>
@@ -9052,32 +9936,23 @@
               <a:t>•  </a:t>
             </a:r>
             <a:r>
-              <a:rPr sz="1700" b="1">
-                <a:solidFill>
-                  <a:srgbClr val="0B1F3A"/>
-                </a:solidFill>
-                <a:latin typeface="Segoe UI"/>
-              </a:rPr>
-              <a:t>accomplish_Transformed_Chaithanya_Original.zip </a:t>
-            </a:r>
-            <a:r>
-              <a:rPr sz="1700" b="0">
+              <a:rPr sz="1400" b="0">
                 <a:solidFill>
                   <a:srgbClr val="4C596B"/>
                 </a:solidFill>
                 <a:latin typeface="Segoe UI"/>
               </a:rPr>
-              <a:t>(~759 MB)</a:t>
-            </a:r>
-          </a:p>
-          <a:p>
-            <a:pPr algn="l">
-              <a:spcAft>
-                <a:spcPts val="900"/>
-              </a:spcAft>
-            </a:pPr>
-            <a:r>
-              <a:rPr sz="1700" b="1">
+              <a:t>Gap analysis vs original: 52 missing features (buckets A–D)</a:t>
+            </a:r>
+          </a:p>
+          <a:p>
+            <a:pPr algn="l">
+              <a:spcAft>
+                <a:spcPts val="700"/>
+              </a:spcAft>
+            </a:pPr>
+            <a:r>
+              <a:rPr sz="1400" b="1">
                 <a:solidFill>
                   <a:srgbClr val="1E6FE0"/>
                 </a:solidFill>
@@ -9086,23 +9961,23 @@
               <a:t>•  </a:t>
             </a:r>
             <a:r>
-              <a:rPr sz="1700" b="0">
+              <a:rPr sz="1400" b="0">
                 <a:solidFill>
                   <a:srgbClr val="4C596B"/>
                 </a:solidFill>
                 <a:latin typeface="Segoe UI"/>
               </a:rPr>
-              <a:t>The first web transform of the Electron app</a:t>
-            </a:r>
-          </a:p>
-          <a:p>
-            <a:pPr algn="l">
-              <a:spcAft>
-                <a:spcPts val="900"/>
-              </a:spcAft>
-            </a:pPr>
-            <a:r>
-              <a:rPr sz="1700" b="1">
+              <a:t>Reverse-engineered the 0.4.14 .exe (asar extract → IPC diff)</a:t>
+            </a:r>
+          </a:p>
+          <a:p>
+            <a:pPr algn="l">
+              <a:spcAft>
+                <a:spcPts val="700"/>
+              </a:spcAft>
+            </a:pPr>
+            <a:r>
+              <a:rPr sz="1400" b="1">
                 <a:solidFill>
                   <a:srgbClr val="1E6FE0"/>
                 </a:solidFill>
@@ -9111,13 +9986,88 @@
               <a:t>•  </a:t>
             </a:r>
             <a:r>
-              <a:rPr sz="1700" b="0">
+              <a:rPr sz="1400" b="0">
                 <a:solidFill>
                   <a:srgbClr val="4C596B"/>
                 </a:solidFill>
                 <a:latin typeface="Segoe UI"/>
               </a:rPr>
-              <a:t>The current SRIM working tree continues from it</a:t>
+              <a:t>Fixed core bugs (API keys, provider connect, auth)</a:t>
+            </a:r>
+          </a:p>
+          <a:p>
+            <a:pPr algn="l">
+              <a:spcAft>
+                <a:spcPts val="700"/>
+              </a:spcAft>
+            </a:pPr>
+            <a:r>
+              <a:rPr sz="1400" b="1">
+                <a:solidFill>
+                  <a:srgbClr val="1E6FE0"/>
+                </a:solidFill>
+                <a:latin typeface="Segoe UI"/>
+              </a:rPr>
+              <a:t>•  </a:t>
+            </a:r>
+            <a:r>
+              <a:rPr sz="1400" b="0">
+                <a:solidFill>
+                  <a:srgbClr val="4C596B"/>
+                </a:solidFill>
+                <a:latin typeface="Segoe UI"/>
+              </a:rPr>
+              <a:t>New features: Auto routing, inline AI questions, LOCAL LLM advisor</a:t>
+            </a:r>
+          </a:p>
+          <a:p>
+            <a:pPr algn="l">
+              <a:spcAft>
+                <a:spcPts val="700"/>
+              </a:spcAft>
+            </a:pPr>
+            <a:r>
+              <a:rPr sz="1400" b="1">
+                <a:solidFill>
+                  <a:srgbClr val="1E6FE0"/>
+                </a:solidFill>
+                <a:latin typeface="Segoe UI"/>
+              </a:rPr>
+              <a:t>•  </a:t>
+            </a:r>
+            <a:r>
+              <a:rPr sz="1400" b="0">
+                <a:solidFill>
+                  <a:srgbClr val="4C596B"/>
+                </a:solidFill>
+                <a:latin typeface="Segoe UI"/>
+              </a:rPr>
+              <a:t>WhatsApp + MCP (in/out) · HF-local/Copilot/Vertex/Ollama ports</a:t>
+            </a:r>
+          </a:p>
+          <a:p>
+            <a:pPr algn="l">
+              <a:spcAft>
+                <a:spcPts val="700"/>
+              </a:spcAft>
+            </a:pPr>
+            <a:r>
+              <a:rPr sz="1400" b="1">
+                <a:solidFill>
+                  <a:srgbClr val="1E6FE0"/>
+                </a:solidFill>
+                <a:latin typeface="Segoe UI"/>
+              </a:rPr>
+              <a:t>•  </a:t>
+            </a:r>
+            <a:r>
+              <a:rPr sz="1400" b="0">
+                <a:solidFill>
+                  <a:srgbClr val="4C596B"/>
+                </a:solidFill>
+                <a:latin typeface="Segoe UI"/>
+              </a:rPr>
+              <a:t>Setup automation (INSTALL/LAUNCH) + sqlite/SSE/Docker fixes</a:t>
             </a:r>
           </a:p>
         </p:txBody>
@@ -9270,7 +10220,7 @@
                 </a:solidFill>
                 <a:latin typeface="Segoe UI"/>
               </a:rPr>
-              <a:t>PHASE 1  ·  CHAITHANYA</a:t>
+              <a:t>BASELINE  ·  CHAITHANYA</a:t>
             </a:r>
           </a:p>
         </p:txBody>
@@ -9309,7 +10259,7 @@
                 </a:solidFill>
                 <a:latin typeface="Segoe UI"/>
               </a:rPr>
-              <a:t>Convert to web</a:t>
+              <a:t>Starting artifact</a:t>
             </a:r>
           </a:p>
         </p:txBody>
@@ -9351,13 +10301,22 @@
               <a:t>•  </a:t>
             </a:r>
             <a:r>
+              <a:rPr sz="1700" b="1">
+                <a:solidFill>
+                  <a:srgbClr val="0B1F3A"/>
+                </a:solidFill>
+                <a:latin typeface="Segoe UI"/>
+              </a:rPr>
+              <a:t>accomplish_Transformed_Chaithanya_Original.zip </a:t>
+            </a:r>
+            <a:r>
               <a:rPr sz="1700" b="0">
                 <a:solidFill>
                   <a:srgbClr val="4C596B"/>
                 </a:solidFill>
                 <a:latin typeface="Segoe UI"/>
               </a:rPr>
-              <a:t>Removed the Electron window</a:t>
+              <a:t>(~759 MB)</a:t>
             </a:r>
           </a:p>
           <a:p>
@@ -9382,7 +10341,7 @@
                 </a:solidFill>
                 <a:latin typeface="Segoe UI"/>
               </a:rPr>
-              <a:t>Added daemon HTTP + SSE server on :9234</a:t>
+              <a:t>The first web transform of the Electron app</a:t>
             </a:r>
           </a:p>
           <a:p>
@@ -9407,57 +10366,7 @@
                 </a:solidFill>
                 <a:latin typeface="Segoe UI"/>
               </a:rPr>
-              <a:t>Browser transport recreates window.accomplish</a:t>
-            </a:r>
-          </a:p>
-          <a:p>
-            <a:pPr algn="l">
-              <a:spcAft>
-                <a:spcPts val="900"/>
-              </a:spcAft>
-            </a:pPr>
-            <a:r>
-              <a:rPr sz="1700" b="1">
-                <a:solidFill>
-                  <a:srgbClr val="1E6FE0"/>
-                </a:solidFill>
-                <a:latin typeface="Segoe UI"/>
-              </a:rPr>
-              <a:t>•  </a:t>
-            </a:r>
-            <a:r>
-              <a:rPr sz="1700" b="0">
-                <a:solidFill>
-                  <a:srgbClr val="4C596B"/>
-                </a:solidFill>
-                <a:latin typeface="Segoe UI"/>
-              </a:rPr>
-              <a:t>Login + DigiBull branding</a:t>
-            </a:r>
-          </a:p>
-          <a:p>
-            <a:pPr algn="l">
-              <a:spcAft>
-                <a:spcPts val="900"/>
-              </a:spcAft>
-            </a:pPr>
-            <a:r>
-              <a:rPr sz="1700" b="1">
-                <a:solidFill>
-                  <a:srgbClr val="1E6FE0"/>
-                </a:solidFill>
-                <a:latin typeface="Segoe UI"/>
-              </a:rPr>
-              <a:t>•  </a:t>
-            </a:r>
-            <a:r>
-              <a:rPr sz="1700" b="0">
-                <a:solidFill>
-                  <a:srgbClr val="4C596B"/>
-                </a:solidFill>
-                <a:latin typeface="Segoe UI"/>
-              </a:rPr>
-              <a:t>~96 of ~148 features wired</a:t>
+              <a:t>The current SRIM working tree continues from it</a:t>
             </a:r>
           </a:p>
         </p:txBody>
@@ -9610,7 +10519,7 @@
                 </a:solidFill>
                 <a:latin typeface="Segoe UI"/>
               </a:rPr>
-              <a:t>PHASE 2  ·  NAGABHUSHANA</a:t>
+              <a:t>PHASE 1  ·  CHAITHANYA</a:t>
             </a:r>
           </a:p>
         </p:txBody>
@@ -9649,7 +10558,7 @@
                 </a:solidFill>
                 <a:latin typeface="Segoe UI"/>
               </a:rPr>
-              <a:t>Analyse &amp; reverse-engineer</a:t>
+              <a:t>Convert to web</a:t>
             </a:r>
           </a:p>
         </p:txBody>
@@ -9697,7 +10606,7 @@
                 </a:solidFill>
                 <a:latin typeface="Segoe UI"/>
               </a:rPr>
-              <a:t>Compared the converted build vs the original</a:t>
+              <a:t>Removed the Electron window</a:t>
             </a:r>
           </a:p>
           <a:p>
@@ -9722,7 +10631,7 @@
                 </a:solidFill>
                 <a:latin typeface="Segoe UI"/>
               </a:rPr>
-              <a:t>Gap analysis: 52 missing features (buckets A–D)</a:t>
+              <a:t>Added daemon HTTP + SSE server on :9234</a:t>
             </a:r>
           </a:p>
           <a:p>
@@ -9747,7 +10656,7 @@
                 </a:solidFill>
                 <a:latin typeface="Segoe UI"/>
               </a:rPr>
-              <a:t>Reverse-engineered the 0.4.14 .exe</a:t>
+              <a:t>Browser transport recreates window.accomplish</a:t>
             </a:r>
           </a:p>
           <a:p>
@@ -9772,7 +10681,32 @@
                 </a:solidFill>
                 <a:latin typeface="Segoe UI"/>
               </a:rPr>
-              <a:t>asar extract → diffed IPC channels</a:t>
+              <a:t>Login + DigiBull branding</a:t>
+            </a:r>
+          </a:p>
+          <a:p>
+            <a:pPr algn="l">
+              <a:spcAft>
+                <a:spcPts val="900"/>
+              </a:spcAft>
+            </a:pPr>
+            <a:r>
+              <a:rPr sz="1700" b="1">
+                <a:solidFill>
+                  <a:srgbClr val="1E6FE0"/>
+                </a:solidFill>
+                <a:latin typeface="Segoe UI"/>
+              </a:rPr>
+              <a:t>•  </a:t>
+            </a:r>
+            <a:r>
+              <a:rPr sz="1700" b="0">
+                <a:solidFill>
+                  <a:srgbClr val="4C596B"/>
+                </a:solidFill>
+                <a:latin typeface="Segoe UI"/>
+              </a:rPr>
+              <a:t>~96 of ~148 features wired</a:t>
             </a:r>
           </a:p>
         </p:txBody>
@@ -9925,7 +10859,7 @@
                 </a:solidFill>
                 <a:latin typeface="Segoe UI"/>
               </a:rPr>
-              <a:t>FINDINGS  ·  NAGABHUSHANA</a:t>
+              <a:t>PHASE 2  ·  NAGABHUSHANA</a:t>
             </a:r>
           </a:p>
         </p:txBody>
@@ -9964,7 +10898,7 @@
                 </a:solidFill>
                 <a:latin typeface="Segoe UI"/>
               </a:rPr>
-              <a:t>0.4.14 .exe</a:t>
+              <a:t>Analyse &amp; reverse-engineer</a:t>
             </a:r>
           </a:p>
         </p:txBody>
@@ -10012,7 +10946,7 @@
                 </a:solidFill>
                 <a:latin typeface="Segoe UI"/>
               </a:rPr>
-              <a:t>Newer code than the source we had</a:t>
+              <a:t>Compared the converted build vs the original</a:t>
             </a:r>
           </a:p>
           <a:p>
@@ -10037,7 +10971,7 @@
                 </a:solidFill>
                 <a:latin typeface="Segoe UI"/>
               </a:rPr>
-              <a:t>~124 IPC channels not present in source</a:t>
+              <a:t>Gap analysis: 52 missing features (buckets A–D)</a:t>
             </a:r>
           </a:p>
           <a:p>
@@ -10062,7 +10996,7 @@
                 </a:solidFill>
                 <a:latin typeface="Segoe UI"/>
               </a:rPr>
-              <a:t>New: Browser Panel, Triggered Tasks, llama.cpp, feature flags</a:t>
+              <a:t>Reverse-engineered the 0.4.14 .exe</a:t>
             </a:r>
           </a:p>
           <a:p>
@@ -10087,7 +11021,7 @@
                 </a:solidFill>
                 <a:latin typeface="Segoe UI"/>
               </a:rPr>
-              <a:t>Only minified bundles → need source to fully port</a:t>
+              <a:t>asar extract → diffed IPC channels</a:t>
             </a:r>
           </a:p>
         </p:txBody>
@@ -10240,7 +11174,7 @@
                 </a:solidFill>
                 <a:latin typeface="Segoe UI"/>
               </a:rPr>
-              <a:t>REMEDIATION  ·  NAGABHUSHANA</a:t>
+              <a:t>FINDINGS  ·  NAGABHUSHANA</a:t>
             </a:r>
           </a:p>
         </p:txBody>
@@ -10279,7 +11213,7 @@
                 </a:solidFill>
                 <a:latin typeface="Segoe UI"/>
               </a:rPr>
-              <a:t>Bugs fixed</a:t>
+              <a:t>0.4.14 .exe</a:t>
             </a:r>
           </a:p>
         </p:txBody>
@@ -10321,13 +11255,29 @@
               <a:t>•  </a:t>
             </a:r>
             <a:r>
+              <a:rPr sz="1700" b="0">
+                <a:solidFill>
+                  <a:srgbClr val="4C596B"/>
+                </a:solidFill>
+                <a:latin typeface="Segoe UI"/>
+              </a:rPr>
+              <a:t>Newer code than the source we had</a:t>
+            </a:r>
+          </a:p>
+          <a:p>
+            <a:pPr algn="l">
+              <a:spcAft>
+                <a:spcPts val="900"/>
+              </a:spcAft>
+            </a:pPr>
+            <a:r>
               <a:rPr sz="1700" b="1">
                 <a:solidFill>
-                  <a:srgbClr val="0B1F3A"/>
-                </a:solidFill>
-                <a:latin typeface="Segoe UI"/>
-              </a:rPr>
-              <a:t>Tasks failed </a:t>
+                  <a:srgbClr val="1E6FE0"/>
+                </a:solidFill>
+                <a:latin typeface="Segoe UI"/>
+              </a:rPr>
+              <a:t>•  </a:t>
             </a:r>
             <a:r>
               <a:rPr sz="1700" b="0">
@@ -10336,7 +11286,7 @@
                 </a:solidFill>
                 <a:latin typeface="Segoe UI"/>
               </a:rPr>
-              <a:t>→ API keys now passed to OpenCode</a:t>
+              <a:t>~124 IPC channels not present in source</a:t>
             </a:r>
           </a:p>
           <a:p>
@@ -10361,7 +11311,7 @@
                 </a:solidFill>
                 <a:latin typeface="Segoe UI"/>
               </a:rPr>
-              <a:t>Provider connect crash (null.valid)</a:t>
+              <a:t>New: Browser Panel, Triggered Tasks, llama.cpp, feature flags</a:t>
             </a:r>
           </a:p>
           <a:p>
@@ -10386,57 +11336,7 @@
                 </a:solidFill>
                 <a:latin typeface="Segoe UI"/>
               </a:rPr>
-              <a:t>Valid keys wrongly rejected</a:t>
-            </a:r>
-          </a:p>
-          <a:p>
-            <a:pPr algn="l">
-              <a:spcAft>
-                <a:spcPts val="900"/>
-              </a:spcAft>
-            </a:pPr>
-            <a:r>
-              <a:rPr sz="1700" b="1">
-                <a:solidFill>
-                  <a:srgbClr val="1E6FE0"/>
-                </a:solidFill>
-                <a:latin typeface="Segoe UI"/>
-              </a:rPr>
-              <a:t>•  </a:t>
-            </a:r>
-            <a:r>
-              <a:rPr sz="1700" b="0">
-                <a:solidFill>
-                  <a:srgbClr val="4C596B"/>
-                </a:solidFill>
-                <a:latin typeface="Segoe UI"/>
-              </a:rPr>
-              <a:t>Pasted-quote keys broke auth</a:t>
-            </a:r>
-          </a:p>
-          <a:p>
-            <a:pPr algn="l">
-              <a:spcAft>
-                <a:spcPts val="900"/>
-              </a:spcAft>
-            </a:pPr>
-            <a:r>
-              <a:rPr sz="1700" b="1">
-                <a:solidFill>
-                  <a:srgbClr val="1E6FE0"/>
-                </a:solidFill>
-                <a:latin typeface="Segoe UI"/>
-              </a:rPr>
-              <a:t>•  </a:t>
-            </a:r>
-            <a:r>
-              <a:rPr sz="1700" b="0">
-                <a:solidFill>
-                  <a:srgbClr val="4C596B"/>
-                </a:solidFill>
-                <a:latin typeface="Segoe UI"/>
-              </a:rPr>
-              <a:t>Failures now show a reason</a:t>
+              <a:t>Only minified bundles → need source to fully port</a:t>
             </a:r>
           </a:p>
         </p:txBody>
